--- a/week-15/cen429-week-15-sunum.pptx
+++ b/week-15/cen429-week-15-sunum.pptx
@@ -19,30 +19,6 @@
     <p:sldId id="267" r:id="rId19"/>
     <p:sldId id="268" r:id="rId20"/>
     <p:sldId id="269" r:id="rId21"/>
-    <p:sldId id="270" r:id="rId22"/>
-    <p:sldId id="271" r:id="rId23"/>
-    <p:sldId id="272" r:id="rId24"/>
-    <p:sldId id="273" r:id="rId25"/>
-    <p:sldId id="274" r:id="rId26"/>
-    <p:sldId id="275" r:id="rId27"/>
-    <p:sldId id="276" r:id="rId28"/>
-    <p:sldId id="277" r:id="rId29"/>
-    <p:sldId id="278" r:id="rId30"/>
-    <p:sldId id="279" r:id="rId31"/>
-    <p:sldId id="280" r:id="rId32"/>
-    <p:sldId id="281" r:id="rId33"/>
-    <p:sldId id="282" r:id="rId34"/>
-    <p:sldId id="283" r:id="rId35"/>
-    <p:sldId id="284" r:id="rId36"/>
-    <p:sldId id="285" r:id="rId37"/>
-    <p:sldId id="286" r:id="rId38"/>
-    <p:sldId id="287" r:id="rId39"/>
-    <p:sldId id="288" r:id="rId40"/>
-    <p:sldId id="289" r:id="rId41"/>
-    <p:sldId id="290" r:id="rId42"/>
-    <p:sldId id="291" r:id="rId43"/>
-    <p:sldId id="292" r:id="rId44"/>
-    <p:sldId id="293" r:id="rId45"/>
   </p:sldIdLst>
   <p:sldSz cx="12191695" cy="6858000" type="screen4x3"/>
   <p:notesSz cx="6858000" cy="9144000"/>
@@ -540,76 +516,6 @@
           <a:p>
             <a:r>
               <a:t>Final gösterim haftası: her takım güvenlik kılavuzunun tamamını, korumalı uygulamasını ve test sonuçlarını gösterir.</a:t>
-            </a:r>
-          </a:p>
-        </p:txBody>
-      </p:sp>
-      <p:sp>
-        <p:nvSpPr>
-          <p:cNvPr id="4" name="Slide Number Placeholder 3"/>
-          <p:cNvSpPr>
-            <a:spLocks noGrp="1"/>
-          </p:cNvSpPr>
-          <p:nvPr>
-            <p:ph type="sldNum" idx="5" sz="quarter"/>
-          </p:nvPr>
-        </p:nvSpPr>
-        <p:spPr/>
-      </p:sp>
-    </p:spTree>
-  </p:cSld>
-  <p:clrMapOvr>
-    <a:masterClrMapping/>
-  </p:clrMapOvr>
-</p:notes>
-</file>
-
-<file path=ppt/notesSlides/notesSlide2.xml><?xml version="1.0" encoding="utf-8"?>
-<p:notes xmlns:a="http://schemas.openxmlformats.org/drawingml/2006/main" xmlns:p="http://schemas.openxmlformats.org/presentationml/2006/main" xmlns:r="http://schemas.openxmlformats.org/officeDocument/2006/relationships">
-  <p:cSld>
-    <p:spTree>
-      <p:nvGrpSpPr>
-        <p:cNvPr id="1" name=""/>
-        <p:cNvGrpSpPr/>
-        <p:nvPr/>
-      </p:nvGrpSpPr>
-      <p:grpSpPr>
-        <a:xfrm>
-          <a:off x="0" y="0"/>
-          <a:ext cx="0" cy="0"/>
-          <a:chOff x="0" y="0"/>
-          <a:chExt cx="0" cy="0"/>
-        </a:xfrm>
-      </p:grpSpPr>
-      <p:sp>
-        <p:nvSpPr>
-          <p:cNvPr id="2" name="Slide Image Placeholder 1"/>
-          <p:cNvSpPr>
-            <a:spLocks noGrp="1"/>
-          </p:cNvSpPr>
-          <p:nvPr>
-            <p:ph type="sldImg" idx="2"/>
-          </p:nvPr>
-        </p:nvSpPr>
-        <p:spPr/>
-      </p:sp>
-      <p:sp>
-        <p:nvSpPr>
-          <p:cNvPr id="3" name="Notes Placeholder 2"/>
-          <p:cNvSpPr>
-            <a:spLocks noGrp="1"/>
-          </p:cNvSpPr>
-          <p:nvPr>
-            <p:ph type="body" idx="3" sz="quarter"/>
-          </p:nvPr>
-        </p:nvSpPr>
-        <p:spPr/>
-        <p:txBody>
-          <a:bodyPr/>
-          <a:lstStyle/>
-          <a:p>
-            <a:r>
-              <a:t>Final gösteriminde (RAP2) tüm bölümler TAM beklenir; her maddeyi ne kanıtlayacağınızı açıklıyoruz.</a:t>
             </a:r>
           </a:p>
         </p:txBody>
@@ -4023,7 +3929,7 @@
                   <a:srgbClr val="1F2D3A"/>
                 </a:solidFill>
               </a:rPr>
-              <a:t>Bu anahtar nereden türetiliyor, nerede duruyor, ne zaman siliniyor?</a:t>
+              <a:t>Bu anahtar hangi anahtardan türetiliyor, nerede duruyor, ne zaman siliniyor?</a:t>
             </a:r>
           </a:p>
           <a:p>
@@ -4046,7 +3952,7 @@
                   <a:srgbClr val="1F2D3A"/>
                 </a:solidFill>
               </a:rPr>
-              <a:t>Zincir ve ad doğrulaması nerede?</a:t>
+              <a:t>Sertifika zincirinizi nasıl doğruluyorsunuz? Ad denetimi nerede yapılıyor?</a:t>
             </a:r>
           </a:p>
           <a:p>
@@ -4092,7 +3998,7 @@
                   <a:srgbClr val="1F2D3A"/>
                 </a:solidFill>
               </a:rPr>
-              <a:t>Gizlemenin maliyetini ölçtünüz mü?</a:t>
+              <a:t>Gizlemenin maliyetini ölçtünüz mü? Hangi fonksiyonu neden gizlediniz?</a:t>
             </a:r>
           </a:p>
           <a:p>
@@ -4115,7 +4021,7 @@
                   <a:srgbClr val="1F2D3A"/>
                 </a:solidFill>
               </a:rPr>
-              <a:t>Şu "karşılandı" satırının kanıtı nerede?</a:t>
+              <a:t>Uyum matrisinde şu "karşılandı" satırının kanıtı nerede?</a:t>
             </a:r>
           </a:p>
           <a:p>
@@ -4854,14 +4760,48 @@
                   <a:srgbClr val="006D77"/>
                 </a:solidFill>
               </a:rPr>
-              <a:t>S16: plan değil sonuç — şema</a:t>
+              <a:t>Akademik dürüstlük</a:t>
+            </a:r>
+          </a:p>
+        </p:txBody>
+      </p:sp>
+      <p:sp>
+        <p:nvSpPr>
+          <p:cNvPr id="7" name="TextBox 6"/>
+          <p:cNvSpPr txBox="1"/>
+          <p:nvPr/>
+        </p:nvSpPr>
+        <p:spPr>
+          <a:xfrm>
+            <a:off x="640080" y="1325880"/>
+            <a:ext cx="10911535" cy="770128"/>
+          </a:xfrm>
+          <a:prstGeom prst="rect">
+            <a:avLst/>
+          </a:prstGeom>
+          <a:noFill/>
+        </p:spPr>
+        <p:txBody>
+          <a:bodyPr wrap="square" lIns="45720" rIns="45720">
+            <a:spAutoFit/>
+          </a:bodyPr>
+          <a:lstStyle/>
+          <a:p>
+            <a:pPr algn="l"/>
+            <a:r>
+              <a:rPr sz="2000" b="0">
+                <a:solidFill>
+                  <a:srgbClr val="1F2D3A"/>
+                </a:solidFill>
+              </a:rPr>
+              <a:t>İzlencenin "Akademik Dürüstlük" bölümü projede de geçerlidir; teslim edilen her satır açıklanabilmeli, gösterimde takımın her üyesine soru sorulabilir.</a:t>
             </a:r>
           </a:p>
         </p:txBody>
       </p:sp>
       <p:pic>
         <p:nvPicPr>
-          <p:cNvPr id="7" name="Picture 6" descr="h15-04-s16.png"/>
+          <p:cNvPr id="8" name="Picture 7" descr="h15-04-s16.png"/>
           <p:cNvPicPr>
             <a:picLocks noChangeAspect="1"/>
           </p:cNvPicPr>
@@ -4875,8 +4815,8 @@
         </p:blipFill>
         <p:spPr>
           <a:xfrm>
-            <a:off x="2046645" y="1325880"/>
-            <a:ext cx="8098404" cy="3473778"/>
+            <a:off x="1055461" y="2205736"/>
+            <a:ext cx="10080772" cy="3948176"/>
           </a:xfrm>
           <a:prstGeom prst="rect">
             <a:avLst/>
@@ -5067,7 +5007,7 @@
         <p:spPr>
           <a:xfrm>
             <a:off x="640080" y="1325880"/>
-            <a:ext cx="10911535" cy="1173480"/>
+            <a:ext cx="10911535" cy="797560"/>
           </a:xfrm>
           <a:prstGeom prst="rect">
             <a:avLst/>
@@ -5118,19 +5058,65 @@
               <a:t> (gizli bilgi içermediğinden emin olun)</a:t>
             </a:r>
           </a:p>
-          <a:p>
-            <a:pPr>
-              <a:spcAft>
-                <a:spcPts val="300"/>
-              </a:spcAft>
-            </a:pPr>
+        </p:txBody>
+      </p:sp>
+      <p:sp>
+        <p:nvSpPr>
+          <p:cNvPr id="8" name="Rectangle 7"/>
+          <p:cNvSpPr/>
+          <p:nvPr/>
+        </p:nvSpPr>
+        <p:spPr>
+          <a:xfrm>
+            <a:off x="640080" y="2233168"/>
+            <a:ext cx="10911535" cy="934719"/>
+          </a:xfrm>
+          <a:prstGeom prst="rect">
+            <a:avLst/>
+          </a:prstGeom>
+          <a:solidFill>
+            <a:srgbClr val="EEF7F8"/>
+          </a:solidFill>
+          <a:ln>
+            <a:solidFill>
+              <a:srgbClr val="006D77"/>
+            </a:solidFill>
+          </a:ln>
+        </p:spPr>
+        <p:style>
+          <a:lnRef idx="1">
+            <a:schemeClr val="accent1"/>
+          </a:lnRef>
+          <a:fillRef idx="3">
+            <a:schemeClr val="accent1"/>
+          </a:fillRef>
+          <a:effectRef idx="2">
+            <a:schemeClr val="accent1"/>
+          </a:effectRef>
+          <a:fontRef idx="minor">
+            <a:schemeClr val="lt1"/>
+          </a:fontRef>
+        </p:style>
+        <p:txBody>
+          <a:bodyPr rtlCol="0" anchor="ctr" wrap="square" lIns="182880"/>
+          <a:lstStyle/>
+          <a:p>
+            <a:pPr algn="l"/>
+            <a:r>
+              <a:rPr sz="2000" b="0">
+                <a:solidFill>
+                  <a:srgbClr val="1F2D3A"/>
+                </a:solidFill>
+              </a:rPr>
+              <a:t>Finalde </a:t>
+            </a:r>
             <a:r>
               <a:rPr sz="2000" b="1">
                 <a:solidFill>
-                  <a:srgbClr val="006D77"/>
-                </a:solidFill>
-              </a:rPr>
-              <a:t>• </a:t>
+                  <a:srgbClr val="1F2D3A"/>
+                </a:solidFill>
+              </a:rPr>
+              <a:t>sonuç</a:t>
             </a:r>
             <a:r>
               <a:rPr sz="2000" b="0">
@@ -5138,7 +5124,7 @@
                   <a:srgbClr val="1F2D3A"/>
                 </a:solidFill>
               </a:rPr>
-              <a:t>Teslim edilen her satır açıklanabilmeli; her takım üyesine soru sorulabilir</a:t>
+              <a:t> beklenir: her koruma çalışırken gösterilir, her gereksinim kanıtla bağlanır.</a:t>
             </a:r>
           </a:p>
         </p:txBody>
@@ -5293,8 +5279,8 @@
         </p:nvSpPr>
         <p:spPr>
           <a:xfrm>
-            <a:off x="640080" y="548640"/>
-            <a:ext cx="10911535" cy="731520"/>
+            <a:off x="640080" y="2194560"/>
+            <a:ext cx="10911535" cy="1280160"/>
           </a:xfrm>
           <a:prstGeom prst="rect">
             <a:avLst/>
@@ -5302,18 +5288,19 @@
           <a:noFill/>
         </p:spPr>
         <p:txBody>
-          <a:bodyPr wrap="square" lIns="45720" rIns="45720" anchor="ctr">
+          <a:bodyPr wrap="square" lIns="45720" rIns="45720">
             <a:spAutoFit/>
           </a:bodyPr>
           <a:lstStyle/>
           <a:p>
-            <a:r>
-              <a:rPr sz="3000" b="1">
+            <a:pPr algn="ctr"/>
+            <a:r>
+              <a:rPr sz="4000" b="1">
                 <a:solidFill>
                   <a:srgbClr val="006D77"/>
                 </a:solidFill>
               </a:rPr>
-              <a:t>Final dönemi</a:t>
+              <a:t>Bir sonraki hafta</a:t>
             </a:r>
           </a:p>
         </p:txBody>
@@ -5326,7 +5313,7 @@
         </p:nvSpPr>
         <p:spPr>
           <a:xfrm>
-            <a:off x="640080" y="1325880"/>
+            <a:off x="640080" y="3566160"/>
             <a:ext cx="10911535" cy="439928"/>
           </a:xfrm>
           <a:prstGeom prst="rect">
@@ -5340,7 +5327,7 @@
           </a:bodyPr>
           <a:lstStyle/>
           <a:p>
-            <a:pPr algn="l"/>
+            <a:pPr algn="ctr"/>
             <a:r>
               <a:rPr sz="2000" b="1">
                 <a:solidFill>
@@ -5360,8 +5347,8 @@
         </p:nvSpPr>
         <p:spPr>
           <a:xfrm>
-            <a:off x="640080" y="1875536"/>
-            <a:ext cx="10911535" cy="843280"/>
+            <a:off x="640080" y="4051808"/>
+            <a:ext cx="10911535" cy="770128"/>
           </a:xfrm>
           <a:prstGeom prst="rect">
             <a:avLst/>
@@ -5374,1321 +5361,14 @@
           </a:bodyPr>
           <a:lstStyle/>
           <a:p>
-            <a:pPr>
-              <a:spcAft>
-                <a:spcPts val="300"/>
-              </a:spcAft>
-            </a:pPr>
-            <a:r>
-              <a:rPr sz="2000" b="1">
-                <a:solidFill>
-                  <a:srgbClr val="006D77"/>
-                </a:solidFill>
-              </a:rPr>
-              <a:t>• </a:t>
-            </a:r>
+            <a:pPr algn="ctr"/>
             <a:r>
               <a:rPr sz="2000" b="0">
                 <a:solidFill>
                   <a:srgbClr val="1F2D3A"/>
                 </a:solidFill>
               </a:rPr>
-              <a:t>Kapsam: 9–14. haftalar</a:t>
-            </a:r>
-          </a:p>
-          <a:p>
-            <a:pPr>
-              <a:spcAft>
-                <a:spcPts val="300"/>
-              </a:spcAft>
-            </a:pPr>
-            <a:r>
-              <a:rPr sz="2000" b="1">
-                <a:solidFill>
-                  <a:srgbClr val="006D77"/>
-                </a:solidFill>
-              </a:rPr>
-              <a:t>• </a:t>
-            </a:r>
-            <a:r>
-              <a:rPr sz="2000" b="0">
-                <a:solidFill>
-                  <a:srgbClr val="1F2D3A"/>
-                </a:solidFill>
-              </a:rPr>
-              <a:t>Çalışma rehberi: 16. hafta sayfası</a:t>
-            </a:r>
-          </a:p>
-        </p:txBody>
-      </p:sp>
-    </p:spTree>
-  </p:cSld>
-  <p:clrMapOvr>
-    <a:masterClrMapping/>
-  </p:clrMapOvr>
-</p:sld>
-</file>
-
-<file path=ppt/slides/slide15.xml><?xml version="1.0" encoding="utf-8"?>
-<p:sld xmlns:a="http://schemas.openxmlformats.org/drawingml/2006/main" xmlns:p="http://schemas.openxmlformats.org/presentationml/2006/main" xmlns:r="http://schemas.openxmlformats.org/officeDocument/2006/relationships">
-  <p:cSld>
-    <p:bg>
-      <p:bgPr>
-        <a:solidFill>
-          <a:srgbClr val="006D77"/>
-        </a:solidFill>
-        <a:effectLst/>
-      </p:bgPr>
-    </p:bg>
-    <p:spTree>
-      <p:nvGrpSpPr>
-        <p:cNvPr id="1" name=""/>
-        <p:cNvGrpSpPr/>
-        <p:nvPr/>
-      </p:nvGrpSpPr>
-      <p:grpSpPr/>
-      <p:sp>
-        <p:nvSpPr>
-          <p:cNvPr id="2" name="TextBox 1"/>
-          <p:cNvSpPr txBox="1"/>
-          <p:nvPr/>
-        </p:nvSpPr>
-        <p:spPr>
-          <a:xfrm>
-            <a:off x="1051560" y="182880"/>
-            <a:ext cx="7315200" cy="320040"/>
-          </a:xfrm>
-          <a:prstGeom prst="rect">
-            <a:avLst/>
-          </a:prstGeom>
-          <a:noFill/>
-        </p:spPr>
-        <p:txBody>
-          <a:bodyPr wrap="square" lIns="45720" rIns="45720">
-            <a:spAutoFit/>
-          </a:bodyPr>
-          <a:lstStyle/>
-          <a:p>
-            <a:r>
-              <a:rPr sz="1100" b="0">
-                <a:solidFill>
-                  <a:srgbClr val="D8F0F2"/>
-                </a:solidFill>
-              </a:rPr>
-              <a:t>CEN429 Güvenli Programlama · Hafta 15</a:t>
-            </a:r>
-          </a:p>
-        </p:txBody>
-      </p:sp>
-      <p:sp>
-        <p:nvSpPr>
-          <p:cNvPr id="3" name="TextBox 2"/>
-          <p:cNvSpPr txBox="1"/>
-          <p:nvPr/>
-        </p:nvSpPr>
-        <p:spPr>
-          <a:xfrm>
-            <a:off x="640080" y="6446520"/>
-            <a:ext cx="7315200" cy="274320"/>
-          </a:xfrm>
-          <a:prstGeom prst="rect">
-            <a:avLst/>
-          </a:prstGeom>
-          <a:noFill/>
-        </p:spPr>
-        <p:txBody>
-          <a:bodyPr wrap="square" lIns="45720" rIns="45720">
-            <a:spAutoFit/>
-          </a:bodyPr>
-          <a:lstStyle/>
-          <a:p>
-            <a:r>
-              <a:rPr sz="1000" b="0">
-                <a:solidFill>
-                  <a:srgbClr val="D8F0F2"/>
-                </a:solidFill>
-              </a:rPr>
-              <a:t>RTEÜ Bilgisayar Mühendisliği · 2026-2027 Güz</a:t>
-            </a:r>
-          </a:p>
-        </p:txBody>
-      </p:sp>
-      <p:sp>
-        <p:nvSpPr>
-          <p:cNvPr id="4" name="TextBox 3"/>
-          <p:cNvSpPr txBox="1"/>
-          <p:nvPr/>
-        </p:nvSpPr>
-        <p:spPr>
-          <a:xfrm>
-            <a:off x="10637215" y="6446520"/>
-            <a:ext cx="914400" cy="274320"/>
-          </a:xfrm>
-          <a:prstGeom prst="rect">
-            <a:avLst/>
-          </a:prstGeom>
-          <a:noFill/>
-        </p:spPr>
-        <p:txBody>
-          <a:bodyPr wrap="square" lIns="45720" rIns="45720">
-            <a:spAutoFit/>
-          </a:bodyPr>
-          <a:lstStyle/>
-          <a:p>
-            <a:pPr algn="r"/>
-            <a:r>
-              <a:rPr sz="1000" b="0">
-                <a:solidFill>
-                  <a:srgbClr val="D8F0F2"/>
-                </a:solidFill>
-              </a:rPr>
-              <a:t>15</a:t>
-            </a:r>
-          </a:p>
-        </p:txBody>
-      </p:sp>
-      <p:sp>
-        <p:nvSpPr>
-          <p:cNvPr id="5" name="TextBox 4"/>
-          <p:cNvSpPr txBox="1"/>
-          <p:nvPr/>
-        </p:nvSpPr>
-        <p:spPr>
-          <a:xfrm>
-            <a:off x="640080" y="2743200"/>
-            <a:ext cx="10911535" cy="1280160"/>
-          </a:xfrm>
-          <a:prstGeom prst="rect">
-            <a:avLst/>
-          </a:prstGeom>
-          <a:noFill/>
-        </p:spPr>
-        <p:txBody>
-          <a:bodyPr wrap="square" lIns="45720" rIns="45720">
-            <a:spAutoFit/>
-          </a:bodyPr>
-          <a:lstStyle/>
-          <a:p>
-            <a:pPr algn="l"/>
-            <a:r>
-              <a:rPr sz="4000" b="1">
-                <a:solidFill>
-                  <a:srgbClr val="FFFFFF"/>
-                </a:solidFill>
-              </a:rPr>
-              <a:t>Ek · Final rubriği madde madde</a:t>
-            </a:r>
-          </a:p>
-        </p:txBody>
-      </p:sp>
-    </p:spTree>
-  </p:cSld>
-  <p:clrMapOvr>
-    <a:masterClrMapping/>
-  </p:clrMapOvr>
-</p:sld>
-</file>
-
-<file path=ppt/slides/slide16.xml><?xml version="1.0" encoding="utf-8"?>
-<p:sld xmlns:a="http://schemas.openxmlformats.org/drawingml/2006/main" xmlns:p="http://schemas.openxmlformats.org/presentationml/2006/main" xmlns:r="http://schemas.openxmlformats.org/officeDocument/2006/relationships">
-  <p:cSld>
-    <p:spTree>
-      <p:nvGrpSpPr>
-        <p:cNvPr id="1" name=""/>
-        <p:cNvGrpSpPr/>
-        <p:nvPr/>
-      </p:nvGrpSpPr>
-      <p:grpSpPr/>
-      <p:pic>
-        <p:nvPicPr>
-          <p:cNvPr id="2" name="Picture 1" descr="rteu_logo_kucuk.jpg"/>
-          <p:cNvPicPr>
-            <a:picLocks noChangeAspect="1"/>
-          </p:cNvPicPr>
-          <p:nvPr/>
-        </p:nvPicPr>
-        <p:blipFill>
-          <a:blip r:embed="rId2"/>
-          <a:stretch>
-            <a:fillRect/>
-          </a:stretch>
-        </p:blipFill>
-        <p:spPr>
-          <a:xfrm>
-            <a:off x="640080" y="164592"/>
-            <a:ext cx="242773" cy="329184"/>
-          </a:xfrm>
-          <a:prstGeom prst="rect">
-            <a:avLst/>
-          </a:prstGeom>
-        </p:spPr>
-      </p:pic>
-      <p:sp>
-        <p:nvSpPr>
-          <p:cNvPr id="3" name="TextBox 2"/>
-          <p:cNvSpPr txBox="1"/>
-          <p:nvPr/>
-        </p:nvSpPr>
-        <p:spPr>
-          <a:xfrm>
-            <a:off x="1051560" y="182880"/>
-            <a:ext cx="7315200" cy="320040"/>
-          </a:xfrm>
-          <a:prstGeom prst="rect">
-            <a:avLst/>
-          </a:prstGeom>
-          <a:noFill/>
-        </p:spPr>
-        <p:txBody>
-          <a:bodyPr wrap="square" lIns="45720" rIns="45720">
-            <a:spAutoFit/>
-          </a:bodyPr>
-          <a:lstStyle/>
-          <a:p>
-            <a:r>
-              <a:rPr sz="1100" b="0">
-                <a:solidFill>
-                  <a:srgbClr val="5B6770"/>
-                </a:solidFill>
-              </a:rPr>
-              <a:t>CEN429 Güvenli Programlama · Hafta 15</a:t>
-            </a:r>
-          </a:p>
-        </p:txBody>
-      </p:sp>
-      <p:sp>
-        <p:nvSpPr>
-          <p:cNvPr id="4" name="TextBox 3"/>
-          <p:cNvSpPr txBox="1"/>
-          <p:nvPr/>
-        </p:nvSpPr>
-        <p:spPr>
-          <a:xfrm>
-            <a:off x="640080" y="6446520"/>
-            <a:ext cx="7315200" cy="274320"/>
-          </a:xfrm>
-          <a:prstGeom prst="rect">
-            <a:avLst/>
-          </a:prstGeom>
-          <a:noFill/>
-        </p:spPr>
-        <p:txBody>
-          <a:bodyPr wrap="square" lIns="45720" rIns="45720">
-            <a:spAutoFit/>
-          </a:bodyPr>
-          <a:lstStyle/>
-          <a:p>
-            <a:r>
-              <a:rPr sz="1000" b="0">
-                <a:solidFill>
-                  <a:srgbClr val="5B6770"/>
-                </a:solidFill>
-              </a:rPr>
-              <a:t>RTEÜ Bilgisayar Mühendisliği · 2026-2027 Güz</a:t>
-            </a:r>
-          </a:p>
-        </p:txBody>
-      </p:sp>
-      <p:sp>
-        <p:nvSpPr>
-          <p:cNvPr id="5" name="TextBox 4"/>
-          <p:cNvSpPr txBox="1"/>
-          <p:nvPr/>
-        </p:nvSpPr>
-        <p:spPr>
-          <a:xfrm>
-            <a:off x="10637215" y="6446520"/>
-            <a:ext cx="914400" cy="274320"/>
-          </a:xfrm>
-          <a:prstGeom prst="rect">
-            <a:avLst/>
-          </a:prstGeom>
-          <a:noFill/>
-        </p:spPr>
-        <p:txBody>
-          <a:bodyPr wrap="square" lIns="45720" rIns="45720">
-            <a:spAutoFit/>
-          </a:bodyPr>
-          <a:lstStyle/>
-          <a:p>
-            <a:pPr algn="r"/>
-            <a:r>
-              <a:rPr sz="1000" b="0">
-                <a:solidFill>
-                  <a:srgbClr val="5B6770"/>
-                </a:solidFill>
-              </a:rPr>
-              <a:t>16</a:t>
-            </a:r>
-          </a:p>
-        </p:txBody>
-      </p:sp>
-      <p:sp>
-        <p:nvSpPr>
-          <p:cNvPr id="6" name="TextBox 5"/>
-          <p:cNvSpPr txBox="1"/>
-          <p:nvPr/>
-        </p:nvSpPr>
-        <p:spPr>
-          <a:xfrm>
-            <a:off x="640080" y="548640"/>
-            <a:ext cx="10911535" cy="731520"/>
-          </a:xfrm>
-          <a:prstGeom prst="rect">
-            <a:avLst/>
-          </a:prstGeom>
-          <a:noFill/>
-        </p:spPr>
-        <p:txBody>
-          <a:bodyPr wrap="square" lIns="45720" rIns="45720" anchor="ctr">
-            <a:spAutoFit/>
-          </a:bodyPr>
-          <a:lstStyle/>
-          <a:p>
-            <a:r>
-              <a:rPr sz="3000" b="1">
-                <a:solidFill>
-                  <a:srgbClr val="006D77"/>
-                </a:solidFill>
-              </a:rPr>
-              <a:t>Final neyi ölçer?</a:t>
-            </a:r>
-          </a:p>
-        </p:txBody>
-      </p:sp>
-      <p:sp>
-        <p:nvSpPr>
-          <p:cNvPr id="7" name="TextBox 6"/>
-          <p:cNvSpPr txBox="1"/>
-          <p:nvPr/>
-        </p:nvSpPr>
-        <p:spPr>
-          <a:xfrm>
-            <a:off x="640080" y="1325880"/>
-            <a:ext cx="10911535" cy="439928"/>
-          </a:xfrm>
-          <a:prstGeom prst="rect">
-            <a:avLst/>
-          </a:prstGeom>
-          <a:noFill/>
-        </p:spPr>
-        <p:txBody>
-          <a:bodyPr wrap="square" lIns="45720" rIns="45720">
-            <a:spAutoFit/>
-          </a:bodyPr>
-          <a:lstStyle/>
-          <a:p>
-            <a:pPr algn="l"/>
-            <a:r>
-              <a:rPr sz="2000" b="0">
-                <a:solidFill>
-                  <a:srgbClr val="1F2D3A"/>
-                </a:solidFill>
-              </a:rPr>
-              <a:t>Final gösterimi projenizin </a:t>
-            </a:r>
-            <a:r>
-              <a:rPr sz="2000" b="1">
-                <a:solidFill>
-                  <a:srgbClr val="1F2D3A"/>
-                </a:solidFill>
-              </a:rPr>
-              <a:t>tamamını</a:t>
-            </a:r>
-            <a:r>
-              <a:rPr sz="2000" b="0">
-                <a:solidFill>
-                  <a:srgbClr val="1F2D3A"/>
-                </a:solidFill>
-              </a:rPr>
-              <a:t> ölçer:</a:t>
-            </a:r>
-          </a:p>
-        </p:txBody>
-      </p:sp>
-      <p:sp>
-        <p:nvSpPr>
-          <p:cNvPr id="8" name="TextBox 7"/>
-          <p:cNvSpPr txBox="1"/>
-          <p:nvPr/>
-        </p:nvSpPr>
-        <p:spPr>
-          <a:xfrm>
-            <a:off x="640080" y="1875536"/>
-            <a:ext cx="10911535" cy="1595120"/>
-          </a:xfrm>
-          <a:prstGeom prst="rect">
-            <a:avLst/>
-          </a:prstGeom>
-          <a:noFill/>
-        </p:spPr>
-        <p:txBody>
-          <a:bodyPr wrap="square" lIns="45720" rIns="45720">
-            <a:spAutoFit/>
-          </a:bodyPr>
-          <a:lstStyle/>
-          <a:p>
-            <a:pPr>
-              <a:spcAft>
-                <a:spcPts val="300"/>
-              </a:spcAft>
-            </a:pPr>
-            <a:r>
-              <a:rPr sz="2000" b="1">
-                <a:solidFill>
-                  <a:srgbClr val="006D77"/>
-                </a:solidFill>
-              </a:rPr>
-              <a:t>• </a:t>
-            </a:r>
-            <a:r>
-              <a:rPr sz="2000" b="0">
-                <a:solidFill>
-                  <a:srgbClr val="1F2D3A"/>
-                </a:solidFill>
-              </a:rPr>
-              <a:t>kripto, güvenli iletişim</a:t>
-            </a:r>
-          </a:p>
-          <a:p>
-            <a:pPr>
-              <a:spcAft>
-                <a:spcPts val="300"/>
-              </a:spcAft>
-            </a:pPr>
-            <a:r>
-              <a:rPr sz="2000" b="1">
-                <a:solidFill>
-                  <a:srgbClr val="006D77"/>
-                </a:solidFill>
-              </a:rPr>
-              <a:t>• </a:t>
-            </a:r>
-            <a:r>
-              <a:rPr sz="2000" b="0">
-                <a:solidFill>
-                  <a:srgbClr val="1F2D3A"/>
-                </a:solidFill>
-              </a:rPr>
-              <a:t>varlık yönetimi (tam)</a:t>
-            </a:r>
-          </a:p>
-          <a:p>
-            <a:pPr>
-              <a:spcAft>
-                <a:spcPts val="300"/>
-              </a:spcAft>
-            </a:pPr>
-            <a:r>
-              <a:rPr sz="2000" b="1">
-                <a:solidFill>
-                  <a:srgbClr val="006D77"/>
-                </a:solidFill>
-              </a:rPr>
-              <a:t>• </a:t>
-            </a:r>
-            <a:r>
-              <a:rPr sz="2000" b="0">
-                <a:solidFill>
-                  <a:srgbClr val="1F2D3A"/>
-                </a:solidFill>
-              </a:rPr>
-              <a:t>ileri ikili korumalar</a:t>
-            </a:r>
-          </a:p>
-          <a:p>
-            <a:pPr>
-              <a:spcAft>
-                <a:spcPts val="300"/>
-              </a:spcAft>
-            </a:pPr>
-            <a:r>
-              <a:rPr sz="2000" b="1">
-                <a:solidFill>
-                  <a:srgbClr val="006D77"/>
-                </a:solidFill>
-              </a:rPr>
-              <a:t>• </a:t>
-            </a:r>
-            <a:r>
-              <a:rPr sz="2000" b="0">
-                <a:solidFill>
-                  <a:srgbClr val="1F2D3A"/>
-                </a:solidFill>
-              </a:rPr>
-              <a:t>test </a:t>
-            </a:r>
-            <a:r>
-              <a:rPr sz="2000" b="1">
-                <a:solidFill>
-                  <a:srgbClr val="1F2D3A"/>
-                </a:solidFill>
-              </a:rPr>
-              <a:t>sonuçları</a:t>
-            </a:r>
-            <a:r>
-              <a:rPr sz="2000" b="0">
-                <a:solidFill>
-                  <a:srgbClr val="1F2D3A"/>
-                </a:solidFill>
-              </a:rPr>
-              <a:t>, standartlar</a:t>
-            </a:r>
-          </a:p>
-        </p:txBody>
-      </p:sp>
-    </p:spTree>
-  </p:cSld>
-  <p:clrMapOvr>
-    <a:masterClrMapping/>
-  </p:clrMapOvr>
-</p:sld>
-</file>
-
-<file path=ppt/slides/slide17.xml><?xml version="1.0" encoding="utf-8"?>
-<p:sld xmlns:a="http://schemas.openxmlformats.org/drawingml/2006/main" xmlns:p="http://schemas.openxmlformats.org/presentationml/2006/main" xmlns:r="http://schemas.openxmlformats.org/officeDocument/2006/relationships">
-  <p:cSld>
-    <p:spTree>
-      <p:nvGrpSpPr>
-        <p:cNvPr id="1" name=""/>
-        <p:cNvGrpSpPr/>
-        <p:nvPr/>
-      </p:nvGrpSpPr>
-      <p:grpSpPr/>
-      <p:pic>
-        <p:nvPicPr>
-          <p:cNvPr id="2" name="Picture 1" descr="rteu_logo_kucuk.jpg"/>
-          <p:cNvPicPr>
-            <a:picLocks noChangeAspect="1"/>
-          </p:cNvPicPr>
-          <p:nvPr/>
-        </p:nvPicPr>
-        <p:blipFill>
-          <a:blip r:embed="rId2"/>
-          <a:stretch>
-            <a:fillRect/>
-          </a:stretch>
-        </p:blipFill>
-        <p:spPr>
-          <a:xfrm>
-            <a:off x="640080" y="164592"/>
-            <a:ext cx="242773" cy="329184"/>
-          </a:xfrm>
-          <a:prstGeom prst="rect">
-            <a:avLst/>
-          </a:prstGeom>
-        </p:spPr>
-      </p:pic>
-      <p:sp>
-        <p:nvSpPr>
-          <p:cNvPr id="3" name="TextBox 2"/>
-          <p:cNvSpPr txBox="1"/>
-          <p:nvPr/>
-        </p:nvSpPr>
-        <p:spPr>
-          <a:xfrm>
-            <a:off x="1051560" y="182880"/>
-            <a:ext cx="7315200" cy="320040"/>
-          </a:xfrm>
-          <a:prstGeom prst="rect">
-            <a:avLst/>
-          </a:prstGeom>
-          <a:noFill/>
-        </p:spPr>
-        <p:txBody>
-          <a:bodyPr wrap="square" lIns="45720" rIns="45720">
-            <a:spAutoFit/>
-          </a:bodyPr>
-          <a:lstStyle/>
-          <a:p>
-            <a:r>
-              <a:rPr sz="1100" b="0">
-                <a:solidFill>
-                  <a:srgbClr val="5B6770"/>
-                </a:solidFill>
-              </a:rPr>
-              <a:t>CEN429 Güvenli Programlama · Hafta 15</a:t>
-            </a:r>
-          </a:p>
-        </p:txBody>
-      </p:sp>
-      <p:sp>
-        <p:nvSpPr>
-          <p:cNvPr id="4" name="TextBox 3"/>
-          <p:cNvSpPr txBox="1"/>
-          <p:nvPr/>
-        </p:nvSpPr>
-        <p:spPr>
-          <a:xfrm>
-            <a:off x="640080" y="6446520"/>
-            <a:ext cx="7315200" cy="274320"/>
-          </a:xfrm>
-          <a:prstGeom prst="rect">
-            <a:avLst/>
-          </a:prstGeom>
-          <a:noFill/>
-        </p:spPr>
-        <p:txBody>
-          <a:bodyPr wrap="square" lIns="45720" rIns="45720">
-            <a:spAutoFit/>
-          </a:bodyPr>
-          <a:lstStyle/>
-          <a:p>
-            <a:r>
-              <a:rPr sz="1000" b="0">
-                <a:solidFill>
-                  <a:srgbClr val="5B6770"/>
-                </a:solidFill>
-              </a:rPr>
-              <a:t>RTEÜ Bilgisayar Mühendisliği · 2026-2027 Güz</a:t>
-            </a:r>
-          </a:p>
-        </p:txBody>
-      </p:sp>
-      <p:sp>
-        <p:nvSpPr>
-          <p:cNvPr id="5" name="TextBox 4"/>
-          <p:cNvSpPr txBox="1"/>
-          <p:nvPr/>
-        </p:nvSpPr>
-        <p:spPr>
-          <a:xfrm>
-            <a:off x="10637215" y="6446520"/>
-            <a:ext cx="914400" cy="274320"/>
-          </a:xfrm>
-          <a:prstGeom prst="rect">
-            <a:avLst/>
-          </a:prstGeom>
-          <a:noFill/>
-        </p:spPr>
-        <p:txBody>
-          <a:bodyPr wrap="square" lIns="45720" rIns="45720">
-            <a:spAutoFit/>
-          </a:bodyPr>
-          <a:lstStyle/>
-          <a:p>
-            <a:pPr algn="r"/>
-            <a:r>
-              <a:rPr sz="1000" b="0">
-                <a:solidFill>
-                  <a:srgbClr val="5B6770"/>
-                </a:solidFill>
-              </a:rPr>
-              <a:t>17</a:t>
-            </a:r>
-          </a:p>
-        </p:txBody>
-      </p:sp>
-      <p:sp>
-        <p:nvSpPr>
-          <p:cNvPr id="6" name="TextBox 5"/>
-          <p:cNvSpPr txBox="1"/>
-          <p:nvPr/>
-        </p:nvSpPr>
-        <p:spPr>
-          <a:xfrm>
-            <a:off x="640080" y="548640"/>
-            <a:ext cx="10911535" cy="731520"/>
-          </a:xfrm>
-          <a:prstGeom prst="rect">
-            <a:avLst/>
-          </a:prstGeom>
-          <a:noFill/>
-        </p:spPr>
-        <p:txBody>
-          <a:bodyPr wrap="square" lIns="45720" rIns="45720" anchor="ctr">
-            <a:spAutoFit/>
-          </a:bodyPr>
-          <a:lstStyle/>
-          <a:p>
-            <a:r>
-              <a:rPr sz="3000" b="1">
-                <a:solidFill>
-                  <a:srgbClr val="006D77"/>
-                </a:solidFill>
-              </a:rPr>
-              <a:t>Madde · kriptografi</a:t>
-            </a:r>
-          </a:p>
-        </p:txBody>
-      </p:sp>
-      <p:sp>
-        <p:nvSpPr>
-          <p:cNvPr id="7" name="TextBox 6"/>
-          <p:cNvSpPr txBox="1"/>
-          <p:nvPr/>
-        </p:nvSpPr>
-        <p:spPr>
-          <a:xfrm>
-            <a:off x="640080" y="1325880"/>
-            <a:ext cx="10911535" cy="843280"/>
-          </a:xfrm>
-          <a:prstGeom prst="rect">
-            <a:avLst/>
-          </a:prstGeom>
-          <a:noFill/>
-        </p:spPr>
-        <p:txBody>
-          <a:bodyPr wrap="square" lIns="45720" rIns="45720">
-            <a:spAutoFit/>
-          </a:bodyPr>
-          <a:lstStyle/>
-          <a:p>
-            <a:pPr>
-              <a:spcAft>
-                <a:spcPts val="300"/>
-              </a:spcAft>
-            </a:pPr>
-            <a:r>
-              <a:rPr sz="2000" b="1">
-                <a:solidFill>
-                  <a:srgbClr val="006D77"/>
-                </a:solidFill>
-              </a:rPr>
-              <a:t>• </a:t>
-            </a:r>
-            <a:r>
-              <a:rPr sz="2000" b="0">
-                <a:solidFill>
-                  <a:srgbClr val="1F2D3A"/>
-                </a:solidFill>
-              </a:rPr>
-              <a:t>Algoritma envanteri, anahtar yaşam döngüsü.</a:t>
-            </a:r>
-          </a:p>
-          <a:p>
-            <a:pPr>
-              <a:spcAft>
-                <a:spcPts val="300"/>
-              </a:spcAft>
-            </a:pPr>
-            <a:r>
-              <a:rPr sz="2000" b="1">
-                <a:solidFill>
-                  <a:srgbClr val="006D77"/>
-                </a:solidFill>
-              </a:rPr>
-              <a:t>• </a:t>
-            </a:r>
-            <a:r>
-              <a:rPr sz="2000" b="1">
-                <a:solidFill>
-                  <a:srgbClr val="1F2D3A"/>
-                </a:solidFill>
-              </a:rPr>
-              <a:t>Kanıt:</a:t>
-            </a:r>
-            <a:r>
-              <a:rPr sz="2000" b="0">
-                <a:solidFill>
-                  <a:srgbClr val="1F2D3A"/>
-                </a:solidFill>
-              </a:rPr>
-              <a:t> S8 + testler.</a:t>
-            </a:r>
-          </a:p>
-        </p:txBody>
-      </p:sp>
-    </p:spTree>
-  </p:cSld>
-  <p:clrMapOvr>
-    <a:masterClrMapping/>
-  </p:clrMapOvr>
-</p:sld>
-</file>
-
-<file path=ppt/slides/slide18.xml><?xml version="1.0" encoding="utf-8"?>
-<p:sld xmlns:a="http://schemas.openxmlformats.org/drawingml/2006/main" xmlns:p="http://schemas.openxmlformats.org/presentationml/2006/main" xmlns:r="http://schemas.openxmlformats.org/officeDocument/2006/relationships">
-  <p:cSld>
-    <p:spTree>
-      <p:nvGrpSpPr>
-        <p:cNvPr id="1" name=""/>
-        <p:cNvGrpSpPr/>
-        <p:nvPr/>
-      </p:nvGrpSpPr>
-      <p:grpSpPr/>
-      <p:pic>
-        <p:nvPicPr>
-          <p:cNvPr id="2" name="Picture 1" descr="rteu_logo_kucuk.jpg"/>
-          <p:cNvPicPr>
-            <a:picLocks noChangeAspect="1"/>
-          </p:cNvPicPr>
-          <p:nvPr/>
-        </p:nvPicPr>
-        <p:blipFill>
-          <a:blip r:embed="rId2"/>
-          <a:stretch>
-            <a:fillRect/>
-          </a:stretch>
-        </p:blipFill>
-        <p:spPr>
-          <a:xfrm>
-            <a:off x="640080" y="164592"/>
-            <a:ext cx="242773" cy="329184"/>
-          </a:xfrm>
-          <a:prstGeom prst="rect">
-            <a:avLst/>
-          </a:prstGeom>
-        </p:spPr>
-      </p:pic>
-      <p:sp>
-        <p:nvSpPr>
-          <p:cNvPr id="3" name="TextBox 2"/>
-          <p:cNvSpPr txBox="1"/>
-          <p:nvPr/>
-        </p:nvSpPr>
-        <p:spPr>
-          <a:xfrm>
-            <a:off x="1051560" y="182880"/>
-            <a:ext cx="7315200" cy="320040"/>
-          </a:xfrm>
-          <a:prstGeom prst="rect">
-            <a:avLst/>
-          </a:prstGeom>
-          <a:noFill/>
-        </p:spPr>
-        <p:txBody>
-          <a:bodyPr wrap="square" lIns="45720" rIns="45720">
-            <a:spAutoFit/>
-          </a:bodyPr>
-          <a:lstStyle/>
-          <a:p>
-            <a:r>
-              <a:rPr sz="1100" b="0">
-                <a:solidFill>
-                  <a:srgbClr val="5B6770"/>
-                </a:solidFill>
-              </a:rPr>
-              <a:t>CEN429 Güvenli Programlama · Hafta 15</a:t>
-            </a:r>
-          </a:p>
-        </p:txBody>
-      </p:sp>
-      <p:sp>
-        <p:nvSpPr>
-          <p:cNvPr id="4" name="TextBox 3"/>
-          <p:cNvSpPr txBox="1"/>
-          <p:nvPr/>
-        </p:nvSpPr>
-        <p:spPr>
-          <a:xfrm>
-            <a:off x="640080" y="6446520"/>
-            <a:ext cx="7315200" cy="274320"/>
-          </a:xfrm>
-          <a:prstGeom prst="rect">
-            <a:avLst/>
-          </a:prstGeom>
-          <a:noFill/>
-        </p:spPr>
-        <p:txBody>
-          <a:bodyPr wrap="square" lIns="45720" rIns="45720">
-            <a:spAutoFit/>
-          </a:bodyPr>
-          <a:lstStyle/>
-          <a:p>
-            <a:r>
-              <a:rPr sz="1000" b="0">
-                <a:solidFill>
-                  <a:srgbClr val="5B6770"/>
-                </a:solidFill>
-              </a:rPr>
-              <a:t>RTEÜ Bilgisayar Mühendisliği · 2026-2027 Güz</a:t>
-            </a:r>
-          </a:p>
-        </p:txBody>
-      </p:sp>
-      <p:sp>
-        <p:nvSpPr>
-          <p:cNvPr id="5" name="TextBox 4"/>
-          <p:cNvSpPr txBox="1"/>
-          <p:nvPr/>
-        </p:nvSpPr>
-        <p:spPr>
-          <a:xfrm>
-            <a:off x="10637215" y="6446520"/>
-            <a:ext cx="914400" cy="274320"/>
-          </a:xfrm>
-          <a:prstGeom prst="rect">
-            <a:avLst/>
-          </a:prstGeom>
-          <a:noFill/>
-        </p:spPr>
-        <p:txBody>
-          <a:bodyPr wrap="square" lIns="45720" rIns="45720">
-            <a:spAutoFit/>
-          </a:bodyPr>
-          <a:lstStyle/>
-          <a:p>
-            <a:pPr algn="r"/>
-            <a:r>
-              <a:rPr sz="1000" b="0">
-                <a:solidFill>
-                  <a:srgbClr val="5B6770"/>
-                </a:solidFill>
-              </a:rPr>
-              <a:t>18</a:t>
-            </a:r>
-          </a:p>
-        </p:txBody>
-      </p:sp>
-      <p:sp>
-        <p:nvSpPr>
-          <p:cNvPr id="6" name="TextBox 5"/>
-          <p:cNvSpPr txBox="1"/>
-          <p:nvPr/>
-        </p:nvSpPr>
-        <p:spPr>
-          <a:xfrm>
-            <a:off x="640080" y="548640"/>
-            <a:ext cx="10911535" cy="731520"/>
-          </a:xfrm>
-          <a:prstGeom prst="rect">
-            <a:avLst/>
-          </a:prstGeom>
-          <a:noFill/>
-        </p:spPr>
-        <p:txBody>
-          <a:bodyPr wrap="square" lIns="45720" rIns="45720" anchor="ctr">
-            <a:spAutoFit/>
-          </a:bodyPr>
-          <a:lstStyle/>
-          <a:p>
-            <a:r>
-              <a:rPr sz="3000" b="1">
-                <a:solidFill>
-                  <a:srgbClr val="006D77"/>
-                </a:solidFill>
-              </a:rPr>
-              <a:t>Madde · güvenli iletişim</a:t>
-            </a:r>
-          </a:p>
-        </p:txBody>
-      </p:sp>
-      <p:sp>
-        <p:nvSpPr>
-          <p:cNvPr id="7" name="TextBox 6"/>
-          <p:cNvSpPr txBox="1"/>
-          <p:nvPr/>
-        </p:nvSpPr>
-        <p:spPr>
-          <a:xfrm>
-            <a:off x="640080" y="1325880"/>
-            <a:ext cx="10911535" cy="843280"/>
-          </a:xfrm>
-          <a:prstGeom prst="rect">
-            <a:avLst/>
-          </a:prstGeom>
-          <a:noFill/>
-        </p:spPr>
-        <p:txBody>
-          <a:bodyPr wrap="square" lIns="45720" rIns="45720">
-            <a:spAutoFit/>
-          </a:bodyPr>
-          <a:lstStyle/>
-          <a:p>
-            <a:pPr>
-              <a:spcAft>
-                <a:spcPts val="300"/>
-              </a:spcAft>
-            </a:pPr>
-            <a:r>
-              <a:rPr sz="2000" b="1">
-                <a:solidFill>
-                  <a:srgbClr val="006D77"/>
-                </a:solidFill>
-              </a:rPr>
-              <a:t>• </a:t>
-            </a:r>
-            <a:r>
-              <a:rPr sz="2000" b="0">
-                <a:solidFill>
-                  <a:srgbClr val="1F2D3A"/>
-                </a:solidFill>
-              </a:rPr>
-              <a:t>TLS, sabitleme, mesaj düzeyi.</a:t>
-            </a:r>
-          </a:p>
-          <a:p>
-            <a:pPr>
-              <a:spcAft>
-                <a:spcPts val="300"/>
-              </a:spcAft>
-            </a:pPr>
-            <a:r>
-              <a:rPr sz="2000" b="1">
-                <a:solidFill>
-                  <a:srgbClr val="006D77"/>
-                </a:solidFill>
-              </a:rPr>
-              <a:t>• </a:t>
-            </a:r>
-            <a:r>
-              <a:rPr sz="2000" b="1">
-                <a:solidFill>
-                  <a:srgbClr val="1F2D3A"/>
-                </a:solidFill>
-              </a:rPr>
-              <a:t>Kanıt:</a:t>
-            </a:r>
-            <a:r>
-              <a:rPr sz="2000" b="0">
-                <a:solidFill>
-                  <a:srgbClr val="1F2D3A"/>
-                </a:solidFill>
-              </a:rPr>
-              <a:t> S6, S11 + test.</a:t>
-            </a:r>
-          </a:p>
-        </p:txBody>
-      </p:sp>
-    </p:spTree>
-  </p:cSld>
-  <p:clrMapOvr>
-    <a:masterClrMapping/>
-  </p:clrMapOvr>
-</p:sld>
-</file>
-
-<file path=ppt/slides/slide19.xml><?xml version="1.0" encoding="utf-8"?>
-<p:sld xmlns:a="http://schemas.openxmlformats.org/drawingml/2006/main" xmlns:p="http://schemas.openxmlformats.org/presentationml/2006/main" xmlns:r="http://schemas.openxmlformats.org/officeDocument/2006/relationships">
-  <p:cSld>
-    <p:spTree>
-      <p:nvGrpSpPr>
-        <p:cNvPr id="1" name=""/>
-        <p:cNvGrpSpPr/>
-        <p:nvPr/>
-      </p:nvGrpSpPr>
-      <p:grpSpPr/>
-      <p:pic>
-        <p:nvPicPr>
-          <p:cNvPr id="2" name="Picture 1" descr="rteu_logo_kucuk.jpg"/>
-          <p:cNvPicPr>
-            <a:picLocks noChangeAspect="1"/>
-          </p:cNvPicPr>
-          <p:nvPr/>
-        </p:nvPicPr>
-        <p:blipFill>
-          <a:blip r:embed="rId2"/>
-          <a:stretch>
-            <a:fillRect/>
-          </a:stretch>
-        </p:blipFill>
-        <p:spPr>
-          <a:xfrm>
-            <a:off x="640080" y="164592"/>
-            <a:ext cx="242773" cy="329184"/>
-          </a:xfrm>
-          <a:prstGeom prst="rect">
-            <a:avLst/>
-          </a:prstGeom>
-        </p:spPr>
-      </p:pic>
-      <p:sp>
-        <p:nvSpPr>
-          <p:cNvPr id="3" name="TextBox 2"/>
-          <p:cNvSpPr txBox="1"/>
-          <p:nvPr/>
-        </p:nvSpPr>
-        <p:spPr>
-          <a:xfrm>
-            <a:off x="1051560" y="182880"/>
-            <a:ext cx="7315200" cy="320040"/>
-          </a:xfrm>
-          <a:prstGeom prst="rect">
-            <a:avLst/>
-          </a:prstGeom>
-          <a:noFill/>
-        </p:spPr>
-        <p:txBody>
-          <a:bodyPr wrap="square" lIns="45720" rIns="45720">
-            <a:spAutoFit/>
-          </a:bodyPr>
-          <a:lstStyle/>
-          <a:p>
-            <a:r>
-              <a:rPr sz="1100" b="0">
-                <a:solidFill>
-                  <a:srgbClr val="5B6770"/>
-                </a:solidFill>
-              </a:rPr>
-              <a:t>CEN429 Güvenli Programlama · Hafta 15</a:t>
-            </a:r>
-          </a:p>
-        </p:txBody>
-      </p:sp>
-      <p:sp>
-        <p:nvSpPr>
-          <p:cNvPr id="4" name="TextBox 3"/>
-          <p:cNvSpPr txBox="1"/>
-          <p:nvPr/>
-        </p:nvSpPr>
-        <p:spPr>
-          <a:xfrm>
-            <a:off x="640080" y="6446520"/>
-            <a:ext cx="7315200" cy="274320"/>
-          </a:xfrm>
-          <a:prstGeom prst="rect">
-            <a:avLst/>
-          </a:prstGeom>
-          <a:noFill/>
-        </p:spPr>
-        <p:txBody>
-          <a:bodyPr wrap="square" lIns="45720" rIns="45720">
-            <a:spAutoFit/>
-          </a:bodyPr>
-          <a:lstStyle/>
-          <a:p>
-            <a:r>
-              <a:rPr sz="1000" b="0">
-                <a:solidFill>
-                  <a:srgbClr val="5B6770"/>
-                </a:solidFill>
-              </a:rPr>
-              <a:t>RTEÜ Bilgisayar Mühendisliği · 2026-2027 Güz</a:t>
-            </a:r>
-          </a:p>
-        </p:txBody>
-      </p:sp>
-      <p:sp>
-        <p:nvSpPr>
-          <p:cNvPr id="5" name="TextBox 4"/>
-          <p:cNvSpPr txBox="1"/>
-          <p:nvPr/>
-        </p:nvSpPr>
-        <p:spPr>
-          <a:xfrm>
-            <a:off x="10637215" y="6446520"/>
-            <a:ext cx="914400" cy="274320"/>
-          </a:xfrm>
-          <a:prstGeom prst="rect">
-            <a:avLst/>
-          </a:prstGeom>
-          <a:noFill/>
-        </p:spPr>
-        <p:txBody>
-          <a:bodyPr wrap="square" lIns="45720" rIns="45720">
-            <a:spAutoFit/>
-          </a:bodyPr>
-          <a:lstStyle/>
-          <a:p>
-            <a:pPr algn="r"/>
-            <a:r>
-              <a:rPr sz="1000" b="0">
-                <a:solidFill>
-                  <a:srgbClr val="5B6770"/>
-                </a:solidFill>
-              </a:rPr>
-              <a:t>19</a:t>
-            </a:r>
-          </a:p>
-        </p:txBody>
-      </p:sp>
-      <p:sp>
-        <p:nvSpPr>
-          <p:cNvPr id="6" name="TextBox 5"/>
-          <p:cNvSpPr txBox="1"/>
-          <p:nvPr/>
-        </p:nvSpPr>
-        <p:spPr>
-          <a:xfrm>
-            <a:off x="640080" y="548640"/>
-            <a:ext cx="10911535" cy="731520"/>
-          </a:xfrm>
-          <a:prstGeom prst="rect">
-            <a:avLst/>
-          </a:prstGeom>
-          <a:noFill/>
-        </p:spPr>
-        <p:txBody>
-          <a:bodyPr wrap="square" lIns="45720" rIns="45720" anchor="ctr">
-            <a:spAutoFit/>
-          </a:bodyPr>
-          <a:lstStyle/>
-          <a:p>
-            <a:r>
-              <a:rPr sz="3000" b="1">
-                <a:solidFill>
-                  <a:srgbClr val="006D77"/>
-                </a:solidFill>
-              </a:rPr>
-              <a:t>Madde · ileri ikili korumalar</a:t>
-            </a:r>
-          </a:p>
-        </p:txBody>
-      </p:sp>
-      <p:sp>
-        <p:nvSpPr>
-          <p:cNvPr id="7" name="TextBox 6"/>
-          <p:cNvSpPr txBox="1"/>
-          <p:nvPr/>
-        </p:nvSpPr>
-        <p:spPr>
-          <a:xfrm>
-            <a:off x="640080" y="1325880"/>
-            <a:ext cx="10911535" cy="843280"/>
-          </a:xfrm>
-          <a:prstGeom prst="rect">
-            <a:avLst/>
-          </a:prstGeom>
-          <a:noFill/>
-        </p:spPr>
-        <p:txBody>
-          <a:bodyPr wrap="square" lIns="45720" rIns="45720">
-            <a:spAutoFit/>
-          </a:bodyPr>
-          <a:lstStyle/>
-          <a:p>
-            <a:pPr>
-              <a:spcAft>
-                <a:spcPts val="300"/>
-              </a:spcAft>
-            </a:pPr>
-            <a:r>
-              <a:rPr sz="2000" b="1">
-                <a:solidFill>
-                  <a:srgbClr val="006D77"/>
-                </a:solidFill>
-              </a:rPr>
-              <a:t>• </a:t>
-            </a:r>
-            <a:r>
-              <a:rPr sz="2000" b="0">
-                <a:solidFill>
-                  <a:srgbClr val="1F2D3A"/>
-                </a:solidFill>
-              </a:rPr>
-              <a:t>Gizleme (S9 ileri), derleme hattı (S15).</a:t>
-            </a:r>
-          </a:p>
-          <a:p>
-            <a:pPr>
-              <a:spcAft>
-                <a:spcPts val="300"/>
-              </a:spcAft>
-            </a:pPr>
-            <a:r>
-              <a:rPr sz="2000" b="1">
-                <a:solidFill>
-                  <a:srgbClr val="006D77"/>
-                </a:solidFill>
-              </a:rPr>
-              <a:t>• </a:t>
-            </a:r>
-            <a:r>
-              <a:rPr sz="2000" b="1">
-                <a:solidFill>
-                  <a:srgbClr val="1F2D3A"/>
-                </a:solidFill>
-              </a:rPr>
-              <a:t>Kanıt:</a:t>
-            </a:r>
-            <a:r>
-              <a:rPr sz="2000" b="0">
-                <a:solidFill>
-                  <a:srgbClr val="1F2D3A"/>
-                </a:solidFill>
-              </a:rPr>
-              <a:t> ölçüm tablosu + imzalama.</a:t>
+              <a:t>Final gösteriminden (RAP2) sonra sıra Quiz-2'ye gelir; kapsam 9–14. haftalardır. Çalışma rehberi 16. hafta sayfasındadır.</a:t>
             </a:r>
           </a:p>
         </p:txBody>
@@ -7056,2495 +5736,6 @@
 </p:sld>
 </file>
 
-<file path=ppt/slides/slide20.xml><?xml version="1.0" encoding="utf-8"?>
-<p:sld xmlns:a="http://schemas.openxmlformats.org/drawingml/2006/main" xmlns:p="http://schemas.openxmlformats.org/presentationml/2006/main" xmlns:r="http://schemas.openxmlformats.org/officeDocument/2006/relationships">
-  <p:cSld>
-    <p:spTree>
-      <p:nvGrpSpPr>
-        <p:cNvPr id="1" name=""/>
-        <p:cNvGrpSpPr/>
-        <p:nvPr/>
-      </p:nvGrpSpPr>
-      <p:grpSpPr/>
-      <p:pic>
-        <p:nvPicPr>
-          <p:cNvPr id="2" name="Picture 1" descr="rteu_logo_kucuk.jpg"/>
-          <p:cNvPicPr>
-            <a:picLocks noChangeAspect="1"/>
-          </p:cNvPicPr>
-          <p:nvPr/>
-        </p:nvPicPr>
-        <p:blipFill>
-          <a:blip r:embed="rId2"/>
-          <a:stretch>
-            <a:fillRect/>
-          </a:stretch>
-        </p:blipFill>
-        <p:spPr>
-          <a:xfrm>
-            <a:off x="640080" y="164592"/>
-            <a:ext cx="242773" cy="329184"/>
-          </a:xfrm>
-          <a:prstGeom prst="rect">
-            <a:avLst/>
-          </a:prstGeom>
-        </p:spPr>
-      </p:pic>
-      <p:sp>
-        <p:nvSpPr>
-          <p:cNvPr id="3" name="TextBox 2"/>
-          <p:cNvSpPr txBox="1"/>
-          <p:nvPr/>
-        </p:nvSpPr>
-        <p:spPr>
-          <a:xfrm>
-            <a:off x="1051560" y="182880"/>
-            <a:ext cx="7315200" cy="320040"/>
-          </a:xfrm>
-          <a:prstGeom prst="rect">
-            <a:avLst/>
-          </a:prstGeom>
-          <a:noFill/>
-        </p:spPr>
-        <p:txBody>
-          <a:bodyPr wrap="square" lIns="45720" rIns="45720">
-            <a:spAutoFit/>
-          </a:bodyPr>
-          <a:lstStyle/>
-          <a:p>
-            <a:r>
-              <a:rPr sz="1100" b="0">
-                <a:solidFill>
-                  <a:srgbClr val="5B6770"/>
-                </a:solidFill>
-              </a:rPr>
-              <a:t>CEN429 Güvenli Programlama · Hafta 15</a:t>
-            </a:r>
-          </a:p>
-        </p:txBody>
-      </p:sp>
-      <p:sp>
-        <p:nvSpPr>
-          <p:cNvPr id="4" name="TextBox 3"/>
-          <p:cNvSpPr txBox="1"/>
-          <p:nvPr/>
-        </p:nvSpPr>
-        <p:spPr>
-          <a:xfrm>
-            <a:off x="640080" y="6446520"/>
-            <a:ext cx="7315200" cy="274320"/>
-          </a:xfrm>
-          <a:prstGeom prst="rect">
-            <a:avLst/>
-          </a:prstGeom>
-          <a:noFill/>
-        </p:spPr>
-        <p:txBody>
-          <a:bodyPr wrap="square" lIns="45720" rIns="45720">
-            <a:spAutoFit/>
-          </a:bodyPr>
-          <a:lstStyle/>
-          <a:p>
-            <a:r>
-              <a:rPr sz="1000" b="0">
-                <a:solidFill>
-                  <a:srgbClr val="5B6770"/>
-                </a:solidFill>
-              </a:rPr>
-              <a:t>RTEÜ Bilgisayar Mühendisliği · 2026-2027 Güz</a:t>
-            </a:r>
-          </a:p>
-        </p:txBody>
-      </p:sp>
-      <p:sp>
-        <p:nvSpPr>
-          <p:cNvPr id="5" name="TextBox 4"/>
-          <p:cNvSpPr txBox="1"/>
-          <p:nvPr/>
-        </p:nvSpPr>
-        <p:spPr>
-          <a:xfrm>
-            <a:off x="10637215" y="6446520"/>
-            <a:ext cx="914400" cy="274320"/>
-          </a:xfrm>
-          <a:prstGeom prst="rect">
-            <a:avLst/>
-          </a:prstGeom>
-          <a:noFill/>
-        </p:spPr>
-        <p:txBody>
-          <a:bodyPr wrap="square" lIns="45720" rIns="45720">
-            <a:spAutoFit/>
-          </a:bodyPr>
-          <a:lstStyle/>
-          <a:p>
-            <a:pPr algn="r"/>
-            <a:r>
-              <a:rPr sz="1000" b="0">
-                <a:solidFill>
-                  <a:srgbClr val="5B6770"/>
-                </a:solidFill>
-              </a:rPr>
-              <a:t>20</a:t>
-            </a:r>
-          </a:p>
-        </p:txBody>
-      </p:sp>
-      <p:sp>
-        <p:nvSpPr>
-          <p:cNvPr id="6" name="TextBox 5"/>
-          <p:cNvSpPr txBox="1"/>
-          <p:nvPr/>
-        </p:nvSpPr>
-        <p:spPr>
-          <a:xfrm>
-            <a:off x="640080" y="548640"/>
-            <a:ext cx="10911535" cy="731520"/>
-          </a:xfrm>
-          <a:prstGeom prst="rect">
-            <a:avLst/>
-          </a:prstGeom>
-          <a:noFill/>
-        </p:spPr>
-        <p:txBody>
-          <a:bodyPr wrap="square" lIns="45720" rIns="45720" anchor="ctr">
-            <a:spAutoFit/>
-          </a:bodyPr>
-          <a:lstStyle/>
-          <a:p>
-            <a:r>
-              <a:rPr sz="3000" b="1">
-                <a:solidFill>
-                  <a:srgbClr val="006D77"/>
-                </a:solidFill>
-              </a:rPr>
-              <a:t>Madde · test ve doğrulama</a:t>
-            </a:r>
-          </a:p>
-        </p:txBody>
-      </p:sp>
-      <p:sp>
-        <p:nvSpPr>
-          <p:cNvPr id="7" name="TextBox 6"/>
-          <p:cNvSpPr txBox="1"/>
-          <p:nvPr/>
-        </p:nvSpPr>
-        <p:spPr>
-          <a:xfrm>
-            <a:off x="640080" y="1325880"/>
-            <a:ext cx="10911535" cy="843280"/>
-          </a:xfrm>
-          <a:prstGeom prst="rect">
-            <a:avLst/>
-          </a:prstGeom>
-          <a:noFill/>
-        </p:spPr>
-        <p:txBody>
-          <a:bodyPr wrap="square" lIns="45720" rIns="45720">
-            <a:spAutoFit/>
-          </a:bodyPr>
-          <a:lstStyle/>
-          <a:p>
-            <a:pPr>
-              <a:spcAft>
-                <a:spcPts val="300"/>
-              </a:spcAft>
-            </a:pPr>
-            <a:r>
-              <a:rPr sz="2000" b="1">
-                <a:solidFill>
-                  <a:srgbClr val="006D77"/>
-                </a:solidFill>
-              </a:rPr>
-              <a:t>• </a:t>
-            </a:r>
-            <a:r>
-              <a:rPr sz="2000" b="0">
-                <a:solidFill>
-                  <a:srgbClr val="1F2D3A"/>
-                </a:solidFill>
-              </a:rPr>
-              <a:t>Test </a:t>
-            </a:r>
-            <a:r>
-              <a:rPr sz="2000" b="1">
-                <a:solidFill>
-                  <a:srgbClr val="1F2D3A"/>
-                </a:solidFill>
-              </a:rPr>
-              <a:t>sonuçları</a:t>
-            </a:r>
-            <a:r>
-              <a:rPr sz="2000" b="0">
-                <a:solidFill>
-                  <a:srgbClr val="1F2D3A"/>
-                </a:solidFill>
-              </a:rPr>
-              <a:t> (plan değil).</a:t>
-            </a:r>
-          </a:p>
-          <a:p>
-            <a:pPr>
-              <a:spcAft>
-                <a:spcPts val="300"/>
-              </a:spcAft>
-            </a:pPr>
-            <a:r>
-              <a:rPr sz="2000" b="1">
-                <a:solidFill>
-                  <a:srgbClr val="006D77"/>
-                </a:solidFill>
-              </a:rPr>
-              <a:t>• </a:t>
-            </a:r>
-            <a:r>
-              <a:rPr sz="2000" b="1">
-                <a:solidFill>
-                  <a:srgbClr val="1F2D3A"/>
-                </a:solidFill>
-              </a:rPr>
-              <a:t>Kanıt:</a:t>
-            </a:r>
-            <a:r>
-              <a:rPr sz="2000" b="0">
-                <a:solidFill>
-                  <a:srgbClr val="1F2D3A"/>
-                </a:solidFill>
-              </a:rPr>
-              <a:t> S16.</a:t>
-            </a:r>
-          </a:p>
-        </p:txBody>
-      </p:sp>
-    </p:spTree>
-  </p:cSld>
-  <p:clrMapOvr>
-    <a:masterClrMapping/>
-  </p:clrMapOvr>
-</p:sld>
-</file>
-
-<file path=ppt/slides/slide21.xml><?xml version="1.0" encoding="utf-8"?>
-<p:sld xmlns:a="http://schemas.openxmlformats.org/drawingml/2006/main" xmlns:p="http://schemas.openxmlformats.org/presentationml/2006/main" xmlns:r="http://schemas.openxmlformats.org/officeDocument/2006/relationships">
-  <p:cSld>
-    <p:spTree>
-      <p:nvGrpSpPr>
-        <p:cNvPr id="1" name=""/>
-        <p:cNvGrpSpPr/>
-        <p:nvPr/>
-      </p:nvGrpSpPr>
-      <p:grpSpPr/>
-      <p:pic>
-        <p:nvPicPr>
-          <p:cNvPr id="2" name="Picture 1" descr="rteu_logo_kucuk.jpg"/>
-          <p:cNvPicPr>
-            <a:picLocks noChangeAspect="1"/>
-          </p:cNvPicPr>
-          <p:nvPr/>
-        </p:nvPicPr>
-        <p:blipFill>
-          <a:blip r:embed="rId2"/>
-          <a:stretch>
-            <a:fillRect/>
-          </a:stretch>
-        </p:blipFill>
-        <p:spPr>
-          <a:xfrm>
-            <a:off x="640080" y="164592"/>
-            <a:ext cx="242773" cy="329184"/>
-          </a:xfrm>
-          <a:prstGeom prst="rect">
-            <a:avLst/>
-          </a:prstGeom>
-        </p:spPr>
-      </p:pic>
-      <p:sp>
-        <p:nvSpPr>
-          <p:cNvPr id="3" name="TextBox 2"/>
-          <p:cNvSpPr txBox="1"/>
-          <p:nvPr/>
-        </p:nvSpPr>
-        <p:spPr>
-          <a:xfrm>
-            <a:off x="1051560" y="182880"/>
-            <a:ext cx="7315200" cy="320040"/>
-          </a:xfrm>
-          <a:prstGeom prst="rect">
-            <a:avLst/>
-          </a:prstGeom>
-          <a:noFill/>
-        </p:spPr>
-        <p:txBody>
-          <a:bodyPr wrap="square" lIns="45720" rIns="45720">
-            <a:spAutoFit/>
-          </a:bodyPr>
-          <a:lstStyle/>
-          <a:p>
-            <a:r>
-              <a:rPr sz="1100" b="0">
-                <a:solidFill>
-                  <a:srgbClr val="5B6770"/>
-                </a:solidFill>
-              </a:rPr>
-              <a:t>CEN429 Güvenli Programlama · Hafta 15</a:t>
-            </a:r>
-          </a:p>
-        </p:txBody>
-      </p:sp>
-      <p:sp>
-        <p:nvSpPr>
-          <p:cNvPr id="4" name="TextBox 3"/>
-          <p:cNvSpPr txBox="1"/>
-          <p:nvPr/>
-        </p:nvSpPr>
-        <p:spPr>
-          <a:xfrm>
-            <a:off x="640080" y="6446520"/>
-            <a:ext cx="7315200" cy="274320"/>
-          </a:xfrm>
-          <a:prstGeom prst="rect">
-            <a:avLst/>
-          </a:prstGeom>
-          <a:noFill/>
-        </p:spPr>
-        <p:txBody>
-          <a:bodyPr wrap="square" lIns="45720" rIns="45720">
-            <a:spAutoFit/>
-          </a:bodyPr>
-          <a:lstStyle/>
-          <a:p>
-            <a:r>
-              <a:rPr sz="1000" b="0">
-                <a:solidFill>
-                  <a:srgbClr val="5B6770"/>
-                </a:solidFill>
-              </a:rPr>
-              <a:t>RTEÜ Bilgisayar Mühendisliği · 2026-2027 Güz</a:t>
-            </a:r>
-          </a:p>
-        </p:txBody>
-      </p:sp>
-      <p:sp>
-        <p:nvSpPr>
-          <p:cNvPr id="5" name="TextBox 4"/>
-          <p:cNvSpPr txBox="1"/>
-          <p:nvPr/>
-        </p:nvSpPr>
-        <p:spPr>
-          <a:xfrm>
-            <a:off x="10637215" y="6446520"/>
-            <a:ext cx="914400" cy="274320"/>
-          </a:xfrm>
-          <a:prstGeom prst="rect">
-            <a:avLst/>
-          </a:prstGeom>
-          <a:noFill/>
-        </p:spPr>
-        <p:txBody>
-          <a:bodyPr wrap="square" lIns="45720" rIns="45720">
-            <a:spAutoFit/>
-          </a:bodyPr>
-          <a:lstStyle/>
-          <a:p>
-            <a:pPr algn="r"/>
-            <a:r>
-              <a:rPr sz="1000" b="0">
-                <a:solidFill>
-                  <a:srgbClr val="5B6770"/>
-                </a:solidFill>
-              </a:rPr>
-              <a:t>21</a:t>
-            </a:r>
-          </a:p>
-        </p:txBody>
-      </p:sp>
-      <p:sp>
-        <p:nvSpPr>
-          <p:cNvPr id="6" name="TextBox 5"/>
-          <p:cNvSpPr txBox="1"/>
-          <p:nvPr/>
-        </p:nvSpPr>
-        <p:spPr>
-          <a:xfrm>
-            <a:off x="640080" y="548640"/>
-            <a:ext cx="10911535" cy="731520"/>
-          </a:xfrm>
-          <a:prstGeom prst="rect">
-            <a:avLst/>
-          </a:prstGeom>
-          <a:noFill/>
-        </p:spPr>
-        <p:txBody>
-          <a:bodyPr wrap="square" lIns="45720" rIns="45720" anchor="ctr">
-            <a:spAutoFit/>
-          </a:bodyPr>
-          <a:lstStyle/>
-          <a:p>
-            <a:r>
-              <a:rPr sz="3000" b="1">
-                <a:solidFill>
-                  <a:srgbClr val="006D77"/>
-                </a:solidFill>
-              </a:rPr>
-              <a:t>Madde · standartlar ve uyum</a:t>
-            </a:r>
-          </a:p>
-        </p:txBody>
-      </p:sp>
-      <p:sp>
-        <p:nvSpPr>
-          <p:cNvPr id="7" name="TextBox 6"/>
-          <p:cNvSpPr txBox="1"/>
-          <p:nvPr/>
-        </p:nvSpPr>
-        <p:spPr>
-          <a:xfrm>
-            <a:off x="640080" y="1325880"/>
-            <a:ext cx="10911535" cy="843280"/>
-          </a:xfrm>
-          <a:prstGeom prst="rect">
-            <a:avLst/>
-          </a:prstGeom>
-          <a:noFill/>
-        </p:spPr>
-        <p:txBody>
-          <a:bodyPr wrap="square" lIns="45720" rIns="45720">
-            <a:spAutoFit/>
-          </a:bodyPr>
-          <a:lstStyle/>
-          <a:p>
-            <a:pPr>
-              <a:spcAft>
-                <a:spcPts val="300"/>
-              </a:spcAft>
-            </a:pPr>
-            <a:r>
-              <a:rPr sz="2000" b="1">
-                <a:solidFill>
-                  <a:srgbClr val="006D77"/>
-                </a:solidFill>
-              </a:rPr>
-              <a:t>• </a:t>
-            </a:r>
-            <a:r>
-              <a:rPr sz="2000" b="0">
-                <a:solidFill>
-                  <a:srgbClr val="1F2D3A"/>
-                </a:solidFill>
-              </a:rPr>
-              <a:t>Uyum matrisi (S17), devredilenler (S14).</a:t>
-            </a:r>
-          </a:p>
-          <a:p>
-            <a:pPr>
-              <a:spcAft>
-                <a:spcPts val="300"/>
-              </a:spcAft>
-            </a:pPr>
-            <a:r>
-              <a:rPr sz="2000" b="1">
-                <a:solidFill>
-                  <a:srgbClr val="006D77"/>
-                </a:solidFill>
-              </a:rPr>
-              <a:t>• </a:t>
-            </a:r>
-            <a:r>
-              <a:rPr sz="2000" b="1">
-                <a:solidFill>
-                  <a:srgbClr val="1F2D3A"/>
-                </a:solidFill>
-              </a:rPr>
-              <a:t>Kanıt:</a:t>
-            </a:r>
-            <a:r>
-              <a:rPr sz="2000" b="0">
-                <a:solidFill>
-                  <a:srgbClr val="1F2D3A"/>
-                </a:solidFill>
-              </a:rPr>
-              <a:t> S14, S17.</a:t>
-            </a:r>
-          </a:p>
-        </p:txBody>
-      </p:sp>
-    </p:spTree>
-  </p:cSld>
-  <p:clrMapOvr>
-    <a:masterClrMapping/>
-  </p:clrMapOvr>
-</p:sld>
-</file>
-
-<file path=ppt/slides/slide22.xml><?xml version="1.0" encoding="utf-8"?>
-<p:sld xmlns:a="http://schemas.openxmlformats.org/drawingml/2006/main" xmlns:p="http://schemas.openxmlformats.org/presentationml/2006/main" xmlns:r="http://schemas.openxmlformats.org/officeDocument/2006/relationships">
-  <p:cSld>
-    <p:bg>
-      <p:bgPr>
-        <a:solidFill>
-          <a:srgbClr val="006D77"/>
-        </a:solidFill>
-        <a:effectLst/>
-      </p:bgPr>
-    </p:bg>
-    <p:spTree>
-      <p:nvGrpSpPr>
-        <p:cNvPr id="1" name=""/>
-        <p:cNvGrpSpPr/>
-        <p:nvPr/>
-      </p:nvGrpSpPr>
-      <p:grpSpPr/>
-      <p:sp>
-        <p:nvSpPr>
-          <p:cNvPr id="2" name="TextBox 1"/>
-          <p:cNvSpPr txBox="1"/>
-          <p:nvPr/>
-        </p:nvSpPr>
-        <p:spPr>
-          <a:xfrm>
-            <a:off x="1051560" y="182880"/>
-            <a:ext cx="7315200" cy="320040"/>
-          </a:xfrm>
-          <a:prstGeom prst="rect">
-            <a:avLst/>
-          </a:prstGeom>
-          <a:noFill/>
-        </p:spPr>
-        <p:txBody>
-          <a:bodyPr wrap="square" lIns="45720" rIns="45720">
-            <a:spAutoFit/>
-          </a:bodyPr>
-          <a:lstStyle/>
-          <a:p>
-            <a:r>
-              <a:rPr sz="1100" b="0">
-                <a:solidFill>
-                  <a:srgbClr val="D8F0F2"/>
-                </a:solidFill>
-              </a:rPr>
-              <a:t>CEN429 Güvenli Programlama · Hafta 15</a:t>
-            </a:r>
-          </a:p>
-        </p:txBody>
-      </p:sp>
-      <p:sp>
-        <p:nvSpPr>
-          <p:cNvPr id="3" name="TextBox 2"/>
-          <p:cNvSpPr txBox="1"/>
-          <p:nvPr/>
-        </p:nvSpPr>
-        <p:spPr>
-          <a:xfrm>
-            <a:off x="640080" y="6446520"/>
-            <a:ext cx="7315200" cy="274320"/>
-          </a:xfrm>
-          <a:prstGeom prst="rect">
-            <a:avLst/>
-          </a:prstGeom>
-          <a:noFill/>
-        </p:spPr>
-        <p:txBody>
-          <a:bodyPr wrap="square" lIns="45720" rIns="45720">
-            <a:spAutoFit/>
-          </a:bodyPr>
-          <a:lstStyle/>
-          <a:p>
-            <a:r>
-              <a:rPr sz="1000" b="0">
-                <a:solidFill>
-                  <a:srgbClr val="D8F0F2"/>
-                </a:solidFill>
-              </a:rPr>
-              <a:t>RTEÜ Bilgisayar Mühendisliği · 2026-2027 Güz</a:t>
-            </a:r>
-          </a:p>
-        </p:txBody>
-      </p:sp>
-      <p:sp>
-        <p:nvSpPr>
-          <p:cNvPr id="4" name="TextBox 3"/>
-          <p:cNvSpPr txBox="1"/>
-          <p:nvPr/>
-        </p:nvSpPr>
-        <p:spPr>
-          <a:xfrm>
-            <a:off x="10637215" y="6446520"/>
-            <a:ext cx="914400" cy="274320"/>
-          </a:xfrm>
-          <a:prstGeom prst="rect">
-            <a:avLst/>
-          </a:prstGeom>
-          <a:noFill/>
-        </p:spPr>
-        <p:txBody>
-          <a:bodyPr wrap="square" lIns="45720" rIns="45720">
-            <a:spAutoFit/>
-          </a:bodyPr>
-          <a:lstStyle/>
-          <a:p>
-            <a:pPr algn="r"/>
-            <a:r>
-              <a:rPr sz="1000" b="0">
-                <a:solidFill>
-                  <a:srgbClr val="D8F0F2"/>
-                </a:solidFill>
-              </a:rPr>
-              <a:t>22</a:t>
-            </a:r>
-          </a:p>
-        </p:txBody>
-      </p:sp>
-      <p:sp>
-        <p:nvSpPr>
-          <p:cNvPr id="5" name="TextBox 4"/>
-          <p:cNvSpPr txBox="1"/>
-          <p:nvPr/>
-        </p:nvSpPr>
-        <p:spPr>
-          <a:xfrm>
-            <a:off x="640080" y="2743200"/>
-            <a:ext cx="10911535" cy="1280160"/>
-          </a:xfrm>
-          <a:prstGeom prst="rect">
-            <a:avLst/>
-          </a:prstGeom>
-          <a:noFill/>
-        </p:spPr>
-        <p:txBody>
-          <a:bodyPr wrap="square" lIns="45720" rIns="45720">
-            <a:spAutoFit/>
-          </a:bodyPr>
-          <a:lstStyle/>
-          <a:p>
-            <a:pPr algn="l"/>
-            <a:r>
-              <a:rPr sz="4000" b="1">
-                <a:solidFill>
-                  <a:srgbClr val="FFFFFF"/>
-                </a:solidFill>
-              </a:rPr>
-              <a:t>Ek · Vizeden finale</a:t>
-            </a:r>
-          </a:p>
-        </p:txBody>
-      </p:sp>
-    </p:spTree>
-  </p:cSld>
-  <p:clrMapOvr>
-    <a:masterClrMapping/>
-  </p:clrMapOvr>
-</p:sld>
-</file>
-
-<file path=ppt/slides/slide23.xml><?xml version="1.0" encoding="utf-8"?>
-<p:sld xmlns:a="http://schemas.openxmlformats.org/drawingml/2006/main" xmlns:p="http://schemas.openxmlformats.org/presentationml/2006/main" xmlns:r="http://schemas.openxmlformats.org/officeDocument/2006/relationships">
-  <p:cSld>
-    <p:spTree>
-      <p:nvGrpSpPr>
-        <p:cNvPr id="1" name=""/>
-        <p:cNvGrpSpPr/>
-        <p:nvPr/>
-      </p:nvGrpSpPr>
-      <p:grpSpPr/>
-      <p:pic>
-        <p:nvPicPr>
-          <p:cNvPr id="2" name="Picture 1" descr="rteu_logo_kucuk.jpg"/>
-          <p:cNvPicPr>
-            <a:picLocks noChangeAspect="1"/>
-          </p:cNvPicPr>
-          <p:nvPr/>
-        </p:nvPicPr>
-        <p:blipFill>
-          <a:blip r:embed="rId2"/>
-          <a:stretch>
-            <a:fillRect/>
-          </a:stretch>
-        </p:blipFill>
-        <p:spPr>
-          <a:xfrm>
-            <a:off x="640080" y="164592"/>
-            <a:ext cx="242773" cy="329184"/>
-          </a:xfrm>
-          <a:prstGeom prst="rect">
-            <a:avLst/>
-          </a:prstGeom>
-        </p:spPr>
-      </p:pic>
-      <p:sp>
-        <p:nvSpPr>
-          <p:cNvPr id="3" name="TextBox 2"/>
-          <p:cNvSpPr txBox="1"/>
-          <p:nvPr/>
-        </p:nvSpPr>
-        <p:spPr>
-          <a:xfrm>
-            <a:off x="1051560" y="182880"/>
-            <a:ext cx="7315200" cy="320040"/>
-          </a:xfrm>
-          <a:prstGeom prst="rect">
-            <a:avLst/>
-          </a:prstGeom>
-          <a:noFill/>
-        </p:spPr>
-        <p:txBody>
-          <a:bodyPr wrap="square" lIns="45720" rIns="45720">
-            <a:spAutoFit/>
-          </a:bodyPr>
-          <a:lstStyle/>
-          <a:p>
-            <a:r>
-              <a:rPr sz="1100" b="0">
-                <a:solidFill>
-                  <a:srgbClr val="5B6770"/>
-                </a:solidFill>
-              </a:rPr>
-              <a:t>CEN429 Güvenli Programlama · Hafta 15</a:t>
-            </a:r>
-          </a:p>
-        </p:txBody>
-      </p:sp>
-      <p:sp>
-        <p:nvSpPr>
-          <p:cNvPr id="4" name="TextBox 3"/>
-          <p:cNvSpPr txBox="1"/>
-          <p:nvPr/>
-        </p:nvSpPr>
-        <p:spPr>
-          <a:xfrm>
-            <a:off x="640080" y="6446520"/>
-            <a:ext cx="7315200" cy="274320"/>
-          </a:xfrm>
-          <a:prstGeom prst="rect">
-            <a:avLst/>
-          </a:prstGeom>
-          <a:noFill/>
-        </p:spPr>
-        <p:txBody>
-          <a:bodyPr wrap="square" lIns="45720" rIns="45720">
-            <a:spAutoFit/>
-          </a:bodyPr>
-          <a:lstStyle/>
-          <a:p>
-            <a:r>
-              <a:rPr sz="1000" b="0">
-                <a:solidFill>
-                  <a:srgbClr val="5B6770"/>
-                </a:solidFill>
-              </a:rPr>
-              <a:t>RTEÜ Bilgisayar Mühendisliği · 2026-2027 Güz</a:t>
-            </a:r>
-          </a:p>
-        </p:txBody>
-      </p:sp>
-      <p:sp>
-        <p:nvSpPr>
-          <p:cNvPr id="5" name="TextBox 4"/>
-          <p:cNvSpPr txBox="1"/>
-          <p:nvPr/>
-        </p:nvSpPr>
-        <p:spPr>
-          <a:xfrm>
-            <a:off x="10637215" y="6446520"/>
-            <a:ext cx="914400" cy="274320"/>
-          </a:xfrm>
-          <a:prstGeom prst="rect">
-            <a:avLst/>
-          </a:prstGeom>
-          <a:noFill/>
-        </p:spPr>
-        <p:txBody>
-          <a:bodyPr wrap="square" lIns="45720" rIns="45720">
-            <a:spAutoFit/>
-          </a:bodyPr>
-          <a:lstStyle/>
-          <a:p>
-            <a:pPr algn="r"/>
-            <a:r>
-              <a:rPr sz="1000" b="0">
-                <a:solidFill>
-                  <a:srgbClr val="5B6770"/>
-                </a:solidFill>
-              </a:rPr>
-              <a:t>23</a:t>
-            </a:r>
-          </a:p>
-        </p:txBody>
-      </p:sp>
-      <p:sp>
-        <p:nvSpPr>
-          <p:cNvPr id="6" name="TextBox 5"/>
-          <p:cNvSpPr txBox="1"/>
-          <p:nvPr/>
-        </p:nvSpPr>
-        <p:spPr>
-          <a:xfrm>
-            <a:off x="640080" y="548640"/>
-            <a:ext cx="10911535" cy="731520"/>
-          </a:xfrm>
-          <a:prstGeom prst="rect">
-            <a:avLst/>
-          </a:prstGeom>
-          <a:noFill/>
-        </p:spPr>
-        <p:txBody>
-          <a:bodyPr wrap="square" lIns="45720" rIns="45720" anchor="ctr">
-            <a:spAutoFit/>
-          </a:bodyPr>
-          <a:lstStyle/>
-          <a:p>
-            <a:r>
-              <a:rPr sz="3000" b="1">
-                <a:solidFill>
-                  <a:srgbClr val="006D77"/>
-                </a:solidFill>
-              </a:rPr>
-              <a:t>Yeni bölümler</a:t>
-            </a:r>
-          </a:p>
-        </p:txBody>
-      </p:sp>
-      <p:sp>
-        <p:nvSpPr>
-          <p:cNvPr id="7" name="TextBox 6"/>
-          <p:cNvSpPr txBox="1"/>
-          <p:nvPr/>
-        </p:nvSpPr>
-        <p:spPr>
-          <a:xfrm>
-            <a:off x="640080" y="1325880"/>
-            <a:ext cx="10911535" cy="1971040"/>
-          </a:xfrm>
-          <a:prstGeom prst="rect">
-            <a:avLst/>
-          </a:prstGeom>
-          <a:noFill/>
-        </p:spPr>
-        <p:txBody>
-          <a:bodyPr wrap="square" lIns="45720" rIns="45720">
-            <a:spAutoFit/>
-          </a:bodyPr>
-          <a:lstStyle/>
-          <a:p>
-            <a:pPr>
-              <a:spcAft>
-                <a:spcPts val="300"/>
-              </a:spcAft>
-            </a:pPr>
-            <a:r>
-              <a:rPr sz="2000" b="1">
-                <a:solidFill>
-                  <a:srgbClr val="006D77"/>
-                </a:solidFill>
-              </a:rPr>
-              <a:t>• </a:t>
-            </a:r>
-            <a:r>
-              <a:rPr sz="2000" b="0">
-                <a:solidFill>
-                  <a:srgbClr val="1F2D3A"/>
-                </a:solidFill>
-              </a:rPr>
-              <a:t>S6 kimlik/bağlama</a:t>
-            </a:r>
-          </a:p>
-          <a:p>
-            <a:pPr>
-              <a:spcAft>
-                <a:spcPts val="300"/>
-              </a:spcAft>
-            </a:pPr>
-            <a:r>
-              <a:rPr sz="2000" b="1">
-                <a:solidFill>
-                  <a:srgbClr val="006D77"/>
-                </a:solidFill>
-              </a:rPr>
-              <a:t>• </a:t>
-            </a:r>
-            <a:r>
-              <a:rPr sz="2000" b="0">
-                <a:solidFill>
-                  <a:srgbClr val="1F2D3A"/>
-                </a:solidFill>
-              </a:rPr>
-              <a:t>S8 kripto/anahtarlar</a:t>
-            </a:r>
-          </a:p>
-          <a:p>
-            <a:pPr>
-              <a:spcAft>
-                <a:spcPts val="300"/>
-              </a:spcAft>
-            </a:pPr>
-            <a:r>
-              <a:rPr sz="2000" b="1">
-                <a:solidFill>
-                  <a:srgbClr val="006D77"/>
-                </a:solidFill>
-              </a:rPr>
-              <a:t>• </a:t>
-            </a:r>
-            <a:r>
-              <a:rPr sz="2000" b="0">
-                <a:solidFill>
-                  <a:srgbClr val="1F2D3A"/>
-                </a:solidFill>
-              </a:rPr>
-              <a:t>S11 güvenli iletişim</a:t>
-            </a:r>
-          </a:p>
-          <a:p>
-            <a:pPr>
-              <a:spcAft>
-                <a:spcPts val="300"/>
-              </a:spcAft>
-            </a:pPr>
-            <a:r>
-              <a:rPr sz="2000" b="1">
-                <a:solidFill>
-                  <a:srgbClr val="006D77"/>
-                </a:solidFill>
-              </a:rPr>
-              <a:t>• </a:t>
-            </a:r>
-            <a:r>
-              <a:rPr sz="2000" b="0">
-                <a:solidFill>
-                  <a:srgbClr val="1F2D3A"/>
-                </a:solidFill>
-              </a:rPr>
-              <a:t>S14 varsayımlar/devredilenler</a:t>
-            </a:r>
-          </a:p>
-          <a:p>
-            <a:pPr>
-              <a:spcAft>
-                <a:spcPts val="300"/>
-              </a:spcAft>
-            </a:pPr>
-            <a:r>
-              <a:rPr sz="2000" b="1">
-                <a:solidFill>
-                  <a:srgbClr val="006D77"/>
-                </a:solidFill>
-              </a:rPr>
-              <a:t>• </a:t>
-            </a:r>
-            <a:r>
-              <a:rPr sz="2000" b="0">
-                <a:solidFill>
-                  <a:srgbClr val="1F2D3A"/>
-                </a:solidFill>
-              </a:rPr>
-              <a:t>S15 derleme/dağıtım hattı</a:t>
-            </a:r>
-          </a:p>
-        </p:txBody>
-      </p:sp>
-    </p:spTree>
-  </p:cSld>
-  <p:clrMapOvr>
-    <a:masterClrMapping/>
-  </p:clrMapOvr>
-</p:sld>
-</file>
-
-<file path=ppt/slides/slide24.xml><?xml version="1.0" encoding="utf-8"?>
-<p:sld xmlns:a="http://schemas.openxmlformats.org/drawingml/2006/main" xmlns:p="http://schemas.openxmlformats.org/presentationml/2006/main" xmlns:r="http://schemas.openxmlformats.org/officeDocument/2006/relationships">
-  <p:cSld>
-    <p:spTree>
-      <p:nvGrpSpPr>
-        <p:cNvPr id="1" name=""/>
-        <p:cNvGrpSpPr/>
-        <p:nvPr/>
-      </p:nvGrpSpPr>
-      <p:grpSpPr/>
-      <p:pic>
-        <p:nvPicPr>
-          <p:cNvPr id="2" name="Picture 1" descr="rteu_logo_kucuk.jpg"/>
-          <p:cNvPicPr>
-            <a:picLocks noChangeAspect="1"/>
-          </p:cNvPicPr>
-          <p:nvPr/>
-        </p:nvPicPr>
-        <p:blipFill>
-          <a:blip r:embed="rId2"/>
-          <a:stretch>
-            <a:fillRect/>
-          </a:stretch>
-        </p:blipFill>
-        <p:spPr>
-          <a:xfrm>
-            <a:off x="640080" y="164592"/>
-            <a:ext cx="242773" cy="329184"/>
-          </a:xfrm>
-          <a:prstGeom prst="rect">
-            <a:avLst/>
-          </a:prstGeom>
-        </p:spPr>
-      </p:pic>
-      <p:sp>
-        <p:nvSpPr>
-          <p:cNvPr id="3" name="TextBox 2"/>
-          <p:cNvSpPr txBox="1"/>
-          <p:nvPr/>
-        </p:nvSpPr>
-        <p:spPr>
-          <a:xfrm>
-            <a:off x="1051560" y="182880"/>
-            <a:ext cx="7315200" cy="320040"/>
-          </a:xfrm>
-          <a:prstGeom prst="rect">
-            <a:avLst/>
-          </a:prstGeom>
-          <a:noFill/>
-        </p:spPr>
-        <p:txBody>
-          <a:bodyPr wrap="square" lIns="45720" rIns="45720">
-            <a:spAutoFit/>
-          </a:bodyPr>
-          <a:lstStyle/>
-          <a:p>
-            <a:r>
-              <a:rPr sz="1100" b="0">
-                <a:solidFill>
-                  <a:srgbClr val="5B6770"/>
-                </a:solidFill>
-              </a:rPr>
-              <a:t>CEN429 Güvenli Programlama · Hafta 15</a:t>
-            </a:r>
-          </a:p>
-        </p:txBody>
-      </p:sp>
-      <p:sp>
-        <p:nvSpPr>
-          <p:cNvPr id="4" name="TextBox 3"/>
-          <p:cNvSpPr txBox="1"/>
-          <p:nvPr/>
-        </p:nvSpPr>
-        <p:spPr>
-          <a:xfrm>
-            <a:off x="640080" y="6446520"/>
-            <a:ext cx="7315200" cy="274320"/>
-          </a:xfrm>
-          <a:prstGeom prst="rect">
-            <a:avLst/>
-          </a:prstGeom>
-          <a:noFill/>
-        </p:spPr>
-        <p:txBody>
-          <a:bodyPr wrap="square" lIns="45720" rIns="45720">
-            <a:spAutoFit/>
-          </a:bodyPr>
-          <a:lstStyle/>
-          <a:p>
-            <a:r>
-              <a:rPr sz="1000" b="0">
-                <a:solidFill>
-                  <a:srgbClr val="5B6770"/>
-                </a:solidFill>
-              </a:rPr>
-              <a:t>RTEÜ Bilgisayar Mühendisliği · 2026-2027 Güz</a:t>
-            </a:r>
-          </a:p>
-        </p:txBody>
-      </p:sp>
-      <p:sp>
-        <p:nvSpPr>
-          <p:cNvPr id="5" name="TextBox 4"/>
-          <p:cNvSpPr txBox="1"/>
-          <p:nvPr/>
-        </p:nvSpPr>
-        <p:spPr>
-          <a:xfrm>
-            <a:off x="10637215" y="6446520"/>
-            <a:ext cx="914400" cy="274320"/>
-          </a:xfrm>
-          <a:prstGeom prst="rect">
-            <a:avLst/>
-          </a:prstGeom>
-          <a:noFill/>
-        </p:spPr>
-        <p:txBody>
-          <a:bodyPr wrap="square" lIns="45720" rIns="45720">
-            <a:spAutoFit/>
-          </a:bodyPr>
-          <a:lstStyle/>
-          <a:p>
-            <a:pPr algn="r"/>
-            <a:r>
-              <a:rPr sz="1000" b="0">
-                <a:solidFill>
-                  <a:srgbClr val="5B6770"/>
-                </a:solidFill>
-              </a:rPr>
-              <a:t>24</a:t>
-            </a:r>
-          </a:p>
-        </p:txBody>
-      </p:sp>
-      <p:sp>
-        <p:nvSpPr>
-          <p:cNvPr id="6" name="TextBox 5"/>
-          <p:cNvSpPr txBox="1"/>
-          <p:nvPr/>
-        </p:nvSpPr>
-        <p:spPr>
-          <a:xfrm>
-            <a:off x="640080" y="548640"/>
-            <a:ext cx="10911535" cy="731520"/>
-          </a:xfrm>
-          <a:prstGeom prst="rect">
-            <a:avLst/>
-          </a:prstGeom>
-          <a:noFill/>
-        </p:spPr>
-        <p:txBody>
-          <a:bodyPr wrap="square" lIns="45720" rIns="45720" anchor="ctr">
-            <a:spAutoFit/>
-          </a:bodyPr>
-          <a:lstStyle/>
-          <a:p>
-            <a:r>
-              <a:rPr sz="3000" b="1">
-                <a:solidFill>
-                  <a:srgbClr val="006D77"/>
-                </a:solidFill>
-              </a:rPr>
-              <a:t>Tamamlanacaklar</a:t>
-            </a:r>
-          </a:p>
-        </p:txBody>
-      </p:sp>
-      <p:sp>
-        <p:nvSpPr>
-          <p:cNvPr id="7" name="TextBox 6"/>
-          <p:cNvSpPr txBox="1"/>
-          <p:nvPr/>
-        </p:nvSpPr>
-        <p:spPr>
-          <a:xfrm>
-            <a:off x="640080" y="1325880"/>
-            <a:ext cx="10911535" cy="1971040"/>
-          </a:xfrm>
-          <a:prstGeom prst="rect">
-            <a:avLst/>
-          </a:prstGeom>
-          <a:noFill/>
-        </p:spPr>
-        <p:txBody>
-          <a:bodyPr wrap="square" lIns="45720" rIns="45720">
-            <a:spAutoFit/>
-          </a:bodyPr>
-          <a:lstStyle/>
-          <a:p>
-            <a:pPr>
-              <a:spcAft>
-                <a:spcPts val="300"/>
-              </a:spcAft>
-            </a:pPr>
-            <a:r>
-              <a:rPr sz="2000" b="1">
-                <a:solidFill>
-                  <a:srgbClr val="006D77"/>
-                </a:solidFill>
-              </a:rPr>
-              <a:t>• </a:t>
-            </a:r>
-            <a:r>
-              <a:rPr sz="2000" b="0">
-                <a:solidFill>
-                  <a:srgbClr val="1F2D3A"/>
-                </a:solidFill>
-              </a:rPr>
-              <a:t>S5 varlıklar (tam)</a:t>
-            </a:r>
-          </a:p>
-          <a:p>
-            <a:pPr>
-              <a:spcAft>
-                <a:spcPts val="300"/>
-              </a:spcAft>
-            </a:pPr>
-            <a:r>
-              <a:rPr sz="2000" b="1">
-                <a:solidFill>
-                  <a:srgbClr val="006D77"/>
-                </a:solidFill>
-              </a:rPr>
-              <a:t>• </a:t>
-            </a:r>
-            <a:r>
-              <a:rPr sz="2000" b="0">
-                <a:solidFill>
-                  <a:srgbClr val="1F2D3A"/>
-                </a:solidFill>
-              </a:rPr>
-              <a:t>S9 sağlamlaştırma (ileri)</a:t>
-            </a:r>
-          </a:p>
-          <a:p>
-            <a:pPr>
-              <a:spcAft>
-                <a:spcPts val="300"/>
-              </a:spcAft>
-            </a:pPr>
-            <a:r>
-              <a:rPr sz="2000" b="1">
-                <a:solidFill>
-                  <a:srgbClr val="006D77"/>
-                </a:solidFill>
-              </a:rPr>
-              <a:t>• </a:t>
-            </a:r>
-            <a:r>
-              <a:rPr sz="2000" b="0">
-                <a:solidFill>
-                  <a:srgbClr val="1F2D3A"/>
-                </a:solidFill>
-              </a:rPr>
-              <a:t>S12 raporlama (tam)</a:t>
-            </a:r>
-          </a:p>
-          <a:p>
-            <a:pPr>
-              <a:spcAft>
-                <a:spcPts val="300"/>
-              </a:spcAft>
-            </a:pPr>
-            <a:r>
-              <a:rPr sz="2000" b="1">
-                <a:solidFill>
-                  <a:srgbClr val="006D77"/>
-                </a:solidFill>
-              </a:rPr>
-              <a:t>• </a:t>
-            </a:r>
-            <a:r>
-              <a:rPr sz="2000" b="0">
-                <a:solidFill>
-                  <a:srgbClr val="1F2D3A"/>
-                </a:solidFill>
-              </a:rPr>
-              <a:t>S16 </a:t>
-            </a:r>
-            <a:r>
-              <a:rPr sz="2000" b="1">
-                <a:solidFill>
-                  <a:srgbClr val="1F2D3A"/>
-                </a:solidFill>
-              </a:rPr>
-              <a:t>sonuçlar</a:t>
-            </a:r>
-          </a:p>
-          <a:p>
-            <a:pPr>
-              <a:spcAft>
-                <a:spcPts val="300"/>
-              </a:spcAft>
-            </a:pPr>
-            <a:r>
-              <a:rPr sz="2000" b="1">
-                <a:solidFill>
-                  <a:srgbClr val="006D77"/>
-                </a:solidFill>
-              </a:rPr>
-              <a:t>• </a:t>
-            </a:r>
-            <a:r>
-              <a:rPr sz="2000" b="0">
-                <a:solidFill>
-                  <a:srgbClr val="1F2D3A"/>
-                </a:solidFill>
-              </a:rPr>
-              <a:t>S17 tam matris</a:t>
-            </a:r>
-          </a:p>
-        </p:txBody>
-      </p:sp>
-    </p:spTree>
-  </p:cSld>
-  <p:clrMapOvr>
-    <a:masterClrMapping/>
-  </p:clrMapOvr>
-</p:sld>
-</file>
-
-<file path=ppt/slides/slide25.xml><?xml version="1.0" encoding="utf-8"?>
-<p:sld xmlns:a="http://schemas.openxmlformats.org/drawingml/2006/main" xmlns:p="http://schemas.openxmlformats.org/presentationml/2006/main" xmlns:r="http://schemas.openxmlformats.org/officeDocument/2006/relationships">
-  <p:cSld>
-    <p:spTree>
-      <p:nvGrpSpPr>
-        <p:cNvPr id="1" name=""/>
-        <p:cNvGrpSpPr/>
-        <p:nvPr/>
-      </p:nvGrpSpPr>
-      <p:grpSpPr/>
-      <p:pic>
-        <p:nvPicPr>
-          <p:cNvPr id="2" name="Picture 1" descr="rteu_logo_kucuk.jpg"/>
-          <p:cNvPicPr>
-            <a:picLocks noChangeAspect="1"/>
-          </p:cNvPicPr>
-          <p:nvPr/>
-        </p:nvPicPr>
-        <p:blipFill>
-          <a:blip r:embed="rId2"/>
-          <a:stretch>
-            <a:fillRect/>
-          </a:stretch>
-        </p:blipFill>
-        <p:spPr>
-          <a:xfrm>
-            <a:off x="640080" y="164592"/>
-            <a:ext cx="242773" cy="329184"/>
-          </a:xfrm>
-          <a:prstGeom prst="rect">
-            <a:avLst/>
-          </a:prstGeom>
-        </p:spPr>
-      </p:pic>
-      <p:sp>
-        <p:nvSpPr>
-          <p:cNvPr id="3" name="TextBox 2"/>
-          <p:cNvSpPr txBox="1"/>
-          <p:nvPr/>
-        </p:nvSpPr>
-        <p:spPr>
-          <a:xfrm>
-            <a:off x="1051560" y="182880"/>
-            <a:ext cx="7315200" cy="320040"/>
-          </a:xfrm>
-          <a:prstGeom prst="rect">
-            <a:avLst/>
-          </a:prstGeom>
-          <a:noFill/>
-        </p:spPr>
-        <p:txBody>
-          <a:bodyPr wrap="square" lIns="45720" rIns="45720">
-            <a:spAutoFit/>
-          </a:bodyPr>
-          <a:lstStyle/>
-          <a:p>
-            <a:r>
-              <a:rPr sz="1100" b="0">
-                <a:solidFill>
-                  <a:srgbClr val="5B6770"/>
-                </a:solidFill>
-              </a:rPr>
-              <a:t>CEN429 Güvenli Programlama · Hafta 15</a:t>
-            </a:r>
-          </a:p>
-        </p:txBody>
-      </p:sp>
-      <p:sp>
-        <p:nvSpPr>
-          <p:cNvPr id="4" name="TextBox 3"/>
-          <p:cNvSpPr txBox="1"/>
-          <p:nvPr/>
-        </p:nvSpPr>
-        <p:spPr>
-          <a:xfrm>
-            <a:off x="640080" y="6446520"/>
-            <a:ext cx="7315200" cy="274320"/>
-          </a:xfrm>
-          <a:prstGeom prst="rect">
-            <a:avLst/>
-          </a:prstGeom>
-          <a:noFill/>
-        </p:spPr>
-        <p:txBody>
-          <a:bodyPr wrap="square" lIns="45720" rIns="45720">
-            <a:spAutoFit/>
-          </a:bodyPr>
-          <a:lstStyle/>
-          <a:p>
-            <a:r>
-              <a:rPr sz="1000" b="0">
-                <a:solidFill>
-                  <a:srgbClr val="5B6770"/>
-                </a:solidFill>
-              </a:rPr>
-              <a:t>RTEÜ Bilgisayar Mühendisliği · 2026-2027 Güz</a:t>
-            </a:r>
-          </a:p>
-        </p:txBody>
-      </p:sp>
-      <p:sp>
-        <p:nvSpPr>
-          <p:cNvPr id="5" name="TextBox 4"/>
-          <p:cNvSpPr txBox="1"/>
-          <p:nvPr/>
-        </p:nvSpPr>
-        <p:spPr>
-          <a:xfrm>
-            <a:off x="10637215" y="6446520"/>
-            <a:ext cx="914400" cy="274320"/>
-          </a:xfrm>
-          <a:prstGeom prst="rect">
-            <a:avLst/>
-          </a:prstGeom>
-          <a:noFill/>
-        </p:spPr>
-        <p:txBody>
-          <a:bodyPr wrap="square" lIns="45720" rIns="45720">
-            <a:spAutoFit/>
-          </a:bodyPr>
-          <a:lstStyle/>
-          <a:p>
-            <a:pPr algn="r"/>
-            <a:r>
-              <a:rPr sz="1000" b="0">
-                <a:solidFill>
-                  <a:srgbClr val="5B6770"/>
-                </a:solidFill>
-              </a:rPr>
-              <a:t>25</a:t>
-            </a:r>
-          </a:p>
-        </p:txBody>
-      </p:sp>
-      <p:sp>
-        <p:nvSpPr>
-          <p:cNvPr id="6" name="TextBox 5"/>
-          <p:cNvSpPr txBox="1"/>
-          <p:nvPr/>
-        </p:nvSpPr>
-        <p:spPr>
-          <a:xfrm>
-            <a:off x="640080" y="548640"/>
-            <a:ext cx="10911535" cy="731520"/>
-          </a:xfrm>
-          <a:prstGeom prst="rect">
-            <a:avLst/>
-          </a:prstGeom>
-          <a:noFill/>
-        </p:spPr>
-        <p:txBody>
-          <a:bodyPr wrap="square" lIns="45720" rIns="45720" anchor="ctr">
-            <a:spAutoFit/>
-          </a:bodyPr>
-          <a:lstStyle/>
-          <a:p>
-            <a:r>
-              <a:rPr sz="3000" b="1">
-                <a:solidFill>
-                  <a:srgbClr val="006D77"/>
-                </a:solidFill>
-              </a:rPr>
-              <a:t>Bulgu–aksiyon (vizeden)</a:t>
-            </a:r>
-          </a:p>
-        </p:txBody>
-      </p:sp>
-      <p:sp>
-        <p:nvSpPr>
-          <p:cNvPr id="7" name="TextBox 6"/>
-          <p:cNvSpPr txBox="1"/>
-          <p:nvPr/>
-        </p:nvSpPr>
-        <p:spPr>
-          <a:xfrm>
-            <a:off x="640080" y="1325880"/>
-            <a:ext cx="10911535" cy="1219200"/>
-          </a:xfrm>
-          <a:prstGeom prst="rect">
-            <a:avLst/>
-          </a:prstGeom>
-          <a:noFill/>
-        </p:spPr>
-        <p:txBody>
-          <a:bodyPr wrap="square" lIns="45720" rIns="45720">
-            <a:spAutoFit/>
-          </a:bodyPr>
-          <a:lstStyle/>
-          <a:p>
-            <a:pPr>
-              <a:spcAft>
-                <a:spcPts val="300"/>
-              </a:spcAft>
-            </a:pPr>
-            <a:r>
-              <a:rPr sz="2000" b="1">
-                <a:solidFill>
-                  <a:srgbClr val="006D77"/>
-                </a:solidFill>
-              </a:rPr>
-              <a:t>• </a:t>
-            </a:r>
-            <a:r>
-              <a:rPr sz="2000" b="0">
-                <a:solidFill>
-                  <a:srgbClr val="1F2D3A"/>
-                </a:solidFill>
-              </a:rPr>
-              <a:t>Vize geri bildirimleri bir tabloya:</a:t>
-            </a:r>
-          </a:p>
-          <a:p>
-            <a:pPr lvl="1">
-              <a:spcAft>
-                <a:spcPts val="300"/>
-              </a:spcAft>
-            </a:pPr>
-            <a:r>
-              <a:rPr sz="2000" b="1">
-                <a:solidFill>
-                  <a:srgbClr val="006D77"/>
-                </a:solidFill>
-              </a:rPr>
-              <a:t>    – </a:t>
-            </a:r>
-            <a:r>
-              <a:rPr sz="2000" b="0">
-                <a:solidFill>
-                  <a:srgbClr val="1F2D3A"/>
-                </a:solidFill>
-              </a:rPr>
-              <a:t>bulgu → aksiyon → kapanış.</a:t>
-            </a:r>
-          </a:p>
-          <a:p>
-            <a:pPr>
-              <a:spcAft>
-                <a:spcPts val="300"/>
-              </a:spcAft>
-            </a:pPr>
-            <a:r>
-              <a:rPr sz="2000" b="1">
-                <a:solidFill>
-                  <a:srgbClr val="006D77"/>
-                </a:solidFill>
-              </a:rPr>
-              <a:t>• </a:t>
-            </a:r>
-            <a:r>
-              <a:rPr sz="2000" b="0">
-                <a:solidFill>
-                  <a:srgbClr val="1F2D3A"/>
-                </a:solidFill>
-              </a:rPr>
-              <a:t>Değerlendirici bu döngüyü arar.</a:t>
-            </a:r>
-          </a:p>
-        </p:txBody>
-      </p:sp>
-    </p:spTree>
-  </p:cSld>
-  <p:clrMapOvr>
-    <a:masterClrMapping/>
-  </p:clrMapOvr>
-</p:sld>
-</file>
-
-<file path=ppt/slides/slide26.xml><?xml version="1.0" encoding="utf-8"?>
-<p:sld xmlns:a="http://schemas.openxmlformats.org/drawingml/2006/main" xmlns:p="http://schemas.openxmlformats.org/presentationml/2006/main" xmlns:r="http://schemas.openxmlformats.org/officeDocument/2006/relationships">
-  <p:cSld>
-    <p:bg>
-      <p:bgPr>
-        <a:solidFill>
-          <a:srgbClr val="006D77"/>
-        </a:solidFill>
-        <a:effectLst/>
-      </p:bgPr>
-    </p:bg>
-    <p:spTree>
-      <p:nvGrpSpPr>
-        <p:cNvPr id="1" name=""/>
-        <p:cNvGrpSpPr/>
-        <p:nvPr/>
-      </p:nvGrpSpPr>
-      <p:grpSpPr/>
-      <p:sp>
-        <p:nvSpPr>
-          <p:cNvPr id="2" name="TextBox 1"/>
-          <p:cNvSpPr txBox="1"/>
-          <p:nvPr/>
-        </p:nvSpPr>
-        <p:spPr>
-          <a:xfrm>
-            <a:off x="1051560" y="182880"/>
-            <a:ext cx="7315200" cy="320040"/>
-          </a:xfrm>
-          <a:prstGeom prst="rect">
-            <a:avLst/>
-          </a:prstGeom>
-          <a:noFill/>
-        </p:spPr>
-        <p:txBody>
-          <a:bodyPr wrap="square" lIns="45720" rIns="45720">
-            <a:spAutoFit/>
-          </a:bodyPr>
-          <a:lstStyle/>
-          <a:p>
-            <a:r>
-              <a:rPr sz="1100" b="0">
-                <a:solidFill>
-                  <a:srgbClr val="D8F0F2"/>
-                </a:solidFill>
-              </a:rPr>
-              <a:t>CEN429 Güvenli Programlama · Hafta 15</a:t>
-            </a:r>
-          </a:p>
-        </p:txBody>
-      </p:sp>
-      <p:sp>
-        <p:nvSpPr>
-          <p:cNvPr id="3" name="TextBox 2"/>
-          <p:cNvSpPr txBox="1"/>
-          <p:nvPr/>
-        </p:nvSpPr>
-        <p:spPr>
-          <a:xfrm>
-            <a:off x="640080" y="6446520"/>
-            <a:ext cx="7315200" cy="274320"/>
-          </a:xfrm>
-          <a:prstGeom prst="rect">
-            <a:avLst/>
-          </a:prstGeom>
-          <a:noFill/>
-        </p:spPr>
-        <p:txBody>
-          <a:bodyPr wrap="square" lIns="45720" rIns="45720">
-            <a:spAutoFit/>
-          </a:bodyPr>
-          <a:lstStyle/>
-          <a:p>
-            <a:r>
-              <a:rPr sz="1000" b="0">
-                <a:solidFill>
-                  <a:srgbClr val="D8F0F2"/>
-                </a:solidFill>
-              </a:rPr>
-              <a:t>RTEÜ Bilgisayar Mühendisliği · 2026-2027 Güz</a:t>
-            </a:r>
-          </a:p>
-        </p:txBody>
-      </p:sp>
-      <p:sp>
-        <p:nvSpPr>
-          <p:cNvPr id="4" name="TextBox 3"/>
-          <p:cNvSpPr txBox="1"/>
-          <p:nvPr/>
-        </p:nvSpPr>
-        <p:spPr>
-          <a:xfrm>
-            <a:off x="10637215" y="6446520"/>
-            <a:ext cx="914400" cy="274320"/>
-          </a:xfrm>
-          <a:prstGeom prst="rect">
-            <a:avLst/>
-          </a:prstGeom>
-          <a:noFill/>
-        </p:spPr>
-        <p:txBody>
-          <a:bodyPr wrap="square" lIns="45720" rIns="45720">
-            <a:spAutoFit/>
-          </a:bodyPr>
-          <a:lstStyle/>
-          <a:p>
-            <a:pPr algn="r"/>
-            <a:r>
-              <a:rPr sz="1000" b="0">
-                <a:solidFill>
-                  <a:srgbClr val="D8F0F2"/>
-                </a:solidFill>
-              </a:rPr>
-              <a:t>26</a:t>
-            </a:r>
-          </a:p>
-        </p:txBody>
-      </p:sp>
-      <p:sp>
-        <p:nvSpPr>
-          <p:cNvPr id="5" name="TextBox 4"/>
-          <p:cNvSpPr txBox="1"/>
-          <p:nvPr/>
-        </p:nvSpPr>
-        <p:spPr>
-          <a:xfrm>
-            <a:off x="640080" y="2743200"/>
-            <a:ext cx="10911535" cy="1280160"/>
-          </a:xfrm>
-          <a:prstGeom prst="rect">
-            <a:avLst/>
-          </a:prstGeom>
-          <a:noFill/>
-        </p:spPr>
-        <p:txBody>
-          <a:bodyPr wrap="square" lIns="45720" rIns="45720">
-            <a:spAutoFit/>
-          </a:bodyPr>
-          <a:lstStyle/>
-          <a:p>
-            <a:pPr algn="l"/>
-            <a:r>
-              <a:rPr sz="4000" b="1">
-                <a:solidFill>
-                  <a:srgbClr val="FFFFFF"/>
-                </a:solidFill>
-              </a:rPr>
-              <a:t>Ek · Gösterim akışı</a:t>
-            </a:r>
-          </a:p>
-        </p:txBody>
-      </p:sp>
-    </p:spTree>
-  </p:cSld>
-  <p:clrMapOvr>
-    <a:masterClrMapping/>
-  </p:clrMapOvr>
-</p:sld>
-</file>
-
-<file path=ppt/slides/slide27.xml><?xml version="1.0" encoding="utf-8"?>
-<p:sld xmlns:a="http://schemas.openxmlformats.org/drawingml/2006/main" xmlns:p="http://schemas.openxmlformats.org/presentationml/2006/main" xmlns:r="http://schemas.openxmlformats.org/officeDocument/2006/relationships">
-  <p:cSld>
-    <p:spTree>
-      <p:nvGrpSpPr>
-        <p:cNvPr id="1" name=""/>
-        <p:cNvGrpSpPr/>
-        <p:nvPr/>
-      </p:nvGrpSpPr>
-      <p:grpSpPr/>
-      <p:pic>
-        <p:nvPicPr>
-          <p:cNvPr id="2" name="Picture 1" descr="rteu_logo_kucuk.jpg"/>
-          <p:cNvPicPr>
-            <a:picLocks noChangeAspect="1"/>
-          </p:cNvPicPr>
-          <p:nvPr/>
-        </p:nvPicPr>
-        <p:blipFill>
-          <a:blip r:embed="rId2"/>
-          <a:stretch>
-            <a:fillRect/>
-          </a:stretch>
-        </p:blipFill>
-        <p:spPr>
-          <a:xfrm>
-            <a:off x="640080" y="164592"/>
-            <a:ext cx="242773" cy="329184"/>
-          </a:xfrm>
-          <a:prstGeom prst="rect">
-            <a:avLst/>
-          </a:prstGeom>
-        </p:spPr>
-      </p:pic>
-      <p:sp>
-        <p:nvSpPr>
-          <p:cNvPr id="3" name="TextBox 2"/>
-          <p:cNvSpPr txBox="1"/>
-          <p:nvPr/>
-        </p:nvSpPr>
-        <p:spPr>
-          <a:xfrm>
-            <a:off x="1051560" y="182880"/>
-            <a:ext cx="7315200" cy="320040"/>
-          </a:xfrm>
-          <a:prstGeom prst="rect">
-            <a:avLst/>
-          </a:prstGeom>
-          <a:noFill/>
-        </p:spPr>
-        <p:txBody>
-          <a:bodyPr wrap="square" lIns="45720" rIns="45720">
-            <a:spAutoFit/>
-          </a:bodyPr>
-          <a:lstStyle/>
-          <a:p>
-            <a:r>
-              <a:rPr sz="1100" b="0">
-                <a:solidFill>
-                  <a:srgbClr val="5B6770"/>
-                </a:solidFill>
-              </a:rPr>
-              <a:t>CEN429 Güvenli Programlama · Hafta 15</a:t>
-            </a:r>
-          </a:p>
-        </p:txBody>
-      </p:sp>
-      <p:sp>
-        <p:nvSpPr>
-          <p:cNvPr id="4" name="TextBox 3"/>
-          <p:cNvSpPr txBox="1"/>
-          <p:nvPr/>
-        </p:nvSpPr>
-        <p:spPr>
-          <a:xfrm>
-            <a:off x="640080" y="6446520"/>
-            <a:ext cx="7315200" cy="274320"/>
-          </a:xfrm>
-          <a:prstGeom prst="rect">
-            <a:avLst/>
-          </a:prstGeom>
-          <a:noFill/>
-        </p:spPr>
-        <p:txBody>
-          <a:bodyPr wrap="square" lIns="45720" rIns="45720">
-            <a:spAutoFit/>
-          </a:bodyPr>
-          <a:lstStyle/>
-          <a:p>
-            <a:r>
-              <a:rPr sz="1000" b="0">
-                <a:solidFill>
-                  <a:srgbClr val="5B6770"/>
-                </a:solidFill>
-              </a:rPr>
-              <a:t>RTEÜ Bilgisayar Mühendisliği · 2026-2027 Güz</a:t>
-            </a:r>
-          </a:p>
-        </p:txBody>
-      </p:sp>
-      <p:sp>
-        <p:nvSpPr>
-          <p:cNvPr id="5" name="TextBox 4"/>
-          <p:cNvSpPr txBox="1"/>
-          <p:nvPr/>
-        </p:nvSpPr>
-        <p:spPr>
-          <a:xfrm>
-            <a:off x="10637215" y="6446520"/>
-            <a:ext cx="914400" cy="274320"/>
-          </a:xfrm>
-          <a:prstGeom prst="rect">
-            <a:avLst/>
-          </a:prstGeom>
-          <a:noFill/>
-        </p:spPr>
-        <p:txBody>
-          <a:bodyPr wrap="square" lIns="45720" rIns="45720">
-            <a:spAutoFit/>
-          </a:bodyPr>
-          <a:lstStyle/>
-          <a:p>
-            <a:pPr algn="r"/>
-            <a:r>
-              <a:rPr sz="1000" b="0">
-                <a:solidFill>
-                  <a:srgbClr val="5B6770"/>
-                </a:solidFill>
-              </a:rPr>
-              <a:t>27</a:t>
-            </a:r>
-          </a:p>
-        </p:txBody>
-      </p:sp>
-      <p:sp>
-        <p:nvSpPr>
-          <p:cNvPr id="6" name="TextBox 5"/>
-          <p:cNvSpPr txBox="1"/>
-          <p:nvPr/>
-        </p:nvSpPr>
-        <p:spPr>
-          <a:xfrm>
-            <a:off x="640080" y="548640"/>
-            <a:ext cx="10911535" cy="731520"/>
-          </a:xfrm>
-          <a:prstGeom prst="rect">
-            <a:avLst/>
-          </a:prstGeom>
-          <a:noFill/>
-        </p:spPr>
-        <p:txBody>
-          <a:bodyPr wrap="square" lIns="45720" rIns="45720" anchor="ctr">
-            <a:spAutoFit/>
-          </a:bodyPr>
-          <a:lstStyle/>
-          <a:p>
-            <a:r>
-              <a:rPr sz="3000" b="1">
-                <a:solidFill>
-                  <a:srgbClr val="006D77"/>
-                </a:solidFill>
-              </a:rPr>
-              <a:t>Akış · özet + vizeden bu yana</a:t>
-            </a:r>
-          </a:p>
-        </p:txBody>
-      </p:sp>
-      <p:sp>
-        <p:nvSpPr>
-          <p:cNvPr id="7" name="TextBox 6"/>
-          <p:cNvSpPr txBox="1"/>
-          <p:nvPr/>
-        </p:nvSpPr>
-        <p:spPr>
-          <a:xfrm>
-            <a:off x="640080" y="1325880"/>
-            <a:ext cx="10911535" cy="843280"/>
-          </a:xfrm>
-          <a:prstGeom prst="rect">
-            <a:avLst/>
-          </a:prstGeom>
-          <a:noFill/>
-        </p:spPr>
-        <p:txBody>
-          <a:bodyPr wrap="square" lIns="45720" rIns="45720">
-            <a:spAutoFit/>
-          </a:bodyPr>
-          <a:lstStyle/>
-          <a:p>
-            <a:pPr>
-              <a:spcAft>
-                <a:spcPts val="300"/>
-              </a:spcAft>
-            </a:pPr>
-            <a:r>
-              <a:rPr sz="2000" b="1">
-                <a:solidFill>
-                  <a:srgbClr val="006D77"/>
-                </a:solidFill>
-              </a:rPr>
-              <a:t>• </a:t>
-            </a:r>
-            <a:r>
-              <a:rPr sz="2000" b="0">
-                <a:solidFill>
-                  <a:srgbClr val="1F2D3A"/>
-                </a:solidFill>
-              </a:rPr>
-              <a:t>Ürün, mimari, en kritik üç varlık.</a:t>
-            </a:r>
-          </a:p>
-          <a:p>
-            <a:pPr>
-              <a:spcAft>
-                <a:spcPts val="300"/>
-              </a:spcAft>
-            </a:pPr>
-            <a:r>
-              <a:rPr sz="2000" b="1">
-                <a:solidFill>
-                  <a:srgbClr val="006D77"/>
-                </a:solidFill>
-              </a:rPr>
-              <a:t>• </a:t>
-            </a:r>
-            <a:r>
-              <a:rPr sz="2000" b="0">
-                <a:solidFill>
-                  <a:srgbClr val="1F2D3A"/>
-                </a:solidFill>
-              </a:rPr>
-              <a:t>Bulgu–aksiyon listesi.</a:t>
-            </a:r>
-          </a:p>
-        </p:txBody>
-      </p:sp>
-    </p:spTree>
-  </p:cSld>
-  <p:clrMapOvr>
-    <a:masterClrMapping/>
-  </p:clrMapOvr>
-</p:sld>
-</file>
-
-<file path=ppt/slides/slide28.xml><?xml version="1.0" encoding="utf-8"?>
-<p:sld xmlns:a="http://schemas.openxmlformats.org/drawingml/2006/main" xmlns:p="http://schemas.openxmlformats.org/presentationml/2006/main" xmlns:r="http://schemas.openxmlformats.org/officeDocument/2006/relationships">
-  <p:cSld>
-    <p:spTree>
-      <p:nvGrpSpPr>
-        <p:cNvPr id="1" name=""/>
-        <p:cNvGrpSpPr/>
-        <p:nvPr/>
-      </p:nvGrpSpPr>
-      <p:grpSpPr/>
-      <p:pic>
-        <p:nvPicPr>
-          <p:cNvPr id="2" name="Picture 1" descr="rteu_logo_kucuk.jpg"/>
-          <p:cNvPicPr>
-            <a:picLocks noChangeAspect="1"/>
-          </p:cNvPicPr>
-          <p:nvPr/>
-        </p:nvPicPr>
-        <p:blipFill>
-          <a:blip r:embed="rId2"/>
-          <a:stretch>
-            <a:fillRect/>
-          </a:stretch>
-        </p:blipFill>
-        <p:spPr>
-          <a:xfrm>
-            <a:off x="640080" y="164592"/>
-            <a:ext cx="242773" cy="329184"/>
-          </a:xfrm>
-          <a:prstGeom prst="rect">
-            <a:avLst/>
-          </a:prstGeom>
-        </p:spPr>
-      </p:pic>
-      <p:sp>
-        <p:nvSpPr>
-          <p:cNvPr id="3" name="TextBox 2"/>
-          <p:cNvSpPr txBox="1"/>
-          <p:nvPr/>
-        </p:nvSpPr>
-        <p:spPr>
-          <a:xfrm>
-            <a:off x="1051560" y="182880"/>
-            <a:ext cx="7315200" cy="320040"/>
-          </a:xfrm>
-          <a:prstGeom prst="rect">
-            <a:avLst/>
-          </a:prstGeom>
-          <a:noFill/>
-        </p:spPr>
-        <p:txBody>
-          <a:bodyPr wrap="square" lIns="45720" rIns="45720">
-            <a:spAutoFit/>
-          </a:bodyPr>
-          <a:lstStyle/>
-          <a:p>
-            <a:r>
-              <a:rPr sz="1100" b="0">
-                <a:solidFill>
-                  <a:srgbClr val="5B6770"/>
-                </a:solidFill>
-              </a:rPr>
-              <a:t>CEN429 Güvenli Programlama · Hafta 15</a:t>
-            </a:r>
-          </a:p>
-        </p:txBody>
-      </p:sp>
-      <p:sp>
-        <p:nvSpPr>
-          <p:cNvPr id="4" name="TextBox 3"/>
-          <p:cNvSpPr txBox="1"/>
-          <p:nvPr/>
-        </p:nvSpPr>
-        <p:spPr>
-          <a:xfrm>
-            <a:off x="640080" y="6446520"/>
-            <a:ext cx="7315200" cy="274320"/>
-          </a:xfrm>
-          <a:prstGeom prst="rect">
-            <a:avLst/>
-          </a:prstGeom>
-          <a:noFill/>
-        </p:spPr>
-        <p:txBody>
-          <a:bodyPr wrap="square" lIns="45720" rIns="45720">
-            <a:spAutoFit/>
-          </a:bodyPr>
-          <a:lstStyle/>
-          <a:p>
-            <a:r>
-              <a:rPr sz="1000" b="0">
-                <a:solidFill>
-                  <a:srgbClr val="5B6770"/>
-                </a:solidFill>
-              </a:rPr>
-              <a:t>RTEÜ Bilgisayar Mühendisliği · 2026-2027 Güz</a:t>
-            </a:r>
-          </a:p>
-        </p:txBody>
-      </p:sp>
-      <p:sp>
-        <p:nvSpPr>
-          <p:cNvPr id="5" name="TextBox 4"/>
-          <p:cNvSpPr txBox="1"/>
-          <p:nvPr/>
-        </p:nvSpPr>
-        <p:spPr>
-          <a:xfrm>
-            <a:off x="10637215" y="6446520"/>
-            <a:ext cx="914400" cy="274320"/>
-          </a:xfrm>
-          <a:prstGeom prst="rect">
-            <a:avLst/>
-          </a:prstGeom>
-          <a:noFill/>
-        </p:spPr>
-        <p:txBody>
-          <a:bodyPr wrap="square" lIns="45720" rIns="45720">
-            <a:spAutoFit/>
-          </a:bodyPr>
-          <a:lstStyle/>
-          <a:p>
-            <a:pPr algn="r"/>
-            <a:r>
-              <a:rPr sz="1000" b="0">
-                <a:solidFill>
-                  <a:srgbClr val="5B6770"/>
-                </a:solidFill>
-              </a:rPr>
-              <a:t>28</a:t>
-            </a:r>
-          </a:p>
-        </p:txBody>
-      </p:sp>
-      <p:sp>
-        <p:nvSpPr>
-          <p:cNvPr id="6" name="TextBox 5"/>
-          <p:cNvSpPr txBox="1"/>
-          <p:nvPr/>
-        </p:nvSpPr>
-        <p:spPr>
-          <a:xfrm>
-            <a:off x="640080" y="548640"/>
-            <a:ext cx="10911535" cy="731520"/>
-          </a:xfrm>
-          <a:prstGeom prst="rect">
-            <a:avLst/>
-          </a:prstGeom>
-          <a:noFill/>
-        </p:spPr>
-        <p:txBody>
-          <a:bodyPr wrap="square" lIns="45720" rIns="45720" anchor="ctr">
-            <a:spAutoFit/>
-          </a:bodyPr>
-          <a:lstStyle/>
-          <a:p>
-            <a:r>
-              <a:rPr sz="3000" b="1">
-                <a:solidFill>
-                  <a:srgbClr val="006D77"/>
-                </a:solidFill>
-              </a:rPr>
-              <a:t>Akış · canlı gösterim</a:t>
-            </a:r>
-          </a:p>
-        </p:txBody>
-      </p:sp>
-      <p:sp>
-        <p:nvSpPr>
-          <p:cNvPr id="7" name="TextBox 6"/>
-          <p:cNvSpPr txBox="1"/>
-          <p:nvPr/>
-        </p:nvSpPr>
-        <p:spPr>
-          <a:xfrm>
-            <a:off x="640080" y="1325880"/>
-            <a:ext cx="10911535" cy="843280"/>
-          </a:xfrm>
-          <a:prstGeom prst="rect">
-            <a:avLst/>
-          </a:prstGeom>
-          <a:noFill/>
-        </p:spPr>
-        <p:txBody>
-          <a:bodyPr wrap="square" lIns="45720" rIns="45720">
-            <a:spAutoFit/>
-          </a:bodyPr>
-          <a:lstStyle/>
-          <a:p>
-            <a:pPr>
-              <a:spcAft>
-                <a:spcPts val="300"/>
-              </a:spcAft>
-            </a:pPr>
-            <a:r>
-              <a:rPr sz="2000" b="1">
-                <a:solidFill>
-                  <a:srgbClr val="006D77"/>
-                </a:solidFill>
-              </a:rPr>
-              <a:t>• </a:t>
-            </a:r>
-            <a:r>
-              <a:rPr sz="2000" b="0">
-                <a:solidFill>
-                  <a:srgbClr val="1F2D3A"/>
-                </a:solidFill>
-              </a:rPr>
-              <a:t>Kripto, güvenli iletişim ve </a:t>
-            </a:r>
-            <a:r>
-              <a:rPr sz="2000" b="1">
-                <a:solidFill>
-                  <a:srgbClr val="1F2D3A"/>
-                </a:solidFill>
-              </a:rPr>
-              <a:t>bir koruma katmanı</a:t>
-            </a:r>
-            <a:r>
-              <a:rPr sz="2000" b="0">
-                <a:solidFill>
-                  <a:srgbClr val="1F2D3A"/>
-                </a:solidFill>
-              </a:rPr>
-              <a:t> çalışırken.</a:t>
-            </a:r>
-          </a:p>
-          <a:p>
-            <a:pPr>
-              <a:spcAft>
-                <a:spcPts val="300"/>
-              </a:spcAft>
-            </a:pPr>
-            <a:r>
-              <a:rPr sz="2000" b="1">
-                <a:solidFill>
-                  <a:srgbClr val="006D77"/>
-                </a:solidFill>
-              </a:rPr>
-              <a:t>• </a:t>
-            </a:r>
-            <a:r>
-              <a:rPr sz="2000" b="0">
-                <a:solidFill>
-                  <a:srgbClr val="1F2D3A"/>
-                </a:solidFill>
-              </a:rPr>
-              <a:t>Ör. kurcalanmış dosyanın reddi.</a:t>
-            </a:r>
-          </a:p>
-        </p:txBody>
-      </p:sp>
-    </p:spTree>
-  </p:cSld>
-  <p:clrMapOvr>
-    <a:masterClrMapping/>
-  </p:clrMapOvr>
-</p:sld>
-</file>
-
-<file path=ppt/slides/slide29.xml><?xml version="1.0" encoding="utf-8"?>
-<p:sld xmlns:a="http://schemas.openxmlformats.org/drawingml/2006/main" xmlns:p="http://schemas.openxmlformats.org/presentationml/2006/main" xmlns:r="http://schemas.openxmlformats.org/officeDocument/2006/relationships">
-  <p:cSld>
-    <p:spTree>
-      <p:nvGrpSpPr>
-        <p:cNvPr id="1" name=""/>
-        <p:cNvGrpSpPr/>
-        <p:nvPr/>
-      </p:nvGrpSpPr>
-      <p:grpSpPr/>
-      <p:pic>
-        <p:nvPicPr>
-          <p:cNvPr id="2" name="Picture 1" descr="rteu_logo_kucuk.jpg"/>
-          <p:cNvPicPr>
-            <a:picLocks noChangeAspect="1"/>
-          </p:cNvPicPr>
-          <p:nvPr/>
-        </p:nvPicPr>
-        <p:blipFill>
-          <a:blip r:embed="rId2"/>
-          <a:stretch>
-            <a:fillRect/>
-          </a:stretch>
-        </p:blipFill>
-        <p:spPr>
-          <a:xfrm>
-            <a:off x="640080" y="164592"/>
-            <a:ext cx="242773" cy="329184"/>
-          </a:xfrm>
-          <a:prstGeom prst="rect">
-            <a:avLst/>
-          </a:prstGeom>
-        </p:spPr>
-      </p:pic>
-      <p:sp>
-        <p:nvSpPr>
-          <p:cNvPr id="3" name="TextBox 2"/>
-          <p:cNvSpPr txBox="1"/>
-          <p:nvPr/>
-        </p:nvSpPr>
-        <p:spPr>
-          <a:xfrm>
-            <a:off x="1051560" y="182880"/>
-            <a:ext cx="7315200" cy="320040"/>
-          </a:xfrm>
-          <a:prstGeom prst="rect">
-            <a:avLst/>
-          </a:prstGeom>
-          <a:noFill/>
-        </p:spPr>
-        <p:txBody>
-          <a:bodyPr wrap="square" lIns="45720" rIns="45720">
-            <a:spAutoFit/>
-          </a:bodyPr>
-          <a:lstStyle/>
-          <a:p>
-            <a:r>
-              <a:rPr sz="1100" b="0">
-                <a:solidFill>
-                  <a:srgbClr val="5B6770"/>
-                </a:solidFill>
-              </a:rPr>
-              <a:t>CEN429 Güvenli Programlama · Hafta 15</a:t>
-            </a:r>
-          </a:p>
-        </p:txBody>
-      </p:sp>
-      <p:sp>
-        <p:nvSpPr>
-          <p:cNvPr id="4" name="TextBox 3"/>
-          <p:cNvSpPr txBox="1"/>
-          <p:nvPr/>
-        </p:nvSpPr>
-        <p:spPr>
-          <a:xfrm>
-            <a:off x="640080" y="6446520"/>
-            <a:ext cx="7315200" cy="274320"/>
-          </a:xfrm>
-          <a:prstGeom prst="rect">
-            <a:avLst/>
-          </a:prstGeom>
-          <a:noFill/>
-        </p:spPr>
-        <p:txBody>
-          <a:bodyPr wrap="square" lIns="45720" rIns="45720">
-            <a:spAutoFit/>
-          </a:bodyPr>
-          <a:lstStyle/>
-          <a:p>
-            <a:r>
-              <a:rPr sz="1000" b="0">
-                <a:solidFill>
-                  <a:srgbClr val="5B6770"/>
-                </a:solidFill>
-              </a:rPr>
-              <a:t>RTEÜ Bilgisayar Mühendisliği · 2026-2027 Güz</a:t>
-            </a:r>
-          </a:p>
-        </p:txBody>
-      </p:sp>
-      <p:sp>
-        <p:nvSpPr>
-          <p:cNvPr id="5" name="TextBox 4"/>
-          <p:cNvSpPr txBox="1"/>
-          <p:nvPr/>
-        </p:nvSpPr>
-        <p:spPr>
-          <a:xfrm>
-            <a:off x="10637215" y="6446520"/>
-            <a:ext cx="914400" cy="274320"/>
-          </a:xfrm>
-          <a:prstGeom prst="rect">
-            <a:avLst/>
-          </a:prstGeom>
-          <a:noFill/>
-        </p:spPr>
-        <p:txBody>
-          <a:bodyPr wrap="square" lIns="45720" rIns="45720">
-            <a:spAutoFit/>
-          </a:bodyPr>
-          <a:lstStyle/>
-          <a:p>
-            <a:pPr algn="r"/>
-            <a:r>
-              <a:rPr sz="1000" b="0">
-                <a:solidFill>
-                  <a:srgbClr val="5B6770"/>
-                </a:solidFill>
-              </a:rPr>
-              <a:t>29</a:t>
-            </a:r>
-          </a:p>
-        </p:txBody>
-      </p:sp>
-      <p:sp>
-        <p:nvSpPr>
-          <p:cNvPr id="6" name="TextBox 5"/>
-          <p:cNvSpPr txBox="1"/>
-          <p:nvPr/>
-        </p:nvSpPr>
-        <p:spPr>
-          <a:xfrm>
-            <a:off x="640080" y="548640"/>
-            <a:ext cx="10911535" cy="731520"/>
-          </a:xfrm>
-          <a:prstGeom prst="rect">
-            <a:avLst/>
-          </a:prstGeom>
-          <a:noFill/>
-        </p:spPr>
-        <p:txBody>
-          <a:bodyPr wrap="square" lIns="45720" rIns="45720" anchor="ctr">
-            <a:spAutoFit/>
-          </a:bodyPr>
-          <a:lstStyle/>
-          <a:p>
-            <a:r>
-              <a:rPr sz="3000" b="1">
-                <a:solidFill>
-                  <a:srgbClr val="006D77"/>
-                </a:solidFill>
-              </a:rPr>
-              <a:t>Akış · kanıt + kalan risk</a:t>
-            </a:r>
-          </a:p>
-        </p:txBody>
-      </p:sp>
-      <p:sp>
-        <p:nvSpPr>
-          <p:cNvPr id="7" name="TextBox 6"/>
-          <p:cNvSpPr txBox="1"/>
-          <p:nvPr/>
-        </p:nvSpPr>
-        <p:spPr>
-          <a:xfrm>
-            <a:off x="640080" y="1325880"/>
-            <a:ext cx="10911535" cy="843280"/>
-          </a:xfrm>
-          <a:prstGeom prst="rect">
-            <a:avLst/>
-          </a:prstGeom>
-          <a:noFill/>
-        </p:spPr>
-        <p:txBody>
-          <a:bodyPr wrap="square" lIns="45720" rIns="45720">
-            <a:spAutoFit/>
-          </a:bodyPr>
-          <a:lstStyle/>
-          <a:p>
-            <a:pPr>
-              <a:spcAft>
-                <a:spcPts val="300"/>
-              </a:spcAft>
-            </a:pPr>
-            <a:r>
-              <a:rPr sz="2000" b="1">
-                <a:solidFill>
-                  <a:srgbClr val="006D77"/>
-                </a:solidFill>
-              </a:rPr>
-              <a:t>• </a:t>
-            </a:r>
-            <a:r>
-              <a:rPr sz="2000" b="0">
-                <a:solidFill>
-                  <a:srgbClr val="1F2D3A"/>
-                </a:solidFill>
-              </a:rPr>
-              <a:t>Testler, koruma tablosu, SBOM, uyum matrisi.</a:t>
-            </a:r>
-          </a:p>
-          <a:p>
-            <a:pPr>
-              <a:spcAft>
-                <a:spcPts val="300"/>
-              </a:spcAft>
-            </a:pPr>
-            <a:r>
-              <a:rPr sz="2000" b="1">
-                <a:solidFill>
-                  <a:srgbClr val="006D77"/>
-                </a:solidFill>
-              </a:rPr>
-              <a:t>• </a:t>
-            </a:r>
-            <a:r>
-              <a:rPr sz="2000" b="0">
-                <a:solidFill>
-                  <a:srgbClr val="1F2D3A"/>
-                </a:solidFill>
-              </a:rPr>
-              <a:t>Kalan risk: bilerek kapsam dışı olanlar.</a:t>
-            </a:r>
-          </a:p>
-        </p:txBody>
-      </p:sp>
-    </p:spTree>
-  </p:cSld>
-  <p:clrMapOvr>
-    <a:masterClrMapping/>
-  </p:clrMapOvr>
-</p:sld>
-</file>
-
 <file path=ppt/slides/slide3.xml><?xml version="1.0" encoding="utf-8"?>
 <p:sld xmlns:a="http://schemas.openxmlformats.org/drawingml/2006/main" xmlns:p="http://schemas.openxmlformats.org/presentationml/2006/main" xmlns:r="http://schemas.openxmlformats.org/officeDocument/2006/relationships">
   <p:cSld>
@@ -9675,6 +5866,205 @@
                 </a:solidFill>
               </a:rPr>
               <a:t>3</a:t>
+            </a:r>
+          </a:p>
+        </p:txBody>
+      </p:sp>
+      <p:sp>
+        <p:nvSpPr>
+          <p:cNvPr id="6" name="TextBox 5"/>
+          <p:cNvSpPr txBox="1"/>
+          <p:nvPr/>
+        </p:nvSpPr>
+        <p:spPr>
+          <a:xfrm>
+            <a:off x="640080" y="548640"/>
+            <a:ext cx="10911535" cy="731520"/>
+          </a:xfrm>
+          <a:prstGeom prst="rect">
+            <a:avLst/>
+          </a:prstGeom>
+          <a:noFill/>
+        </p:spPr>
+        <p:txBody>
+          <a:bodyPr wrap="square" lIns="45720" rIns="45720" anchor="ctr">
+            <a:spAutoFit/>
+          </a:bodyPr>
+          <a:lstStyle/>
+          <a:p>
+            <a:r>
+              <a:rPr sz="3000" b="1">
+                <a:solidFill>
+                  <a:srgbClr val="006D77"/>
+                </a:solidFill>
+              </a:rPr>
+              <a:t>RAP2 teslimi — şema</a:t>
+            </a:r>
+          </a:p>
+        </p:txBody>
+      </p:sp>
+      <p:pic>
+        <p:nvPicPr>
+          <p:cNvPr id="7" name="Picture 6" descr="h15-01-rap2.png"/>
+          <p:cNvPicPr>
+            <a:picLocks noChangeAspect="1"/>
+          </p:cNvPicPr>
+          <p:nvPr/>
+        </p:nvPicPr>
+        <p:blipFill>
+          <a:blip r:embed="rId3"/>
+          <a:stretch>
+            <a:fillRect/>
+          </a:stretch>
+        </p:blipFill>
+        <p:spPr>
+          <a:xfrm>
+            <a:off x="1335562" y="1325880"/>
+            <a:ext cx="9520571" cy="4828032"/>
+          </a:xfrm>
+          <a:prstGeom prst="rect">
+            <a:avLst/>
+          </a:prstGeom>
+        </p:spPr>
+      </p:pic>
+    </p:spTree>
+  </p:cSld>
+  <p:clrMapOvr>
+    <a:masterClrMapping/>
+  </p:clrMapOvr>
+</p:sld>
+</file>
+
+<file path=ppt/slides/slide4.xml><?xml version="1.0" encoding="utf-8"?>
+<p:sld xmlns:a="http://schemas.openxmlformats.org/drawingml/2006/main" xmlns:p="http://schemas.openxmlformats.org/presentationml/2006/main" xmlns:r="http://schemas.openxmlformats.org/officeDocument/2006/relationships">
+  <p:cSld>
+    <p:spTree>
+      <p:nvGrpSpPr>
+        <p:cNvPr id="1" name=""/>
+        <p:cNvGrpSpPr/>
+        <p:nvPr/>
+      </p:nvGrpSpPr>
+      <p:grpSpPr/>
+      <p:pic>
+        <p:nvPicPr>
+          <p:cNvPr id="2" name="Picture 1" descr="rteu_logo_kucuk.jpg"/>
+          <p:cNvPicPr>
+            <a:picLocks noChangeAspect="1"/>
+          </p:cNvPicPr>
+          <p:nvPr/>
+        </p:nvPicPr>
+        <p:blipFill>
+          <a:blip r:embed="rId2"/>
+          <a:stretch>
+            <a:fillRect/>
+          </a:stretch>
+        </p:blipFill>
+        <p:spPr>
+          <a:xfrm>
+            <a:off x="640080" y="164592"/>
+            <a:ext cx="242773" cy="329184"/>
+          </a:xfrm>
+          <a:prstGeom prst="rect">
+            <a:avLst/>
+          </a:prstGeom>
+        </p:spPr>
+      </p:pic>
+      <p:sp>
+        <p:nvSpPr>
+          <p:cNvPr id="3" name="TextBox 2"/>
+          <p:cNvSpPr txBox="1"/>
+          <p:nvPr/>
+        </p:nvSpPr>
+        <p:spPr>
+          <a:xfrm>
+            <a:off x="1051560" y="182880"/>
+            <a:ext cx="7315200" cy="320040"/>
+          </a:xfrm>
+          <a:prstGeom prst="rect">
+            <a:avLst/>
+          </a:prstGeom>
+          <a:noFill/>
+        </p:spPr>
+        <p:txBody>
+          <a:bodyPr wrap="square" lIns="45720" rIns="45720">
+            <a:spAutoFit/>
+          </a:bodyPr>
+          <a:lstStyle/>
+          <a:p>
+            <a:r>
+              <a:rPr sz="1100" b="0">
+                <a:solidFill>
+                  <a:srgbClr val="5B6770"/>
+                </a:solidFill>
+              </a:rPr>
+              <a:t>CEN429 Güvenli Programlama · Hafta 15</a:t>
+            </a:r>
+          </a:p>
+        </p:txBody>
+      </p:sp>
+      <p:sp>
+        <p:nvSpPr>
+          <p:cNvPr id="4" name="TextBox 3"/>
+          <p:cNvSpPr txBox="1"/>
+          <p:nvPr/>
+        </p:nvSpPr>
+        <p:spPr>
+          <a:xfrm>
+            <a:off x="640080" y="6446520"/>
+            <a:ext cx="7315200" cy="274320"/>
+          </a:xfrm>
+          <a:prstGeom prst="rect">
+            <a:avLst/>
+          </a:prstGeom>
+          <a:noFill/>
+        </p:spPr>
+        <p:txBody>
+          <a:bodyPr wrap="square" lIns="45720" rIns="45720">
+            <a:spAutoFit/>
+          </a:bodyPr>
+          <a:lstStyle/>
+          <a:p>
+            <a:r>
+              <a:rPr sz="1000" b="0">
+                <a:solidFill>
+                  <a:srgbClr val="5B6770"/>
+                </a:solidFill>
+              </a:rPr>
+              <a:t>RTEÜ Bilgisayar Mühendisliği · 2026-2027 Güz</a:t>
+            </a:r>
+          </a:p>
+        </p:txBody>
+      </p:sp>
+      <p:sp>
+        <p:nvSpPr>
+          <p:cNvPr id="5" name="TextBox 4"/>
+          <p:cNvSpPr txBox="1"/>
+          <p:nvPr/>
+        </p:nvSpPr>
+        <p:spPr>
+          <a:xfrm>
+            <a:off x="10637215" y="6446520"/>
+            <a:ext cx="914400" cy="274320"/>
+          </a:xfrm>
+          <a:prstGeom prst="rect">
+            <a:avLst/>
+          </a:prstGeom>
+          <a:noFill/>
+        </p:spPr>
+        <p:txBody>
+          <a:bodyPr wrap="square" lIns="45720" rIns="45720">
+            <a:spAutoFit/>
+          </a:bodyPr>
+          <a:lstStyle/>
+          <a:p>
+            <a:pPr algn="r"/>
+            <a:r>
+              <a:rPr sz="1000" b="0">
+                <a:solidFill>
+                  <a:srgbClr val="5B6770"/>
+                </a:solidFill>
+              </a:rPr>
+              <a:t>4</a:t>
             </a:r>
           </a:p>
         </p:txBody>
@@ -10275,2216 +6665,6 @@
 </p:sld>
 </file>
 
-<file path=ppt/slides/slide30.xml><?xml version="1.0" encoding="utf-8"?>
-<p:sld xmlns:a="http://schemas.openxmlformats.org/drawingml/2006/main" xmlns:p="http://schemas.openxmlformats.org/presentationml/2006/main" xmlns:r="http://schemas.openxmlformats.org/officeDocument/2006/relationships">
-  <p:cSld>
-    <p:bg>
-      <p:bgPr>
-        <a:solidFill>
-          <a:srgbClr val="006D77"/>
-        </a:solidFill>
-        <a:effectLst/>
-      </p:bgPr>
-    </p:bg>
-    <p:spTree>
-      <p:nvGrpSpPr>
-        <p:cNvPr id="1" name=""/>
-        <p:cNvGrpSpPr/>
-        <p:nvPr/>
-      </p:nvGrpSpPr>
-      <p:grpSpPr/>
-      <p:sp>
-        <p:nvSpPr>
-          <p:cNvPr id="2" name="TextBox 1"/>
-          <p:cNvSpPr txBox="1"/>
-          <p:nvPr/>
-        </p:nvSpPr>
-        <p:spPr>
-          <a:xfrm>
-            <a:off x="1051560" y="182880"/>
-            <a:ext cx="7315200" cy="320040"/>
-          </a:xfrm>
-          <a:prstGeom prst="rect">
-            <a:avLst/>
-          </a:prstGeom>
-          <a:noFill/>
-        </p:spPr>
-        <p:txBody>
-          <a:bodyPr wrap="square" lIns="45720" rIns="45720">
-            <a:spAutoFit/>
-          </a:bodyPr>
-          <a:lstStyle/>
-          <a:p>
-            <a:r>
-              <a:rPr sz="1100" b="0">
-                <a:solidFill>
-                  <a:srgbClr val="D8F0F2"/>
-                </a:solidFill>
-              </a:rPr>
-              <a:t>CEN429 Güvenli Programlama · Hafta 15</a:t>
-            </a:r>
-          </a:p>
-        </p:txBody>
-      </p:sp>
-      <p:sp>
-        <p:nvSpPr>
-          <p:cNvPr id="3" name="TextBox 2"/>
-          <p:cNvSpPr txBox="1"/>
-          <p:nvPr/>
-        </p:nvSpPr>
-        <p:spPr>
-          <a:xfrm>
-            <a:off x="640080" y="6446520"/>
-            <a:ext cx="7315200" cy="274320"/>
-          </a:xfrm>
-          <a:prstGeom prst="rect">
-            <a:avLst/>
-          </a:prstGeom>
-          <a:noFill/>
-        </p:spPr>
-        <p:txBody>
-          <a:bodyPr wrap="square" lIns="45720" rIns="45720">
-            <a:spAutoFit/>
-          </a:bodyPr>
-          <a:lstStyle/>
-          <a:p>
-            <a:r>
-              <a:rPr sz="1000" b="0">
-                <a:solidFill>
-                  <a:srgbClr val="D8F0F2"/>
-                </a:solidFill>
-              </a:rPr>
-              <a:t>RTEÜ Bilgisayar Mühendisliği · 2026-2027 Güz</a:t>
-            </a:r>
-          </a:p>
-        </p:txBody>
-      </p:sp>
-      <p:sp>
-        <p:nvSpPr>
-          <p:cNvPr id="4" name="TextBox 3"/>
-          <p:cNvSpPr txBox="1"/>
-          <p:nvPr/>
-        </p:nvSpPr>
-        <p:spPr>
-          <a:xfrm>
-            <a:off x="10637215" y="6446520"/>
-            <a:ext cx="914400" cy="274320"/>
-          </a:xfrm>
-          <a:prstGeom prst="rect">
-            <a:avLst/>
-          </a:prstGeom>
-          <a:noFill/>
-        </p:spPr>
-        <p:txBody>
-          <a:bodyPr wrap="square" lIns="45720" rIns="45720">
-            <a:spAutoFit/>
-          </a:bodyPr>
-          <a:lstStyle/>
-          <a:p>
-            <a:pPr algn="r"/>
-            <a:r>
-              <a:rPr sz="1000" b="0">
-                <a:solidFill>
-                  <a:srgbClr val="D8F0F2"/>
-                </a:solidFill>
-              </a:rPr>
-              <a:t>30</a:t>
-            </a:r>
-          </a:p>
-        </p:txBody>
-      </p:sp>
-      <p:sp>
-        <p:nvSpPr>
-          <p:cNvPr id="5" name="TextBox 4"/>
-          <p:cNvSpPr txBox="1"/>
-          <p:nvPr/>
-        </p:nvSpPr>
-        <p:spPr>
-          <a:xfrm>
-            <a:off x="640080" y="2743200"/>
-            <a:ext cx="10911535" cy="1280160"/>
-          </a:xfrm>
-          <a:prstGeom prst="rect">
-            <a:avLst/>
-          </a:prstGeom>
-          <a:noFill/>
-        </p:spPr>
-        <p:txBody>
-          <a:bodyPr wrap="square" lIns="45720" rIns="45720">
-            <a:spAutoFit/>
-          </a:bodyPr>
-          <a:lstStyle/>
-          <a:p>
-            <a:pPr algn="l"/>
-            <a:r>
-              <a:rPr sz="4000" b="1">
-                <a:solidFill>
-                  <a:srgbClr val="FFFFFF"/>
-                </a:solidFill>
-              </a:rPr>
-              <a:t>Ek · Örnek sorular</a:t>
-            </a:r>
-          </a:p>
-        </p:txBody>
-      </p:sp>
-    </p:spTree>
-  </p:cSld>
-  <p:clrMapOvr>
-    <a:masterClrMapping/>
-  </p:clrMapOvr>
-</p:sld>
-</file>
-
-<file path=ppt/slides/slide31.xml><?xml version="1.0" encoding="utf-8"?>
-<p:sld xmlns:a="http://schemas.openxmlformats.org/drawingml/2006/main" xmlns:p="http://schemas.openxmlformats.org/presentationml/2006/main" xmlns:r="http://schemas.openxmlformats.org/officeDocument/2006/relationships">
-  <p:cSld>
-    <p:spTree>
-      <p:nvGrpSpPr>
-        <p:cNvPr id="1" name=""/>
-        <p:cNvGrpSpPr/>
-        <p:nvPr/>
-      </p:nvGrpSpPr>
-      <p:grpSpPr/>
-      <p:pic>
-        <p:nvPicPr>
-          <p:cNvPr id="2" name="Picture 1" descr="rteu_logo_kucuk.jpg"/>
-          <p:cNvPicPr>
-            <a:picLocks noChangeAspect="1"/>
-          </p:cNvPicPr>
-          <p:nvPr/>
-        </p:nvPicPr>
-        <p:blipFill>
-          <a:blip r:embed="rId2"/>
-          <a:stretch>
-            <a:fillRect/>
-          </a:stretch>
-        </p:blipFill>
-        <p:spPr>
-          <a:xfrm>
-            <a:off x="640080" y="164592"/>
-            <a:ext cx="242773" cy="329184"/>
-          </a:xfrm>
-          <a:prstGeom prst="rect">
-            <a:avLst/>
-          </a:prstGeom>
-        </p:spPr>
-      </p:pic>
-      <p:sp>
-        <p:nvSpPr>
-          <p:cNvPr id="3" name="TextBox 2"/>
-          <p:cNvSpPr txBox="1"/>
-          <p:nvPr/>
-        </p:nvSpPr>
-        <p:spPr>
-          <a:xfrm>
-            <a:off x="1051560" y="182880"/>
-            <a:ext cx="7315200" cy="320040"/>
-          </a:xfrm>
-          <a:prstGeom prst="rect">
-            <a:avLst/>
-          </a:prstGeom>
-          <a:noFill/>
-        </p:spPr>
-        <p:txBody>
-          <a:bodyPr wrap="square" lIns="45720" rIns="45720">
-            <a:spAutoFit/>
-          </a:bodyPr>
-          <a:lstStyle/>
-          <a:p>
-            <a:r>
-              <a:rPr sz="1100" b="0">
-                <a:solidFill>
-                  <a:srgbClr val="5B6770"/>
-                </a:solidFill>
-              </a:rPr>
-              <a:t>CEN429 Güvenli Programlama · Hafta 15</a:t>
-            </a:r>
-          </a:p>
-        </p:txBody>
-      </p:sp>
-      <p:sp>
-        <p:nvSpPr>
-          <p:cNvPr id="4" name="TextBox 3"/>
-          <p:cNvSpPr txBox="1"/>
-          <p:nvPr/>
-        </p:nvSpPr>
-        <p:spPr>
-          <a:xfrm>
-            <a:off x="640080" y="6446520"/>
-            <a:ext cx="7315200" cy="274320"/>
-          </a:xfrm>
-          <a:prstGeom prst="rect">
-            <a:avLst/>
-          </a:prstGeom>
-          <a:noFill/>
-        </p:spPr>
-        <p:txBody>
-          <a:bodyPr wrap="square" lIns="45720" rIns="45720">
-            <a:spAutoFit/>
-          </a:bodyPr>
-          <a:lstStyle/>
-          <a:p>
-            <a:r>
-              <a:rPr sz="1000" b="0">
-                <a:solidFill>
-                  <a:srgbClr val="5B6770"/>
-                </a:solidFill>
-              </a:rPr>
-              <a:t>RTEÜ Bilgisayar Mühendisliği · 2026-2027 Güz</a:t>
-            </a:r>
-          </a:p>
-        </p:txBody>
-      </p:sp>
-      <p:sp>
-        <p:nvSpPr>
-          <p:cNvPr id="5" name="TextBox 4"/>
-          <p:cNvSpPr txBox="1"/>
-          <p:nvPr/>
-        </p:nvSpPr>
-        <p:spPr>
-          <a:xfrm>
-            <a:off x="10637215" y="6446520"/>
-            <a:ext cx="914400" cy="274320"/>
-          </a:xfrm>
-          <a:prstGeom prst="rect">
-            <a:avLst/>
-          </a:prstGeom>
-          <a:noFill/>
-        </p:spPr>
-        <p:txBody>
-          <a:bodyPr wrap="square" lIns="45720" rIns="45720">
-            <a:spAutoFit/>
-          </a:bodyPr>
-          <a:lstStyle/>
-          <a:p>
-            <a:pPr algn="r"/>
-            <a:r>
-              <a:rPr sz="1000" b="0">
-                <a:solidFill>
-                  <a:srgbClr val="5B6770"/>
-                </a:solidFill>
-              </a:rPr>
-              <a:t>31</a:t>
-            </a:r>
-          </a:p>
-        </p:txBody>
-      </p:sp>
-      <p:sp>
-        <p:nvSpPr>
-          <p:cNvPr id="6" name="TextBox 5"/>
-          <p:cNvSpPr txBox="1"/>
-          <p:nvPr/>
-        </p:nvSpPr>
-        <p:spPr>
-          <a:xfrm>
-            <a:off x="640080" y="548640"/>
-            <a:ext cx="10911535" cy="731520"/>
-          </a:xfrm>
-          <a:prstGeom prst="rect">
-            <a:avLst/>
-          </a:prstGeom>
-          <a:noFill/>
-        </p:spPr>
-        <p:txBody>
-          <a:bodyPr wrap="square" lIns="45720" rIns="45720" anchor="ctr">
-            <a:spAutoFit/>
-          </a:bodyPr>
-          <a:lstStyle/>
-          <a:p>
-            <a:r>
-              <a:rPr sz="3000" b="1">
-                <a:solidFill>
-                  <a:srgbClr val="006D77"/>
-                </a:solidFill>
-              </a:rPr>
-              <a:t>Soru 1</a:t>
-            </a:r>
-          </a:p>
-        </p:txBody>
-      </p:sp>
-      <p:sp>
-        <p:nvSpPr>
-          <p:cNvPr id="7" name="TextBox 6"/>
-          <p:cNvSpPr txBox="1"/>
-          <p:nvPr/>
-        </p:nvSpPr>
-        <p:spPr>
-          <a:xfrm>
-            <a:off x="640080" y="1325880"/>
-            <a:ext cx="10911535" cy="439928"/>
-          </a:xfrm>
-          <a:prstGeom prst="rect">
-            <a:avLst/>
-          </a:prstGeom>
-          <a:noFill/>
-        </p:spPr>
-        <p:txBody>
-          <a:bodyPr wrap="square" lIns="45720" rIns="45720">
-            <a:spAutoFit/>
-          </a:bodyPr>
-          <a:lstStyle/>
-          <a:p>
-            <a:pPr algn="l"/>
-            <a:r>
-              <a:rPr sz="2000" b="1">
-                <a:solidFill>
-                  <a:srgbClr val="1F2D3A"/>
-                </a:solidFill>
-              </a:rPr>
-              <a:t>Bu anahtar hangi anahtardan türetiliyor, nerede duruyor, ne zaman siliniyor?</a:t>
-            </a:r>
-          </a:p>
-        </p:txBody>
-      </p:sp>
-    </p:spTree>
-  </p:cSld>
-  <p:clrMapOvr>
-    <a:masterClrMapping/>
-  </p:clrMapOvr>
-</p:sld>
-</file>
-
-<file path=ppt/slides/slide32.xml><?xml version="1.0" encoding="utf-8"?>
-<p:sld xmlns:a="http://schemas.openxmlformats.org/drawingml/2006/main" xmlns:p="http://schemas.openxmlformats.org/presentationml/2006/main" xmlns:r="http://schemas.openxmlformats.org/officeDocument/2006/relationships">
-  <p:cSld>
-    <p:spTree>
-      <p:nvGrpSpPr>
-        <p:cNvPr id="1" name=""/>
-        <p:cNvGrpSpPr/>
-        <p:nvPr/>
-      </p:nvGrpSpPr>
-      <p:grpSpPr/>
-      <p:pic>
-        <p:nvPicPr>
-          <p:cNvPr id="2" name="Picture 1" descr="rteu_logo_kucuk.jpg"/>
-          <p:cNvPicPr>
-            <a:picLocks noChangeAspect="1"/>
-          </p:cNvPicPr>
-          <p:nvPr/>
-        </p:nvPicPr>
-        <p:blipFill>
-          <a:blip r:embed="rId2"/>
-          <a:stretch>
-            <a:fillRect/>
-          </a:stretch>
-        </p:blipFill>
-        <p:spPr>
-          <a:xfrm>
-            <a:off x="640080" y="164592"/>
-            <a:ext cx="242773" cy="329184"/>
-          </a:xfrm>
-          <a:prstGeom prst="rect">
-            <a:avLst/>
-          </a:prstGeom>
-        </p:spPr>
-      </p:pic>
-      <p:sp>
-        <p:nvSpPr>
-          <p:cNvPr id="3" name="TextBox 2"/>
-          <p:cNvSpPr txBox="1"/>
-          <p:nvPr/>
-        </p:nvSpPr>
-        <p:spPr>
-          <a:xfrm>
-            <a:off x="1051560" y="182880"/>
-            <a:ext cx="7315200" cy="320040"/>
-          </a:xfrm>
-          <a:prstGeom prst="rect">
-            <a:avLst/>
-          </a:prstGeom>
-          <a:noFill/>
-        </p:spPr>
-        <p:txBody>
-          <a:bodyPr wrap="square" lIns="45720" rIns="45720">
-            <a:spAutoFit/>
-          </a:bodyPr>
-          <a:lstStyle/>
-          <a:p>
-            <a:r>
-              <a:rPr sz="1100" b="0">
-                <a:solidFill>
-                  <a:srgbClr val="5B6770"/>
-                </a:solidFill>
-              </a:rPr>
-              <a:t>CEN429 Güvenli Programlama · Hafta 15</a:t>
-            </a:r>
-          </a:p>
-        </p:txBody>
-      </p:sp>
-      <p:sp>
-        <p:nvSpPr>
-          <p:cNvPr id="4" name="TextBox 3"/>
-          <p:cNvSpPr txBox="1"/>
-          <p:nvPr/>
-        </p:nvSpPr>
-        <p:spPr>
-          <a:xfrm>
-            <a:off x="640080" y="6446520"/>
-            <a:ext cx="7315200" cy="274320"/>
-          </a:xfrm>
-          <a:prstGeom prst="rect">
-            <a:avLst/>
-          </a:prstGeom>
-          <a:noFill/>
-        </p:spPr>
-        <p:txBody>
-          <a:bodyPr wrap="square" lIns="45720" rIns="45720">
-            <a:spAutoFit/>
-          </a:bodyPr>
-          <a:lstStyle/>
-          <a:p>
-            <a:r>
-              <a:rPr sz="1000" b="0">
-                <a:solidFill>
-                  <a:srgbClr val="5B6770"/>
-                </a:solidFill>
-              </a:rPr>
-              <a:t>RTEÜ Bilgisayar Mühendisliği · 2026-2027 Güz</a:t>
-            </a:r>
-          </a:p>
-        </p:txBody>
-      </p:sp>
-      <p:sp>
-        <p:nvSpPr>
-          <p:cNvPr id="5" name="TextBox 4"/>
-          <p:cNvSpPr txBox="1"/>
-          <p:nvPr/>
-        </p:nvSpPr>
-        <p:spPr>
-          <a:xfrm>
-            <a:off x="10637215" y="6446520"/>
-            <a:ext cx="914400" cy="274320"/>
-          </a:xfrm>
-          <a:prstGeom prst="rect">
-            <a:avLst/>
-          </a:prstGeom>
-          <a:noFill/>
-        </p:spPr>
-        <p:txBody>
-          <a:bodyPr wrap="square" lIns="45720" rIns="45720">
-            <a:spAutoFit/>
-          </a:bodyPr>
-          <a:lstStyle/>
-          <a:p>
-            <a:pPr algn="r"/>
-            <a:r>
-              <a:rPr sz="1000" b="0">
-                <a:solidFill>
-                  <a:srgbClr val="5B6770"/>
-                </a:solidFill>
-              </a:rPr>
-              <a:t>32</a:t>
-            </a:r>
-          </a:p>
-        </p:txBody>
-      </p:sp>
-      <p:sp>
-        <p:nvSpPr>
-          <p:cNvPr id="6" name="TextBox 5"/>
-          <p:cNvSpPr txBox="1"/>
-          <p:nvPr/>
-        </p:nvSpPr>
-        <p:spPr>
-          <a:xfrm>
-            <a:off x="640080" y="548640"/>
-            <a:ext cx="10911535" cy="731520"/>
-          </a:xfrm>
-          <a:prstGeom prst="rect">
-            <a:avLst/>
-          </a:prstGeom>
-          <a:noFill/>
-        </p:spPr>
-        <p:txBody>
-          <a:bodyPr wrap="square" lIns="45720" rIns="45720" anchor="ctr">
-            <a:spAutoFit/>
-          </a:bodyPr>
-          <a:lstStyle/>
-          <a:p>
-            <a:r>
-              <a:rPr sz="3000" b="1">
-                <a:solidFill>
-                  <a:srgbClr val="006D77"/>
-                </a:solidFill>
-              </a:rPr>
-              <a:t>Soru 2</a:t>
-            </a:r>
-          </a:p>
-        </p:txBody>
-      </p:sp>
-      <p:sp>
-        <p:nvSpPr>
-          <p:cNvPr id="7" name="TextBox 6"/>
-          <p:cNvSpPr txBox="1"/>
-          <p:nvPr/>
-        </p:nvSpPr>
-        <p:spPr>
-          <a:xfrm>
-            <a:off x="640080" y="1325880"/>
-            <a:ext cx="10911535" cy="439928"/>
-          </a:xfrm>
-          <a:prstGeom prst="rect">
-            <a:avLst/>
-          </a:prstGeom>
-          <a:noFill/>
-        </p:spPr>
-        <p:txBody>
-          <a:bodyPr wrap="square" lIns="45720" rIns="45720">
-            <a:spAutoFit/>
-          </a:bodyPr>
-          <a:lstStyle/>
-          <a:p>
-            <a:pPr algn="l"/>
-            <a:r>
-              <a:rPr sz="2000" b="1">
-                <a:solidFill>
-                  <a:srgbClr val="1F2D3A"/>
-                </a:solidFill>
-              </a:rPr>
-              <a:t>Sertifika zinciri ve ad denetimi nerede yapılıyor?</a:t>
-            </a:r>
-          </a:p>
-        </p:txBody>
-      </p:sp>
-    </p:spTree>
-  </p:cSld>
-  <p:clrMapOvr>
-    <a:masterClrMapping/>
-  </p:clrMapOvr>
-</p:sld>
-</file>
-
-<file path=ppt/slides/slide33.xml><?xml version="1.0" encoding="utf-8"?>
-<p:sld xmlns:a="http://schemas.openxmlformats.org/drawingml/2006/main" xmlns:p="http://schemas.openxmlformats.org/presentationml/2006/main" xmlns:r="http://schemas.openxmlformats.org/officeDocument/2006/relationships">
-  <p:cSld>
-    <p:spTree>
-      <p:nvGrpSpPr>
-        <p:cNvPr id="1" name=""/>
-        <p:cNvGrpSpPr/>
-        <p:nvPr/>
-      </p:nvGrpSpPr>
-      <p:grpSpPr/>
-      <p:pic>
-        <p:nvPicPr>
-          <p:cNvPr id="2" name="Picture 1" descr="rteu_logo_kucuk.jpg"/>
-          <p:cNvPicPr>
-            <a:picLocks noChangeAspect="1"/>
-          </p:cNvPicPr>
-          <p:nvPr/>
-        </p:nvPicPr>
-        <p:blipFill>
-          <a:blip r:embed="rId2"/>
-          <a:stretch>
-            <a:fillRect/>
-          </a:stretch>
-        </p:blipFill>
-        <p:spPr>
-          <a:xfrm>
-            <a:off x="640080" y="164592"/>
-            <a:ext cx="242773" cy="329184"/>
-          </a:xfrm>
-          <a:prstGeom prst="rect">
-            <a:avLst/>
-          </a:prstGeom>
-        </p:spPr>
-      </p:pic>
-      <p:sp>
-        <p:nvSpPr>
-          <p:cNvPr id="3" name="TextBox 2"/>
-          <p:cNvSpPr txBox="1"/>
-          <p:nvPr/>
-        </p:nvSpPr>
-        <p:spPr>
-          <a:xfrm>
-            <a:off x="1051560" y="182880"/>
-            <a:ext cx="7315200" cy="320040"/>
-          </a:xfrm>
-          <a:prstGeom prst="rect">
-            <a:avLst/>
-          </a:prstGeom>
-          <a:noFill/>
-        </p:spPr>
-        <p:txBody>
-          <a:bodyPr wrap="square" lIns="45720" rIns="45720">
-            <a:spAutoFit/>
-          </a:bodyPr>
-          <a:lstStyle/>
-          <a:p>
-            <a:r>
-              <a:rPr sz="1100" b="0">
-                <a:solidFill>
-                  <a:srgbClr val="5B6770"/>
-                </a:solidFill>
-              </a:rPr>
-              <a:t>CEN429 Güvenli Programlama · Hafta 15</a:t>
-            </a:r>
-          </a:p>
-        </p:txBody>
-      </p:sp>
-      <p:sp>
-        <p:nvSpPr>
-          <p:cNvPr id="4" name="TextBox 3"/>
-          <p:cNvSpPr txBox="1"/>
-          <p:nvPr/>
-        </p:nvSpPr>
-        <p:spPr>
-          <a:xfrm>
-            <a:off x="640080" y="6446520"/>
-            <a:ext cx="7315200" cy="274320"/>
-          </a:xfrm>
-          <a:prstGeom prst="rect">
-            <a:avLst/>
-          </a:prstGeom>
-          <a:noFill/>
-        </p:spPr>
-        <p:txBody>
-          <a:bodyPr wrap="square" lIns="45720" rIns="45720">
-            <a:spAutoFit/>
-          </a:bodyPr>
-          <a:lstStyle/>
-          <a:p>
-            <a:r>
-              <a:rPr sz="1000" b="0">
-                <a:solidFill>
-                  <a:srgbClr val="5B6770"/>
-                </a:solidFill>
-              </a:rPr>
-              <a:t>RTEÜ Bilgisayar Mühendisliği · 2026-2027 Güz</a:t>
-            </a:r>
-          </a:p>
-        </p:txBody>
-      </p:sp>
-      <p:sp>
-        <p:nvSpPr>
-          <p:cNvPr id="5" name="TextBox 4"/>
-          <p:cNvSpPr txBox="1"/>
-          <p:nvPr/>
-        </p:nvSpPr>
-        <p:spPr>
-          <a:xfrm>
-            <a:off x="10637215" y="6446520"/>
-            <a:ext cx="914400" cy="274320"/>
-          </a:xfrm>
-          <a:prstGeom prst="rect">
-            <a:avLst/>
-          </a:prstGeom>
-          <a:noFill/>
-        </p:spPr>
-        <p:txBody>
-          <a:bodyPr wrap="square" lIns="45720" rIns="45720">
-            <a:spAutoFit/>
-          </a:bodyPr>
-          <a:lstStyle/>
-          <a:p>
-            <a:pPr algn="r"/>
-            <a:r>
-              <a:rPr sz="1000" b="0">
-                <a:solidFill>
-                  <a:srgbClr val="5B6770"/>
-                </a:solidFill>
-              </a:rPr>
-              <a:t>33</a:t>
-            </a:r>
-          </a:p>
-        </p:txBody>
-      </p:sp>
-      <p:sp>
-        <p:nvSpPr>
-          <p:cNvPr id="6" name="TextBox 5"/>
-          <p:cNvSpPr txBox="1"/>
-          <p:nvPr/>
-        </p:nvSpPr>
-        <p:spPr>
-          <a:xfrm>
-            <a:off x="640080" y="548640"/>
-            <a:ext cx="10911535" cy="731520"/>
-          </a:xfrm>
-          <a:prstGeom prst="rect">
-            <a:avLst/>
-          </a:prstGeom>
-          <a:noFill/>
-        </p:spPr>
-        <p:txBody>
-          <a:bodyPr wrap="square" lIns="45720" rIns="45720" anchor="ctr">
-            <a:spAutoFit/>
-          </a:bodyPr>
-          <a:lstStyle/>
-          <a:p>
-            <a:r>
-              <a:rPr sz="3000" b="1">
-                <a:solidFill>
-                  <a:srgbClr val="006D77"/>
-                </a:solidFill>
-              </a:rPr>
-              <a:t>Soru 3</a:t>
-            </a:r>
-          </a:p>
-        </p:txBody>
-      </p:sp>
-      <p:sp>
-        <p:nvSpPr>
-          <p:cNvPr id="7" name="TextBox 6"/>
-          <p:cNvSpPr txBox="1"/>
-          <p:nvPr/>
-        </p:nvSpPr>
-        <p:spPr>
-          <a:xfrm>
-            <a:off x="640080" y="1325880"/>
-            <a:ext cx="10911535" cy="439928"/>
-          </a:xfrm>
-          <a:prstGeom prst="rect">
-            <a:avLst/>
-          </a:prstGeom>
-          <a:noFill/>
-        </p:spPr>
-        <p:txBody>
-          <a:bodyPr wrap="square" lIns="45720" rIns="45720">
-            <a:spAutoFit/>
-          </a:bodyPr>
-          <a:lstStyle/>
-          <a:p>
-            <a:pPr algn="l"/>
-            <a:r>
-              <a:rPr sz="2000" b="1">
-                <a:solidFill>
-                  <a:srgbClr val="1F2D3A"/>
-                </a:solidFill>
-              </a:rPr>
-              <a:t>İmza doğrulaması başarısızsa ne oluyor? Eski imzalı sürüm yüklenebilir mi?</a:t>
-            </a:r>
-          </a:p>
-        </p:txBody>
-      </p:sp>
-    </p:spTree>
-  </p:cSld>
-  <p:clrMapOvr>
-    <a:masterClrMapping/>
-  </p:clrMapOvr>
-</p:sld>
-</file>
-
-<file path=ppt/slides/slide34.xml><?xml version="1.0" encoding="utf-8"?>
-<p:sld xmlns:a="http://schemas.openxmlformats.org/drawingml/2006/main" xmlns:p="http://schemas.openxmlformats.org/presentationml/2006/main" xmlns:r="http://schemas.openxmlformats.org/officeDocument/2006/relationships">
-  <p:cSld>
-    <p:spTree>
-      <p:nvGrpSpPr>
-        <p:cNvPr id="1" name=""/>
-        <p:cNvGrpSpPr/>
-        <p:nvPr/>
-      </p:nvGrpSpPr>
-      <p:grpSpPr/>
-      <p:pic>
-        <p:nvPicPr>
-          <p:cNvPr id="2" name="Picture 1" descr="rteu_logo_kucuk.jpg"/>
-          <p:cNvPicPr>
-            <a:picLocks noChangeAspect="1"/>
-          </p:cNvPicPr>
-          <p:nvPr/>
-        </p:nvPicPr>
-        <p:blipFill>
-          <a:blip r:embed="rId2"/>
-          <a:stretch>
-            <a:fillRect/>
-          </a:stretch>
-        </p:blipFill>
-        <p:spPr>
-          <a:xfrm>
-            <a:off x="640080" y="164592"/>
-            <a:ext cx="242773" cy="329184"/>
-          </a:xfrm>
-          <a:prstGeom prst="rect">
-            <a:avLst/>
-          </a:prstGeom>
-        </p:spPr>
-      </p:pic>
-      <p:sp>
-        <p:nvSpPr>
-          <p:cNvPr id="3" name="TextBox 2"/>
-          <p:cNvSpPr txBox="1"/>
-          <p:nvPr/>
-        </p:nvSpPr>
-        <p:spPr>
-          <a:xfrm>
-            <a:off x="1051560" y="182880"/>
-            <a:ext cx="7315200" cy="320040"/>
-          </a:xfrm>
-          <a:prstGeom prst="rect">
-            <a:avLst/>
-          </a:prstGeom>
-          <a:noFill/>
-        </p:spPr>
-        <p:txBody>
-          <a:bodyPr wrap="square" lIns="45720" rIns="45720">
-            <a:spAutoFit/>
-          </a:bodyPr>
-          <a:lstStyle/>
-          <a:p>
-            <a:r>
-              <a:rPr sz="1100" b="0">
-                <a:solidFill>
-                  <a:srgbClr val="5B6770"/>
-                </a:solidFill>
-              </a:rPr>
-              <a:t>CEN429 Güvenli Programlama · Hafta 15</a:t>
-            </a:r>
-          </a:p>
-        </p:txBody>
-      </p:sp>
-      <p:sp>
-        <p:nvSpPr>
-          <p:cNvPr id="4" name="TextBox 3"/>
-          <p:cNvSpPr txBox="1"/>
-          <p:nvPr/>
-        </p:nvSpPr>
-        <p:spPr>
-          <a:xfrm>
-            <a:off x="640080" y="6446520"/>
-            <a:ext cx="7315200" cy="274320"/>
-          </a:xfrm>
-          <a:prstGeom prst="rect">
-            <a:avLst/>
-          </a:prstGeom>
-          <a:noFill/>
-        </p:spPr>
-        <p:txBody>
-          <a:bodyPr wrap="square" lIns="45720" rIns="45720">
-            <a:spAutoFit/>
-          </a:bodyPr>
-          <a:lstStyle/>
-          <a:p>
-            <a:r>
-              <a:rPr sz="1000" b="0">
-                <a:solidFill>
-                  <a:srgbClr val="5B6770"/>
-                </a:solidFill>
-              </a:rPr>
-              <a:t>RTEÜ Bilgisayar Mühendisliği · 2026-2027 Güz</a:t>
-            </a:r>
-          </a:p>
-        </p:txBody>
-      </p:sp>
-      <p:sp>
-        <p:nvSpPr>
-          <p:cNvPr id="5" name="TextBox 4"/>
-          <p:cNvSpPr txBox="1"/>
-          <p:nvPr/>
-        </p:nvSpPr>
-        <p:spPr>
-          <a:xfrm>
-            <a:off x="10637215" y="6446520"/>
-            <a:ext cx="914400" cy="274320"/>
-          </a:xfrm>
-          <a:prstGeom prst="rect">
-            <a:avLst/>
-          </a:prstGeom>
-          <a:noFill/>
-        </p:spPr>
-        <p:txBody>
-          <a:bodyPr wrap="square" lIns="45720" rIns="45720">
-            <a:spAutoFit/>
-          </a:bodyPr>
-          <a:lstStyle/>
-          <a:p>
-            <a:pPr algn="r"/>
-            <a:r>
-              <a:rPr sz="1000" b="0">
-                <a:solidFill>
-                  <a:srgbClr val="5B6770"/>
-                </a:solidFill>
-              </a:rPr>
-              <a:t>34</a:t>
-            </a:r>
-          </a:p>
-        </p:txBody>
-      </p:sp>
-      <p:sp>
-        <p:nvSpPr>
-          <p:cNvPr id="6" name="TextBox 5"/>
-          <p:cNvSpPr txBox="1"/>
-          <p:nvPr/>
-        </p:nvSpPr>
-        <p:spPr>
-          <a:xfrm>
-            <a:off x="640080" y="548640"/>
-            <a:ext cx="10911535" cy="731520"/>
-          </a:xfrm>
-          <a:prstGeom prst="rect">
-            <a:avLst/>
-          </a:prstGeom>
-          <a:noFill/>
-        </p:spPr>
-        <p:txBody>
-          <a:bodyPr wrap="square" lIns="45720" rIns="45720" anchor="ctr">
-            <a:spAutoFit/>
-          </a:bodyPr>
-          <a:lstStyle/>
-          <a:p>
-            <a:r>
-              <a:rPr sz="3000" b="1">
-                <a:solidFill>
-                  <a:srgbClr val="006D77"/>
-                </a:solidFill>
-              </a:rPr>
-              <a:t>Soru 4</a:t>
-            </a:r>
-          </a:p>
-        </p:txBody>
-      </p:sp>
-      <p:sp>
-        <p:nvSpPr>
-          <p:cNvPr id="7" name="TextBox 6"/>
-          <p:cNvSpPr txBox="1"/>
-          <p:nvPr/>
-        </p:nvSpPr>
-        <p:spPr>
-          <a:xfrm>
-            <a:off x="640080" y="1325880"/>
-            <a:ext cx="10911535" cy="439928"/>
-          </a:xfrm>
-          <a:prstGeom prst="rect">
-            <a:avLst/>
-          </a:prstGeom>
-          <a:noFill/>
-        </p:spPr>
-        <p:txBody>
-          <a:bodyPr wrap="square" lIns="45720" rIns="45720">
-            <a:spAutoFit/>
-          </a:bodyPr>
-          <a:lstStyle/>
-          <a:p>
-            <a:pPr algn="l"/>
-            <a:r>
-              <a:rPr sz="2000" b="1">
-                <a:solidFill>
-                  <a:srgbClr val="1F2D3A"/>
-                </a:solidFill>
-              </a:rPr>
-              <a:t>Gizlemenin maliyetini ölçtünüz mü? Hangi fonksiyonu neden gizlediniz?</a:t>
-            </a:r>
-          </a:p>
-        </p:txBody>
-      </p:sp>
-    </p:spTree>
-  </p:cSld>
-  <p:clrMapOvr>
-    <a:masterClrMapping/>
-  </p:clrMapOvr>
-</p:sld>
-</file>
-
-<file path=ppt/slides/slide35.xml><?xml version="1.0" encoding="utf-8"?>
-<p:sld xmlns:a="http://schemas.openxmlformats.org/drawingml/2006/main" xmlns:p="http://schemas.openxmlformats.org/presentationml/2006/main" xmlns:r="http://schemas.openxmlformats.org/officeDocument/2006/relationships">
-  <p:cSld>
-    <p:spTree>
-      <p:nvGrpSpPr>
-        <p:cNvPr id="1" name=""/>
-        <p:cNvGrpSpPr/>
-        <p:nvPr/>
-      </p:nvGrpSpPr>
-      <p:grpSpPr/>
-      <p:pic>
-        <p:nvPicPr>
-          <p:cNvPr id="2" name="Picture 1" descr="rteu_logo_kucuk.jpg"/>
-          <p:cNvPicPr>
-            <a:picLocks noChangeAspect="1"/>
-          </p:cNvPicPr>
-          <p:nvPr/>
-        </p:nvPicPr>
-        <p:blipFill>
-          <a:blip r:embed="rId2"/>
-          <a:stretch>
-            <a:fillRect/>
-          </a:stretch>
-        </p:blipFill>
-        <p:spPr>
-          <a:xfrm>
-            <a:off x="640080" y="164592"/>
-            <a:ext cx="242773" cy="329184"/>
-          </a:xfrm>
-          <a:prstGeom prst="rect">
-            <a:avLst/>
-          </a:prstGeom>
-        </p:spPr>
-      </p:pic>
-      <p:sp>
-        <p:nvSpPr>
-          <p:cNvPr id="3" name="TextBox 2"/>
-          <p:cNvSpPr txBox="1"/>
-          <p:nvPr/>
-        </p:nvSpPr>
-        <p:spPr>
-          <a:xfrm>
-            <a:off x="1051560" y="182880"/>
-            <a:ext cx="7315200" cy="320040"/>
-          </a:xfrm>
-          <a:prstGeom prst="rect">
-            <a:avLst/>
-          </a:prstGeom>
-          <a:noFill/>
-        </p:spPr>
-        <p:txBody>
-          <a:bodyPr wrap="square" lIns="45720" rIns="45720">
-            <a:spAutoFit/>
-          </a:bodyPr>
-          <a:lstStyle/>
-          <a:p>
-            <a:r>
-              <a:rPr sz="1100" b="0">
-                <a:solidFill>
-                  <a:srgbClr val="5B6770"/>
-                </a:solidFill>
-              </a:rPr>
-              <a:t>CEN429 Güvenli Programlama · Hafta 15</a:t>
-            </a:r>
-          </a:p>
-        </p:txBody>
-      </p:sp>
-      <p:sp>
-        <p:nvSpPr>
-          <p:cNvPr id="4" name="TextBox 3"/>
-          <p:cNvSpPr txBox="1"/>
-          <p:nvPr/>
-        </p:nvSpPr>
-        <p:spPr>
-          <a:xfrm>
-            <a:off x="640080" y="6446520"/>
-            <a:ext cx="7315200" cy="274320"/>
-          </a:xfrm>
-          <a:prstGeom prst="rect">
-            <a:avLst/>
-          </a:prstGeom>
-          <a:noFill/>
-        </p:spPr>
-        <p:txBody>
-          <a:bodyPr wrap="square" lIns="45720" rIns="45720">
-            <a:spAutoFit/>
-          </a:bodyPr>
-          <a:lstStyle/>
-          <a:p>
-            <a:r>
-              <a:rPr sz="1000" b="0">
-                <a:solidFill>
-                  <a:srgbClr val="5B6770"/>
-                </a:solidFill>
-              </a:rPr>
-              <a:t>RTEÜ Bilgisayar Mühendisliği · 2026-2027 Güz</a:t>
-            </a:r>
-          </a:p>
-        </p:txBody>
-      </p:sp>
-      <p:sp>
-        <p:nvSpPr>
-          <p:cNvPr id="5" name="TextBox 4"/>
-          <p:cNvSpPr txBox="1"/>
-          <p:nvPr/>
-        </p:nvSpPr>
-        <p:spPr>
-          <a:xfrm>
-            <a:off x="10637215" y="6446520"/>
-            <a:ext cx="914400" cy="274320"/>
-          </a:xfrm>
-          <a:prstGeom prst="rect">
-            <a:avLst/>
-          </a:prstGeom>
-          <a:noFill/>
-        </p:spPr>
-        <p:txBody>
-          <a:bodyPr wrap="square" lIns="45720" rIns="45720">
-            <a:spAutoFit/>
-          </a:bodyPr>
-          <a:lstStyle/>
-          <a:p>
-            <a:pPr algn="r"/>
-            <a:r>
-              <a:rPr sz="1000" b="0">
-                <a:solidFill>
-                  <a:srgbClr val="5B6770"/>
-                </a:solidFill>
-              </a:rPr>
-              <a:t>35</a:t>
-            </a:r>
-          </a:p>
-        </p:txBody>
-      </p:sp>
-      <p:sp>
-        <p:nvSpPr>
-          <p:cNvPr id="6" name="TextBox 5"/>
-          <p:cNvSpPr txBox="1"/>
-          <p:nvPr/>
-        </p:nvSpPr>
-        <p:spPr>
-          <a:xfrm>
-            <a:off x="640080" y="548640"/>
-            <a:ext cx="10911535" cy="731520"/>
-          </a:xfrm>
-          <a:prstGeom prst="rect">
-            <a:avLst/>
-          </a:prstGeom>
-          <a:noFill/>
-        </p:spPr>
-        <p:txBody>
-          <a:bodyPr wrap="square" lIns="45720" rIns="45720" anchor="ctr">
-            <a:spAutoFit/>
-          </a:bodyPr>
-          <a:lstStyle/>
-          <a:p>
-            <a:r>
-              <a:rPr sz="3000" b="1">
-                <a:solidFill>
-                  <a:srgbClr val="006D77"/>
-                </a:solidFill>
-              </a:rPr>
-              <a:t>Soru 5</a:t>
-            </a:r>
-          </a:p>
-        </p:txBody>
-      </p:sp>
-      <p:sp>
-        <p:nvSpPr>
-          <p:cNvPr id="7" name="TextBox 6"/>
-          <p:cNvSpPr txBox="1"/>
-          <p:nvPr/>
-        </p:nvSpPr>
-        <p:spPr>
-          <a:xfrm>
-            <a:off x="640080" y="1325880"/>
-            <a:ext cx="10911535" cy="439928"/>
-          </a:xfrm>
-          <a:prstGeom prst="rect">
-            <a:avLst/>
-          </a:prstGeom>
-          <a:noFill/>
-        </p:spPr>
-        <p:txBody>
-          <a:bodyPr wrap="square" lIns="45720" rIns="45720">
-            <a:spAutoFit/>
-          </a:bodyPr>
-          <a:lstStyle/>
-          <a:p>
-            <a:pPr algn="l"/>
-            <a:r>
-              <a:rPr sz="2000" b="1">
-                <a:solidFill>
-                  <a:srgbClr val="1F2D3A"/>
-                </a:solidFill>
-              </a:rPr>
-              <a:t>Uyum matrisinde şu "karşılandı" satırının kanıtı nerede?</a:t>
-            </a:r>
-          </a:p>
-        </p:txBody>
-      </p:sp>
-    </p:spTree>
-  </p:cSld>
-  <p:clrMapOvr>
-    <a:masterClrMapping/>
-  </p:clrMapOvr>
-</p:sld>
-</file>
-
-<file path=ppt/slides/slide36.xml><?xml version="1.0" encoding="utf-8"?>
-<p:sld xmlns:a="http://schemas.openxmlformats.org/drawingml/2006/main" xmlns:p="http://schemas.openxmlformats.org/presentationml/2006/main" xmlns:r="http://schemas.openxmlformats.org/officeDocument/2006/relationships">
-  <p:cSld>
-    <p:bg>
-      <p:bgPr>
-        <a:solidFill>
-          <a:srgbClr val="006D77"/>
-        </a:solidFill>
-        <a:effectLst/>
-      </p:bgPr>
-    </p:bg>
-    <p:spTree>
-      <p:nvGrpSpPr>
-        <p:cNvPr id="1" name=""/>
-        <p:cNvGrpSpPr/>
-        <p:nvPr/>
-      </p:nvGrpSpPr>
-      <p:grpSpPr/>
-      <p:sp>
-        <p:nvSpPr>
-          <p:cNvPr id="2" name="TextBox 1"/>
-          <p:cNvSpPr txBox="1"/>
-          <p:nvPr/>
-        </p:nvSpPr>
-        <p:spPr>
-          <a:xfrm>
-            <a:off x="1051560" y="182880"/>
-            <a:ext cx="7315200" cy="320040"/>
-          </a:xfrm>
-          <a:prstGeom prst="rect">
-            <a:avLst/>
-          </a:prstGeom>
-          <a:noFill/>
-        </p:spPr>
-        <p:txBody>
-          <a:bodyPr wrap="square" lIns="45720" rIns="45720">
-            <a:spAutoFit/>
-          </a:bodyPr>
-          <a:lstStyle/>
-          <a:p>
-            <a:r>
-              <a:rPr sz="1100" b="0">
-                <a:solidFill>
-                  <a:srgbClr val="D8F0F2"/>
-                </a:solidFill>
-              </a:rPr>
-              <a:t>CEN429 Güvenli Programlama · Hafta 15</a:t>
-            </a:r>
-          </a:p>
-        </p:txBody>
-      </p:sp>
-      <p:sp>
-        <p:nvSpPr>
-          <p:cNvPr id="3" name="TextBox 2"/>
-          <p:cNvSpPr txBox="1"/>
-          <p:nvPr/>
-        </p:nvSpPr>
-        <p:spPr>
-          <a:xfrm>
-            <a:off x="640080" y="6446520"/>
-            <a:ext cx="7315200" cy="274320"/>
-          </a:xfrm>
-          <a:prstGeom prst="rect">
-            <a:avLst/>
-          </a:prstGeom>
-          <a:noFill/>
-        </p:spPr>
-        <p:txBody>
-          <a:bodyPr wrap="square" lIns="45720" rIns="45720">
-            <a:spAutoFit/>
-          </a:bodyPr>
-          <a:lstStyle/>
-          <a:p>
-            <a:r>
-              <a:rPr sz="1000" b="0">
-                <a:solidFill>
-                  <a:srgbClr val="D8F0F2"/>
-                </a:solidFill>
-              </a:rPr>
-              <a:t>RTEÜ Bilgisayar Mühendisliği · 2026-2027 Güz</a:t>
-            </a:r>
-          </a:p>
-        </p:txBody>
-      </p:sp>
-      <p:sp>
-        <p:nvSpPr>
-          <p:cNvPr id="4" name="TextBox 3"/>
-          <p:cNvSpPr txBox="1"/>
-          <p:nvPr/>
-        </p:nvSpPr>
-        <p:spPr>
-          <a:xfrm>
-            <a:off x="10637215" y="6446520"/>
-            <a:ext cx="914400" cy="274320"/>
-          </a:xfrm>
-          <a:prstGeom prst="rect">
-            <a:avLst/>
-          </a:prstGeom>
-          <a:noFill/>
-        </p:spPr>
-        <p:txBody>
-          <a:bodyPr wrap="square" lIns="45720" rIns="45720">
-            <a:spAutoFit/>
-          </a:bodyPr>
-          <a:lstStyle/>
-          <a:p>
-            <a:pPr algn="r"/>
-            <a:r>
-              <a:rPr sz="1000" b="0">
-                <a:solidFill>
-                  <a:srgbClr val="D8F0F2"/>
-                </a:solidFill>
-              </a:rPr>
-              <a:t>36</a:t>
-            </a:r>
-          </a:p>
-        </p:txBody>
-      </p:sp>
-      <p:sp>
-        <p:nvSpPr>
-          <p:cNvPr id="5" name="TextBox 4"/>
-          <p:cNvSpPr txBox="1"/>
-          <p:nvPr/>
-        </p:nvSpPr>
-        <p:spPr>
-          <a:xfrm>
-            <a:off x="640080" y="2743200"/>
-            <a:ext cx="10911535" cy="1280160"/>
-          </a:xfrm>
-          <a:prstGeom prst="rect">
-            <a:avLst/>
-          </a:prstGeom>
-          <a:noFill/>
-        </p:spPr>
-        <p:txBody>
-          <a:bodyPr wrap="square" lIns="45720" rIns="45720">
-            <a:spAutoFit/>
-          </a:bodyPr>
-          <a:lstStyle/>
-          <a:p>
-            <a:pPr algn="l"/>
-            <a:r>
-              <a:rPr sz="4000" b="1">
-                <a:solidFill>
-                  <a:srgbClr val="FFFFFF"/>
-                </a:solidFill>
-              </a:rPr>
-              <a:t>Ek · Sık yapılan hatalar</a:t>
-            </a:r>
-          </a:p>
-        </p:txBody>
-      </p:sp>
-    </p:spTree>
-  </p:cSld>
-  <p:clrMapOvr>
-    <a:masterClrMapping/>
-  </p:clrMapOvr>
-</p:sld>
-</file>
-
-<file path=ppt/slides/slide37.xml><?xml version="1.0" encoding="utf-8"?>
-<p:sld xmlns:a="http://schemas.openxmlformats.org/drawingml/2006/main" xmlns:p="http://schemas.openxmlformats.org/presentationml/2006/main" xmlns:r="http://schemas.openxmlformats.org/officeDocument/2006/relationships">
-  <p:cSld>
-    <p:spTree>
-      <p:nvGrpSpPr>
-        <p:cNvPr id="1" name=""/>
-        <p:cNvGrpSpPr/>
-        <p:nvPr/>
-      </p:nvGrpSpPr>
-      <p:grpSpPr/>
-      <p:pic>
-        <p:nvPicPr>
-          <p:cNvPr id="2" name="Picture 1" descr="rteu_logo_kucuk.jpg"/>
-          <p:cNvPicPr>
-            <a:picLocks noChangeAspect="1"/>
-          </p:cNvPicPr>
-          <p:nvPr/>
-        </p:nvPicPr>
-        <p:blipFill>
-          <a:blip r:embed="rId2"/>
-          <a:stretch>
-            <a:fillRect/>
-          </a:stretch>
-        </p:blipFill>
-        <p:spPr>
-          <a:xfrm>
-            <a:off x="640080" y="164592"/>
-            <a:ext cx="242773" cy="329184"/>
-          </a:xfrm>
-          <a:prstGeom prst="rect">
-            <a:avLst/>
-          </a:prstGeom>
-        </p:spPr>
-      </p:pic>
-      <p:sp>
-        <p:nvSpPr>
-          <p:cNvPr id="3" name="TextBox 2"/>
-          <p:cNvSpPr txBox="1"/>
-          <p:nvPr/>
-        </p:nvSpPr>
-        <p:spPr>
-          <a:xfrm>
-            <a:off x="1051560" y="182880"/>
-            <a:ext cx="7315200" cy="320040"/>
-          </a:xfrm>
-          <a:prstGeom prst="rect">
-            <a:avLst/>
-          </a:prstGeom>
-          <a:noFill/>
-        </p:spPr>
-        <p:txBody>
-          <a:bodyPr wrap="square" lIns="45720" rIns="45720">
-            <a:spAutoFit/>
-          </a:bodyPr>
-          <a:lstStyle/>
-          <a:p>
-            <a:r>
-              <a:rPr sz="1100" b="0">
-                <a:solidFill>
-                  <a:srgbClr val="5B6770"/>
-                </a:solidFill>
-              </a:rPr>
-              <a:t>CEN429 Güvenli Programlama · Hafta 15</a:t>
-            </a:r>
-          </a:p>
-        </p:txBody>
-      </p:sp>
-      <p:sp>
-        <p:nvSpPr>
-          <p:cNvPr id="4" name="TextBox 3"/>
-          <p:cNvSpPr txBox="1"/>
-          <p:nvPr/>
-        </p:nvSpPr>
-        <p:spPr>
-          <a:xfrm>
-            <a:off x="640080" y="6446520"/>
-            <a:ext cx="7315200" cy="274320"/>
-          </a:xfrm>
-          <a:prstGeom prst="rect">
-            <a:avLst/>
-          </a:prstGeom>
-          <a:noFill/>
-        </p:spPr>
-        <p:txBody>
-          <a:bodyPr wrap="square" lIns="45720" rIns="45720">
-            <a:spAutoFit/>
-          </a:bodyPr>
-          <a:lstStyle/>
-          <a:p>
-            <a:r>
-              <a:rPr sz="1000" b="0">
-                <a:solidFill>
-                  <a:srgbClr val="5B6770"/>
-                </a:solidFill>
-              </a:rPr>
-              <a:t>RTEÜ Bilgisayar Mühendisliği · 2026-2027 Güz</a:t>
-            </a:r>
-          </a:p>
-        </p:txBody>
-      </p:sp>
-      <p:sp>
-        <p:nvSpPr>
-          <p:cNvPr id="5" name="TextBox 4"/>
-          <p:cNvSpPr txBox="1"/>
-          <p:nvPr/>
-        </p:nvSpPr>
-        <p:spPr>
-          <a:xfrm>
-            <a:off x="10637215" y="6446520"/>
-            <a:ext cx="914400" cy="274320"/>
-          </a:xfrm>
-          <a:prstGeom prst="rect">
-            <a:avLst/>
-          </a:prstGeom>
-          <a:noFill/>
-        </p:spPr>
-        <p:txBody>
-          <a:bodyPr wrap="square" lIns="45720" rIns="45720">
-            <a:spAutoFit/>
-          </a:bodyPr>
-          <a:lstStyle/>
-          <a:p>
-            <a:pPr algn="r"/>
-            <a:r>
-              <a:rPr sz="1000" b="0">
-                <a:solidFill>
-                  <a:srgbClr val="5B6770"/>
-                </a:solidFill>
-              </a:rPr>
-              <a:t>37</a:t>
-            </a:r>
-          </a:p>
-        </p:txBody>
-      </p:sp>
-      <p:sp>
-        <p:nvSpPr>
-          <p:cNvPr id="6" name="TextBox 5"/>
-          <p:cNvSpPr txBox="1"/>
-          <p:nvPr/>
-        </p:nvSpPr>
-        <p:spPr>
-          <a:xfrm>
-            <a:off x="640080" y="548640"/>
-            <a:ext cx="10911535" cy="731520"/>
-          </a:xfrm>
-          <a:prstGeom prst="rect">
-            <a:avLst/>
-          </a:prstGeom>
-          <a:noFill/>
-        </p:spPr>
-        <p:txBody>
-          <a:bodyPr wrap="square" lIns="45720" rIns="45720" anchor="ctr">
-            <a:spAutoFit/>
-          </a:bodyPr>
-          <a:lstStyle/>
-          <a:p>
-            <a:r>
-              <a:rPr sz="3000" b="1">
-                <a:solidFill>
-                  <a:srgbClr val="006D77"/>
-                </a:solidFill>
-              </a:rPr>
-              <a:t>Hata listesi</a:t>
-            </a:r>
-          </a:p>
-        </p:txBody>
-      </p:sp>
-      <p:sp>
-        <p:nvSpPr>
-          <p:cNvPr id="7" name="TextBox 6"/>
-          <p:cNvSpPr txBox="1"/>
-          <p:nvPr/>
-        </p:nvSpPr>
-        <p:spPr>
-          <a:xfrm>
-            <a:off x="640080" y="1325880"/>
-            <a:ext cx="10911535" cy="2346960"/>
-          </a:xfrm>
-          <a:prstGeom prst="rect">
-            <a:avLst/>
-          </a:prstGeom>
-          <a:noFill/>
-        </p:spPr>
-        <p:txBody>
-          <a:bodyPr wrap="square" lIns="45720" rIns="45720">
-            <a:spAutoFit/>
-          </a:bodyPr>
-          <a:lstStyle/>
-          <a:p>
-            <a:pPr>
-              <a:spcAft>
-                <a:spcPts val="300"/>
-              </a:spcAft>
-            </a:pPr>
-            <a:r>
-              <a:rPr sz="2000" b="1">
-                <a:solidFill>
-                  <a:srgbClr val="006D77"/>
-                </a:solidFill>
-              </a:rPr>
-              <a:t>• </a:t>
-            </a:r>
-            <a:r>
-              <a:rPr sz="2000" b="0">
-                <a:solidFill>
-                  <a:srgbClr val="1F2D3A"/>
-                </a:solidFill>
-              </a:rPr>
-              <a:t>Test planı var, </a:t>
-            </a:r>
-            <a:r>
-              <a:rPr sz="2000" b="1">
-                <a:solidFill>
-                  <a:srgbClr val="1F2D3A"/>
-                </a:solidFill>
-              </a:rPr>
-              <a:t>sonuç</a:t>
-            </a:r>
-            <a:r>
-              <a:rPr sz="2000" b="0">
-                <a:solidFill>
-                  <a:srgbClr val="1F2D3A"/>
-                </a:solidFill>
-              </a:rPr>
-              <a:t> yok.</a:t>
-            </a:r>
-          </a:p>
-          <a:p>
-            <a:pPr>
-              <a:spcAft>
-                <a:spcPts val="300"/>
-              </a:spcAft>
-            </a:pPr>
-            <a:r>
-              <a:rPr sz="2000" b="1">
-                <a:solidFill>
-                  <a:srgbClr val="006D77"/>
-                </a:solidFill>
-              </a:rPr>
-              <a:t>• </a:t>
-            </a:r>
-            <a:r>
-              <a:rPr sz="2000" b="0">
-                <a:solidFill>
-                  <a:srgbClr val="1F2D3A"/>
-                </a:solidFill>
-              </a:rPr>
-              <a:t>Kanıtsız "karşılandı".</a:t>
-            </a:r>
-          </a:p>
-          <a:p>
-            <a:pPr>
-              <a:spcAft>
-                <a:spcPts val="300"/>
-              </a:spcAft>
-            </a:pPr>
-            <a:r>
-              <a:rPr sz="2000" b="1">
-                <a:solidFill>
-                  <a:srgbClr val="006D77"/>
-                </a:solidFill>
-              </a:rPr>
-              <a:t>• </a:t>
-            </a:r>
-            <a:r>
-              <a:rPr sz="2000" b="0">
-                <a:solidFill>
-                  <a:srgbClr val="1F2D3A"/>
-                </a:solidFill>
-              </a:rPr>
-              <a:t>Kılavuz ile kod sürümü farklı.</a:t>
-            </a:r>
-          </a:p>
-          <a:p>
-            <a:pPr>
-              <a:spcAft>
-                <a:spcPts val="300"/>
-              </a:spcAft>
-            </a:pPr>
-            <a:r>
-              <a:rPr sz="2000" b="1">
-                <a:solidFill>
-                  <a:srgbClr val="006D77"/>
-                </a:solidFill>
-              </a:rPr>
-              <a:t>• </a:t>
-            </a:r>
-            <a:r>
-              <a:rPr sz="2000" b="0">
-                <a:solidFill>
-                  <a:srgbClr val="1F2D3A"/>
-                </a:solidFill>
-              </a:rPr>
-              <a:t>Kalan risk boş.</a:t>
-            </a:r>
-          </a:p>
-          <a:p>
-            <a:pPr>
-              <a:spcAft>
-                <a:spcPts val="300"/>
-              </a:spcAft>
-            </a:pPr>
-            <a:r>
-              <a:rPr sz="2000" b="1">
-                <a:solidFill>
-                  <a:srgbClr val="006D77"/>
-                </a:solidFill>
-              </a:rPr>
-              <a:t>• </a:t>
-            </a:r>
-            <a:r>
-              <a:rPr sz="2000" b="0">
-                <a:solidFill>
-                  <a:srgbClr val="1F2D3A"/>
-                </a:solidFill>
-              </a:rPr>
-              <a:t>Vize geri bildirimi yok sayılmış.</a:t>
-            </a:r>
-          </a:p>
-          <a:p>
-            <a:pPr>
-              <a:spcAft>
-                <a:spcPts val="300"/>
-              </a:spcAft>
-            </a:pPr>
-            <a:r>
-              <a:rPr sz="2000" b="1">
-                <a:solidFill>
-                  <a:srgbClr val="006D77"/>
-                </a:solidFill>
-              </a:rPr>
-              <a:t>• </a:t>
-            </a:r>
-            <a:r>
-              <a:rPr sz="2000" b="0">
-                <a:solidFill>
-                  <a:srgbClr val="1F2D3A"/>
-                </a:solidFill>
-              </a:rPr>
-              <a:t>Depoda gerçek sır/kişisel veri.</a:t>
-            </a:r>
-          </a:p>
-        </p:txBody>
-      </p:sp>
-    </p:spTree>
-  </p:cSld>
-  <p:clrMapOvr>
-    <a:masterClrMapping/>
-  </p:clrMapOvr>
-</p:sld>
-</file>
-
-<file path=ppt/slides/slide38.xml><?xml version="1.0" encoding="utf-8"?>
-<p:sld xmlns:a="http://schemas.openxmlformats.org/drawingml/2006/main" xmlns:p="http://schemas.openxmlformats.org/presentationml/2006/main" xmlns:r="http://schemas.openxmlformats.org/officeDocument/2006/relationships">
-  <p:cSld>
-    <p:spTree>
-      <p:nvGrpSpPr>
-        <p:cNvPr id="1" name=""/>
-        <p:cNvGrpSpPr/>
-        <p:nvPr/>
-      </p:nvGrpSpPr>
-      <p:grpSpPr/>
-      <p:pic>
-        <p:nvPicPr>
-          <p:cNvPr id="2" name="Picture 1" descr="rteu_logo_kucuk.jpg"/>
-          <p:cNvPicPr>
-            <a:picLocks noChangeAspect="1"/>
-          </p:cNvPicPr>
-          <p:nvPr/>
-        </p:nvPicPr>
-        <p:blipFill>
-          <a:blip r:embed="rId2"/>
-          <a:stretch>
-            <a:fillRect/>
-          </a:stretch>
-        </p:blipFill>
-        <p:spPr>
-          <a:xfrm>
-            <a:off x="640080" y="164592"/>
-            <a:ext cx="242773" cy="329184"/>
-          </a:xfrm>
-          <a:prstGeom prst="rect">
-            <a:avLst/>
-          </a:prstGeom>
-        </p:spPr>
-      </p:pic>
-      <p:sp>
-        <p:nvSpPr>
-          <p:cNvPr id="3" name="TextBox 2"/>
-          <p:cNvSpPr txBox="1"/>
-          <p:nvPr/>
-        </p:nvSpPr>
-        <p:spPr>
-          <a:xfrm>
-            <a:off x="1051560" y="182880"/>
-            <a:ext cx="7315200" cy="320040"/>
-          </a:xfrm>
-          <a:prstGeom prst="rect">
-            <a:avLst/>
-          </a:prstGeom>
-          <a:noFill/>
-        </p:spPr>
-        <p:txBody>
-          <a:bodyPr wrap="square" lIns="45720" rIns="45720">
-            <a:spAutoFit/>
-          </a:bodyPr>
-          <a:lstStyle/>
-          <a:p>
-            <a:r>
-              <a:rPr sz="1100" b="0">
-                <a:solidFill>
-                  <a:srgbClr val="5B6770"/>
-                </a:solidFill>
-              </a:rPr>
-              <a:t>CEN429 Güvenli Programlama · Hafta 15</a:t>
-            </a:r>
-          </a:p>
-        </p:txBody>
-      </p:sp>
-      <p:sp>
-        <p:nvSpPr>
-          <p:cNvPr id="4" name="TextBox 3"/>
-          <p:cNvSpPr txBox="1"/>
-          <p:nvPr/>
-        </p:nvSpPr>
-        <p:spPr>
-          <a:xfrm>
-            <a:off x="640080" y="6446520"/>
-            <a:ext cx="7315200" cy="274320"/>
-          </a:xfrm>
-          <a:prstGeom prst="rect">
-            <a:avLst/>
-          </a:prstGeom>
-          <a:noFill/>
-        </p:spPr>
-        <p:txBody>
-          <a:bodyPr wrap="square" lIns="45720" rIns="45720">
-            <a:spAutoFit/>
-          </a:bodyPr>
-          <a:lstStyle/>
-          <a:p>
-            <a:r>
-              <a:rPr sz="1000" b="0">
-                <a:solidFill>
-                  <a:srgbClr val="5B6770"/>
-                </a:solidFill>
-              </a:rPr>
-              <a:t>RTEÜ Bilgisayar Mühendisliği · 2026-2027 Güz</a:t>
-            </a:r>
-          </a:p>
-        </p:txBody>
-      </p:sp>
-      <p:sp>
-        <p:nvSpPr>
-          <p:cNvPr id="5" name="TextBox 4"/>
-          <p:cNvSpPr txBox="1"/>
-          <p:nvPr/>
-        </p:nvSpPr>
-        <p:spPr>
-          <a:xfrm>
-            <a:off x="10637215" y="6446520"/>
-            <a:ext cx="914400" cy="274320"/>
-          </a:xfrm>
-          <a:prstGeom prst="rect">
-            <a:avLst/>
-          </a:prstGeom>
-          <a:noFill/>
-        </p:spPr>
-        <p:txBody>
-          <a:bodyPr wrap="square" lIns="45720" rIns="45720">
-            <a:spAutoFit/>
-          </a:bodyPr>
-          <a:lstStyle/>
-          <a:p>
-            <a:pPr algn="r"/>
-            <a:r>
-              <a:rPr sz="1000" b="0">
-                <a:solidFill>
-                  <a:srgbClr val="5B6770"/>
-                </a:solidFill>
-              </a:rPr>
-              <a:t>38</a:t>
-            </a:r>
-          </a:p>
-        </p:txBody>
-      </p:sp>
-      <p:sp>
-        <p:nvSpPr>
-          <p:cNvPr id="6" name="TextBox 5"/>
-          <p:cNvSpPr txBox="1"/>
-          <p:nvPr/>
-        </p:nvSpPr>
-        <p:spPr>
-          <a:xfrm>
-            <a:off x="640080" y="548640"/>
-            <a:ext cx="10911535" cy="731520"/>
-          </a:xfrm>
-          <a:prstGeom prst="rect">
-            <a:avLst/>
-          </a:prstGeom>
-          <a:noFill/>
-        </p:spPr>
-        <p:txBody>
-          <a:bodyPr wrap="square" lIns="45720" rIns="45720" anchor="ctr">
-            <a:spAutoFit/>
-          </a:bodyPr>
-          <a:lstStyle/>
-          <a:p>
-            <a:r>
-              <a:rPr sz="3000" b="1">
-                <a:solidFill>
-                  <a:srgbClr val="006D77"/>
-                </a:solidFill>
-              </a:rPr>
-              <a:t>Son söz (RAP2)</a:t>
-            </a:r>
-          </a:p>
-        </p:txBody>
-      </p:sp>
-      <p:sp>
-        <p:nvSpPr>
-          <p:cNvPr id="7" name="Rectangle 6"/>
-          <p:cNvSpPr/>
-          <p:nvPr/>
-        </p:nvSpPr>
-        <p:spPr>
-          <a:xfrm>
-            <a:off x="640080" y="1325880"/>
-            <a:ext cx="10911535" cy="934719"/>
-          </a:xfrm>
-          <a:prstGeom prst="rect">
-            <a:avLst/>
-          </a:prstGeom>
-          <a:solidFill>
-            <a:srgbClr val="EEF7F8"/>
-          </a:solidFill>
-          <a:ln>
-            <a:solidFill>
-              <a:srgbClr val="006D77"/>
-            </a:solidFill>
-          </a:ln>
-        </p:spPr>
-        <p:style>
-          <a:lnRef idx="1">
-            <a:schemeClr val="accent1"/>
-          </a:lnRef>
-          <a:fillRef idx="3">
-            <a:schemeClr val="accent1"/>
-          </a:fillRef>
-          <a:effectRef idx="2">
-            <a:schemeClr val="accent1"/>
-          </a:effectRef>
-          <a:fontRef idx="minor">
-            <a:schemeClr val="lt1"/>
-          </a:fontRef>
-        </p:style>
-        <p:txBody>
-          <a:bodyPr rtlCol="0" anchor="ctr" wrap="square" lIns="182880"/>
-          <a:lstStyle/>
-          <a:p>
-            <a:pPr algn="l"/>
-            <a:r>
-              <a:rPr sz="2000" b="0">
-                <a:solidFill>
-                  <a:srgbClr val="1F2D3A"/>
-                </a:solidFill>
-              </a:rPr>
-              <a:t>Finalde </a:t>
-            </a:r>
-            <a:r>
-              <a:rPr sz="2000" b="1">
-                <a:solidFill>
-                  <a:srgbClr val="1F2D3A"/>
-                </a:solidFill>
-              </a:rPr>
-              <a:t>sonuç</a:t>
-            </a:r>
-            <a:r>
-              <a:rPr sz="2000" b="0">
-                <a:solidFill>
-                  <a:srgbClr val="1F2D3A"/>
-                </a:solidFill>
-              </a:rPr>
-              <a:t> beklenir: her koruma çalışırken gösterilir, her gereksinim kanıtla bağlanır.</a:t>
-            </a:r>
-          </a:p>
-        </p:txBody>
-      </p:sp>
-      <p:sp>
-        <p:nvSpPr>
-          <p:cNvPr id="8" name="TextBox 7"/>
-          <p:cNvSpPr txBox="1"/>
-          <p:nvPr/>
-        </p:nvSpPr>
-        <p:spPr>
-          <a:xfrm>
-            <a:off x="640080" y="2370328"/>
-            <a:ext cx="10911535" cy="770128"/>
-          </a:xfrm>
-          <a:prstGeom prst="rect">
-            <a:avLst/>
-          </a:prstGeom>
-          <a:noFill/>
-        </p:spPr>
-        <p:txBody>
-          <a:bodyPr wrap="square" lIns="45720" rIns="45720">
-            <a:spAutoFit/>
-          </a:bodyPr>
-          <a:lstStyle/>
-          <a:p>
-            <a:pPr algn="l"/>
-            <a:r>
-              <a:rPr sz="2000" b="0">
-                <a:solidFill>
-                  <a:srgbClr val="1F2D3A"/>
-                </a:solidFill>
-              </a:rPr>
-              <a:t>Kılavuzunuz sertifikasyon belgelerinin küçük bir modelidir; bir </a:t>
-            </a:r>
-            <a:r>
-              <a:rPr sz="2000" b="1">
-                <a:solidFill>
-                  <a:srgbClr val="1F2D3A"/>
-                </a:solidFill>
-              </a:rPr>
-              <a:t>portfolyo</a:t>
-            </a:r>
-            <a:r>
-              <a:rPr sz="2000" b="0">
-                <a:solidFill>
-                  <a:srgbClr val="1F2D3A"/>
-                </a:solidFill>
-              </a:rPr>
-              <a:t> öğesidir.</a:t>
-            </a:r>
-          </a:p>
-        </p:txBody>
-      </p:sp>
-    </p:spTree>
-  </p:cSld>
-  <p:clrMapOvr>
-    <a:masterClrMapping/>
-  </p:clrMapOvr>
-</p:sld>
-</file>
-
-<file path=ppt/slides/slide4.xml><?xml version="1.0" encoding="utf-8"?>
-<p:sld xmlns:a="http://schemas.openxmlformats.org/drawingml/2006/main" xmlns:p="http://schemas.openxmlformats.org/presentationml/2006/main" xmlns:r="http://schemas.openxmlformats.org/officeDocument/2006/relationships">
-  <p:cSld>
-    <p:spTree>
-      <p:nvGrpSpPr>
-        <p:cNvPr id="1" name=""/>
-        <p:cNvGrpSpPr/>
-        <p:nvPr/>
-      </p:nvGrpSpPr>
-      <p:grpSpPr/>
-      <p:pic>
-        <p:nvPicPr>
-          <p:cNvPr id="2" name="Picture 1" descr="rteu_logo_kucuk.jpg"/>
-          <p:cNvPicPr>
-            <a:picLocks noChangeAspect="1"/>
-          </p:cNvPicPr>
-          <p:nvPr/>
-        </p:nvPicPr>
-        <p:blipFill>
-          <a:blip r:embed="rId2"/>
-          <a:stretch>
-            <a:fillRect/>
-          </a:stretch>
-        </p:blipFill>
-        <p:spPr>
-          <a:xfrm>
-            <a:off x="640080" y="164592"/>
-            <a:ext cx="242773" cy="329184"/>
-          </a:xfrm>
-          <a:prstGeom prst="rect">
-            <a:avLst/>
-          </a:prstGeom>
-        </p:spPr>
-      </p:pic>
-      <p:sp>
-        <p:nvSpPr>
-          <p:cNvPr id="3" name="TextBox 2"/>
-          <p:cNvSpPr txBox="1"/>
-          <p:nvPr/>
-        </p:nvSpPr>
-        <p:spPr>
-          <a:xfrm>
-            <a:off x="1051560" y="182880"/>
-            <a:ext cx="7315200" cy="320040"/>
-          </a:xfrm>
-          <a:prstGeom prst="rect">
-            <a:avLst/>
-          </a:prstGeom>
-          <a:noFill/>
-        </p:spPr>
-        <p:txBody>
-          <a:bodyPr wrap="square" lIns="45720" rIns="45720">
-            <a:spAutoFit/>
-          </a:bodyPr>
-          <a:lstStyle/>
-          <a:p>
-            <a:r>
-              <a:rPr sz="1100" b="0">
-                <a:solidFill>
-                  <a:srgbClr val="5B6770"/>
-                </a:solidFill>
-              </a:rPr>
-              <a:t>CEN429 Güvenli Programlama · Hafta 15</a:t>
-            </a:r>
-          </a:p>
-        </p:txBody>
-      </p:sp>
-      <p:sp>
-        <p:nvSpPr>
-          <p:cNvPr id="4" name="TextBox 3"/>
-          <p:cNvSpPr txBox="1"/>
-          <p:nvPr/>
-        </p:nvSpPr>
-        <p:spPr>
-          <a:xfrm>
-            <a:off x="640080" y="6446520"/>
-            <a:ext cx="7315200" cy="274320"/>
-          </a:xfrm>
-          <a:prstGeom prst="rect">
-            <a:avLst/>
-          </a:prstGeom>
-          <a:noFill/>
-        </p:spPr>
-        <p:txBody>
-          <a:bodyPr wrap="square" lIns="45720" rIns="45720">
-            <a:spAutoFit/>
-          </a:bodyPr>
-          <a:lstStyle/>
-          <a:p>
-            <a:r>
-              <a:rPr sz="1000" b="0">
-                <a:solidFill>
-                  <a:srgbClr val="5B6770"/>
-                </a:solidFill>
-              </a:rPr>
-              <a:t>RTEÜ Bilgisayar Mühendisliği · 2026-2027 Güz</a:t>
-            </a:r>
-          </a:p>
-        </p:txBody>
-      </p:sp>
-      <p:sp>
-        <p:nvSpPr>
-          <p:cNvPr id="5" name="TextBox 4"/>
-          <p:cNvSpPr txBox="1"/>
-          <p:nvPr/>
-        </p:nvSpPr>
-        <p:spPr>
-          <a:xfrm>
-            <a:off x="10637215" y="6446520"/>
-            <a:ext cx="914400" cy="274320"/>
-          </a:xfrm>
-          <a:prstGeom prst="rect">
-            <a:avLst/>
-          </a:prstGeom>
-          <a:noFill/>
-        </p:spPr>
-        <p:txBody>
-          <a:bodyPr wrap="square" lIns="45720" rIns="45720">
-            <a:spAutoFit/>
-          </a:bodyPr>
-          <a:lstStyle/>
-          <a:p>
-            <a:pPr algn="r"/>
-            <a:r>
-              <a:rPr sz="1000" b="0">
-                <a:solidFill>
-                  <a:srgbClr val="5B6770"/>
-                </a:solidFill>
-              </a:rPr>
-              <a:t>4</a:t>
-            </a:r>
-          </a:p>
-        </p:txBody>
-      </p:sp>
-      <p:sp>
-        <p:nvSpPr>
-          <p:cNvPr id="6" name="TextBox 5"/>
-          <p:cNvSpPr txBox="1"/>
-          <p:nvPr/>
-        </p:nvSpPr>
-        <p:spPr>
-          <a:xfrm>
-            <a:off x="640080" y="548640"/>
-            <a:ext cx="10911535" cy="731520"/>
-          </a:xfrm>
-          <a:prstGeom prst="rect">
-            <a:avLst/>
-          </a:prstGeom>
-          <a:noFill/>
-        </p:spPr>
-        <p:txBody>
-          <a:bodyPr wrap="square" lIns="45720" rIns="45720" anchor="ctr">
-            <a:spAutoFit/>
-          </a:bodyPr>
-          <a:lstStyle/>
-          <a:p>
-            <a:r>
-              <a:rPr sz="3000" b="1">
-                <a:solidFill>
-                  <a:srgbClr val="006D77"/>
-                </a:solidFill>
-              </a:rPr>
-              <a:t>Kılavuz haritası S0–S17 — şema</a:t>
-            </a:r>
-          </a:p>
-        </p:txBody>
-      </p:sp>
-      <p:pic>
-        <p:nvPicPr>
-          <p:cNvPr id="7" name="Picture 6" descr="h15-02-kilavuz-haritasi.png"/>
-          <p:cNvPicPr>
-            <a:picLocks noChangeAspect="1"/>
-          </p:cNvPicPr>
-          <p:nvPr/>
-        </p:nvPicPr>
-        <p:blipFill>
-          <a:blip r:embed="rId3"/>
-          <a:stretch>
-            <a:fillRect/>
-          </a:stretch>
-        </p:blipFill>
-        <p:spPr>
-          <a:xfrm>
-            <a:off x="2187499" y="1325880"/>
-            <a:ext cx="7816696" cy="4937760"/>
-          </a:xfrm>
-          <a:prstGeom prst="rect">
-            <a:avLst/>
-          </a:prstGeom>
-        </p:spPr>
-      </p:pic>
-    </p:spTree>
-  </p:cSld>
-  <p:clrMapOvr>
-    <a:masterClrMapping/>
-  </p:clrMapOvr>
-</p:sld>
-</file>
-
 <file path=ppt/slides/slide5.xml><?xml version="1.0" encoding="utf-8"?>
 <p:sld xmlns:a="http://schemas.openxmlformats.org/drawingml/2006/main" xmlns:p="http://schemas.openxmlformats.org/presentationml/2006/main" xmlns:r="http://schemas.openxmlformats.org/officeDocument/2006/relationships">
   <p:cSld>
@@ -13128,14 +7308,14 @@
                   <a:srgbClr val="006D77"/>
                 </a:solidFill>
               </a:rPr>
-              <a:t>RAP2 teslimi — şema</a:t>
+              <a:t>Kılavuz haritası S0–S17 — şema</a:t>
             </a:r>
           </a:p>
         </p:txBody>
       </p:sp>
       <p:pic>
         <p:nvPicPr>
-          <p:cNvPr id="7" name="Picture 6" descr="h15-01-rap2.png"/>
+          <p:cNvPr id="7" name="Picture 6" descr="h15-02-kilavuz-haritasi.png"/>
           <p:cNvPicPr>
             <a:picLocks noChangeAspect="1"/>
           </p:cNvPicPr>
@@ -13149,8 +7329,8 @@
         </p:blipFill>
         <p:spPr>
           <a:xfrm>
-            <a:off x="2046645" y="1325880"/>
-            <a:ext cx="8098404" cy="3778947"/>
+            <a:off x="2868851" y="1325880"/>
+            <a:ext cx="6453993" cy="4828032"/>
           </a:xfrm>
           <a:prstGeom prst="rect">
             <a:avLst/>
@@ -13822,7 +8002,7 @@
         <p:spPr>
           <a:xfrm>
             <a:off x="640080" y="1325880"/>
-            <a:ext cx="10911535" cy="1971040"/>
+            <a:ext cx="10911535" cy="2631440"/>
           </a:xfrm>
           <a:prstGeom prst="rect">
             <a:avLst/>
@@ -13893,7 +8073,7 @@
                   <a:srgbClr val="1F2D3A"/>
                 </a:solidFill>
               </a:rPr>
-              <a:t> bulgu–aksiyon listesi</a:t>
+              <a:t> bulgu–aksiyon listesi (bulgu → aksiyon → kapanış; değerlendirici bu döngüyü arar)</a:t>
             </a:r>
           </a:p>
           <a:p>
@@ -13933,6 +8113,14 @@
                 </a:solidFill>
               </a:rPr>
               <a:t>çalışırken</a:t>
+            </a:r>
+            <a:r>
+              <a:rPr sz="2000" b="0">
+                <a:solidFill>
+                  <a:srgbClr val="1F2D3A"/>
+                </a:solidFill>
+              </a:rPr>
+              <a:t> (ör. kurcalanmış dosyanın reddi)</a:t>
             </a:r>
           </a:p>
           <a:p>
@@ -14190,8 +8378,8 @@
         </p:blipFill>
         <p:spPr>
           <a:xfrm>
-            <a:off x="2046645" y="1325880"/>
-            <a:ext cx="8098404" cy="3210484"/>
+            <a:off x="640080" y="1325880"/>
+            <a:ext cx="10911535" cy="2726616"/>
           </a:xfrm>
           <a:prstGeom prst="rect">
             <a:avLst/>
